--- a/lesson_7/applicability-domain_model-comparison_supplement_2026_07_07.pptx
+++ b/lesson_7/applicability-domain_model-comparison_supplement_2026_07_07.pptx
@@ -5,21 +5,21 @@
     <p:sldMasterId id="2147483648" r:id="rId1"/>
   </p:sldMasterIdLst>
   <p:notesMasterIdLst>
-    <p:notesMasterId r:id="rId30"/>
+    <p:notesMasterId r:id="rId14"/>
   </p:notesMasterIdLst>
   <p:sldIdLst>
-    <p:sldId id="256" r:id="rId7"/>
-    <p:sldId id="257" r:id="rId8"/>
-    <p:sldId id="258" r:id="rId9"/>
-    <p:sldId id="259" r:id="rId10"/>
-    <p:sldId id="260" r:id="rId11"/>
-    <p:sldId id="261" r:id="rId12"/>
-    <p:sldId id="262" r:id="rId13"/>
-    <p:sldId id="263" r:id="rId14"/>
-    <p:sldId id="264" r:id="rId15"/>
-    <p:sldId id="265" r:id="rId16"/>
-    <p:sldId id="266" r:id="rId17"/>
-    <p:sldId id="267" r:id="rId18"/>
+    <p:sldId id="256" r:id="rId2"/>
+    <p:sldId id="257" r:id="rId3"/>
+    <p:sldId id="258" r:id="rId4"/>
+    <p:sldId id="259" r:id="rId5"/>
+    <p:sldId id="260" r:id="rId6"/>
+    <p:sldId id="261" r:id="rId7"/>
+    <p:sldId id="262" r:id="rId8"/>
+    <p:sldId id="263" r:id="rId9"/>
+    <p:sldId id="264" r:id="rId10"/>
+    <p:sldId id="265" r:id="rId11"/>
+    <p:sldId id="266" r:id="rId12"/>
+    <p:sldId id="267" r:id="rId13"/>
   </p:sldIdLst>
   <p:sldSz cx="9144000" cy="6858000" type="screen4x3"/>
   <p:notesSz cx="6858000" cy="9144000"/>
@@ -3280,7 +3280,7 @@
 </file>
 
 <file path=ppt/slides/slide1.xml><?xml version="1.0" encoding="utf-8"?>
-<p:sld xmlns:a="http://schemas.openxmlformats.org/drawingml/2006/main" xmlns:p="http://schemas.openxmlformats.org/presentationml/2006/main" xmlns:r="http://schemas.openxmlformats.org/officeDocument/2006/relationships">
+<p:sld xmlns:a="http://schemas.openxmlformats.org/drawingml/2006/main" xmlns:r="http://schemas.openxmlformats.org/officeDocument/2006/relationships" xmlns:p="http://schemas.openxmlformats.org/presentationml/2006/main">
   <p:cSld>
     <p:spTree>
       <p:nvGrpSpPr>
@@ -3288,7 +3288,14 @@
         <p:cNvGrpSpPr/>
         <p:nvPr/>
       </p:nvGrpSpPr>
-      <p:grpSpPr/>
+      <p:grpSpPr>
+        <a:xfrm>
+          <a:off x="0" y="0"/>
+          <a:ext cx="0" cy="0"/>
+          <a:chOff x="0" y="0"/>
+          <a:chExt cx="0" cy="0"/>
+        </a:xfrm>
+      </p:grpSpPr>
       <p:sp>
         <p:nvSpPr>
           <p:cNvPr id="2" name="TextBox 1"/>
@@ -3306,7 +3313,7 @@
           <a:noFill/>
         </p:spPr>
         <p:txBody>
-          <a:bodyPr wrap="square" anchor="t" lIns="0" rIns="0" tIns="0" bIns="0">
+          <a:bodyPr wrap="square" lIns="0" tIns="0" rIns="0" bIns="0" anchor="t">
             <a:spAutoFit/>
           </a:bodyPr>
           <a:lstStyle/>
@@ -3350,7 +3357,7 @@
           <a:noFill/>
         </p:spPr>
         <p:txBody>
-          <a:bodyPr wrap="square" anchor="t" lIns="0" rIns="0" tIns="0" bIns="0">
+          <a:bodyPr wrap="square" lIns="0" tIns="0" rIns="0" bIns="0" anchor="t">
             <a:spAutoFit/>
           </a:bodyPr>
           <a:lstStyle/>
@@ -3394,7 +3401,7 @@
           <a:noFill/>
         </p:spPr>
         <p:txBody>
-          <a:bodyPr wrap="square" anchor="t" lIns="0" rIns="0" tIns="0" bIns="0">
+          <a:bodyPr wrap="square" lIns="0" tIns="0" rIns="0" bIns="0" anchor="t">
             <a:spAutoFit/>
           </a:bodyPr>
           <a:lstStyle/>
@@ -3438,7 +3445,7 @@
           <a:noFill/>
         </p:spPr>
         <p:txBody>
-          <a:bodyPr wrap="square" anchor="t" lIns="0" rIns="0" tIns="0" bIns="0">
+          <a:bodyPr wrap="square" lIns="0" tIns="0" rIns="0" bIns="0" anchor="t">
             <a:spAutoFit/>
           </a:bodyPr>
           <a:lstStyle/>
@@ -3482,7 +3489,7 @@
           <a:noFill/>
         </p:spPr>
         <p:txBody>
-          <a:bodyPr wrap="square" anchor="t" lIns="0" rIns="0" tIns="0" bIns="0">
+          <a:bodyPr wrap="square" lIns="0" tIns="0" rIns="0" bIns="0" anchor="t">
             <a:spAutoFit/>
           </a:bodyPr>
           <a:lstStyle/>
@@ -3518,7 +3525,7 @@
 </file>
 
 <file path=ppt/slides/slide10.xml><?xml version="1.0" encoding="utf-8"?>
-<p:sld xmlns:a="http://schemas.openxmlformats.org/drawingml/2006/main" xmlns:p="http://schemas.openxmlformats.org/presentationml/2006/main" xmlns:r="http://schemas.openxmlformats.org/officeDocument/2006/relationships">
+<p:sld xmlns:a="http://schemas.openxmlformats.org/drawingml/2006/main" xmlns:r="http://schemas.openxmlformats.org/officeDocument/2006/relationships" xmlns:p="http://schemas.openxmlformats.org/presentationml/2006/main">
   <p:cSld>
     <p:spTree>
       <p:nvGrpSpPr>
@@ -3526,7 +3533,14 @@
         <p:cNvGrpSpPr/>
         <p:nvPr/>
       </p:nvGrpSpPr>
-      <p:grpSpPr/>
+      <p:grpSpPr>
+        <a:xfrm>
+          <a:off x="0" y="0"/>
+          <a:ext cx="0" cy="0"/>
+          <a:chOff x="0" y="0"/>
+          <a:chExt cx="0" cy="0"/>
+        </a:xfrm>
+      </p:grpSpPr>
       <p:sp>
         <p:nvSpPr>
           <p:cNvPr id="2" name="TextBox 1"/>
@@ -3544,7 +3558,7 @@
           <a:noFill/>
         </p:spPr>
         <p:txBody>
-          <a:bodyPr wrap="square" anchor="t" lIns="0" rIns="0" tIns="0" bIns="0">
+          <a:bodyPr wrap="square" lIns="0" tIns="0" rIns="0" bIns="0" anchor="t">
             <a:spAutoFit/>
           </a:bodyPr>
           <a:lstStyle/>
@@ -3613,6 +3627,7 @@
           <a:lstStyle/>
           <a:p>
             <a:pPr algn="ctr"/>
+            <a:endParaRPr/>
           </a:p>
         </p:txBody>
       </p:sp>
@@ -3658,6 +3673,7 @@
           <a:lstStyle/>
           <a:p>
             <a:pPr algn="ctr"/>
+            <a:endParaRPr/>
           </a:p>
         </p:txBody>
       </p:sp>
@@ -3693,8 +3709,8 @@
         </p:nvSpPr>
         <p:spPr>
           <a:xfrm>
-            <a:off x="5623560" y="1170432"/>
-            <a:ext cx="2880360" cy="3063240"/>
+            <a:off x="5623559" y="1170432"/>
+            <a:ext cx="3339687" cy="2597249"/>
           </a:xfrm>
           <a:prstGeom prst="rect">
             <a:avLst/>
@@ -3702,7 +3718,7 @@
           <a:noFill/>
         </p:spPr>
         <p:txBody>
-          <a:bodyPr wrap="square" anchor="t" lIns="27432" rIns="27432" tIns="27432" bIns="27432">
+          <a:bodyPr wrap="square" lIns="27432" tIns="27432" rIns="27432" bIns="27432" anchor="t">
             <a:spAutoFit/>
           </a:bodyPr>
           <a:lstStyle/>
@@ -3745,8 +3761,16 @@
                 <a:ea typeface="メイリオ"/>
                 <a:cs typeface="Times New Roman"/>
               </a:rPr>
-              <a:t>・ AD外点は全モデルで同じサンプル</a:t>
-            </a:r>
+              <a:t>・ AD外点は全モデルで同じ</a:t>
+            </a:r>
+            <a:endParaRPr lang="en-US" sz="1800" b="0">
+              <a:solidFill>
+                <a:srgbClr val="000000"/>
+              </a:solidFill>
+              <a:latin typeface="Times New Roman"/>
+              <a:ea typeface="メイリオ"/>
+              <a:cs typeface="Times New Roman"/>
+            </a:endParaRPr>
           </a:p>
           <a:p>
             <a:pPr algn="l">
@@ -3766,7 +3790,86 @@
                 <a:ea typeface="メイリオ"/>
                 <a:cs typeface="Times New Roman"/>
               </a:rPr>
-              <a:t>・ モデルごとに、AD外点がどちら側へ外れるかを確認できる</a:t>
+              <a:t>サンプル</a:t>
+            </a:r>
+          </a:p>
+          <a:p>
+            <a:pPr algn="l">
+              <a:lnSpc>
+                <a:spcPct val="108000"/>
+              </a:lnSpc>
+              <a:spcAft>
+                <a:spcPts val="200"/>
+              </a:spcAft>
+            </a:pPr>
+            <a:r>
+              <a:rPr sz="1800" b="0">
+                <a:solidFill>
+                  <a:srgbClr val="000000"/>
+                </a:solidFill>
+                <a:latin typeface="Times New Roman"/>
+                <a:ea typeface="メイリオ"/>
+                <a:cs typeface="Times New Roman"/>
+              </a:rPr>
+              <a:t>・ モデルごとに、AD外点が</a:t>
+            </a:r>
+            <a:endParaRPr lang="en-US" sz="1800" b="0">
+              <a:solidFill>
+                <a:srgbClr val="000000"/>
+              </a:solidFill>
+              <a:latin typeface="Times New Roman"/>
+              <a:ea typeface="メイリオ"/>
+              <a:cs typeface="Times New Roman"/>
+            </a:endParaRPr>
+          </a:p>
+          <a:p>
+            <a:pPr algn="l">
+              <a:lnSpc>
+                <a:spcPct val="108000"/>
+              </a:lnSpc>
+              <a:spcAft>
+                <a:spcPts val="200"/>
+              </a:spcAft>
+            </a:pPr>
+            <a:r>
+              <a:rPr sz="1800" b="0">
+                <a:solidFill>
+                  <a:srgbClr val="000000"/>
+                </a:solidFill>
+                <a:latin typeface="Times New Roman"/>
+                <a:ea typeface="メイリオ"/>
+                <a:cs typeface="Times New Roman"/>
+              </a:rPr>
+              <a:t>どちら側へ外れるかを確認</a:t>
+            </a:r>
+            <a:endParaRPr lang="en-US" sz="1800" b="0">
+              <a:solidFill>
+                <a:srgbClr val="000000"/>
+              </a:solidFill>
+              <a:latin typeface="Times New Roman"/>
+              <a:ea typeface="メイリオ"/>
+              <a:cs typeface="Times New Roman"/>
+            </a:endParaRPr>
+          </a:p>
+          <a:p>
+            <a:pPr algn="l">
+              <a:lnSpc>
+                <a:spcPct val="108000"/>
+              </a:lnSpc>
+              <a:spcAft>
+                <a:spcPts val="200"/>
+              </a:spcAft>
+            </a:pPr>
+            <a:r>
+              <a:rPr sz="1800" b="0">
+                <a:solidFill>
+                  <a:srgbClr val="000000"/>
+                </a:solidFill>
+                <a:latin typeface="Times New Roman"/>
+                <a:ea typeface="メイリオ"/>
+                <a:cs typeface="Times New Roman"/>
+              </a:rPr>
+              <a:t>できる</a:t>
             </a:r>
           </a:p>
           <a:p>
@@ -3801,7 +3904,7 @@
         <p:spPr>
           <a:xfrm>
             <a:off x="5623560" y="4608576"/>
-            <a:ext cx="2880360" cy="640080"/>
+            <a:ext cx="3108960" cy="928972"/>
           </a:xfrm>
           <a:prstGeom prst="rect">
             <a:avLst/>
@@ -3809,7 +3912,7 @@
           <a:noFill/>
         </p:spPr>
         <p:txBody>
-          <a:bodyPr wrap="square" anchor="t" lIns="18288" rIns="18288" tIns="18288" bIns="18288">
+          <a:bodyPr wrap="square" lIns="18288" tIns="18288" rIns="18288" bIns="18288" anchor="t">
             <a:spAutoFit/>
           </a:bodyPr>
           <a:lstStyle/>
@@ -3853,7 +3956,7 @@
           <a:noFill/>
         </p:spPr>
         <p:txBody>
-          <a:bodyPr wrap="square" anchor="t" lIns="0" rIns="0" tIns="0" bIns="0">
+          <a:bodyPr wrap="square" lIns="0" tIns="0" rIns="0" bIns="0" anchor="t">
             <a:spAutoFit/>
           </a:bodyPr>
           <a:lstStyle/>
@@ -3889,7 +3992,7 @@
 </file>
 
 <file path=ppt/slides/slide11.xml><?xml version="1.0" encoding="utf-8"?>
-<p:sld xmlns:a="http://schemas.openxmlformats.org/drawingml/2006/main" xmlns:p="http://schemas.openxmlformats.org/presentationml/2006/main" xmlns:r="http://schemas.openxmlformats.org/officeDocument/2006/relationships">
+<p:sld xmlns:a="http://schemas.openxmlformats.org/drawingml/2006/main" xmlns:r="http://schemas.openxmlformats.org/officeDocument/2006/relationships" xmlns:p="http://schemas.openxmlformats.org/presentationml/2006/main">
   <p:cSld>
     <p:spTree>
       <p:nvGrpSpPr>
@@ -3897,7 +4000,14 @@
         <p:cNvGrpSpPr/>
         <p:nvPr/>
       </p:nvGrpSpPr>
-      <p:grpSpPr/>
+      <p:grpSpPr>
+        <a:xfrm>
+          <a:off x="0" y="0"/>
+          <a:ext cx="0" cy="0"/>
+          <a:chOff x="0" y="0"/>
+          <a:chExt cx="0" cy="0"/>
+        </a:xfrm>
+      </p:grpSpPr>
       <p:sp>
         <p:nvSpPr>
           <p:cNvPr id="2" name="TextBox 1"/>
@@ -3915,7 +4025,7 @@
           <a:noFill/>
         </p:spPr>
         <p:txBody>
-          <a:bodyPr wrap="square" lIns="27432" rIns="27432" tIns="18288" bIns="18288"/>
+          <a:bodyPr wrap="square" lIns="27432" tIns="18288" rIns="27432" bIns="18288"/>
           <a:lstStyle/>
           <a:p>
             <a:pPr algn="l">
@@ -3980,6 +4090,7 @@
           <a:lstStyle/>
           <a:p>
             <a:pPr algn="ctr"/>
+            <a:endParaRPr/>
           </a:p>
         </p:txBody>
       </p:sp>
@@ -3989,11 +4100,17 @@
           <p:cNvGraphicFramePr>
             <a:graphicFrameLocks noGrp="1"/>
           </p:cNvGraphicFramePr>
-          <p:nvPr/>
+          <p:nvPr>
+            <p:extLst>
+              <p:ext uri="{D42A27DB-BD31-4B8C-83A1-F6EECF244321}">
+                <p14:modId xmlns:p14="http://schemas.microsoft.com/office/powerpoint/2010/main" val="207556906"/>
+              </p:ext>
+            </p:extLst>
+          </p:nvPr>
         </p:nvGraphicFramePr>
         <p:xfrm>
           <a:off x="411480" y="1170432"/>
-          <a:ext cx="8321040" cy="2560320"/>
+          <a:ext cx="8321040" cy="2596896"/>
         </p:xfrm>
         <a:graphic>
           <a:graphicData uri="http://schemas.openxmlformats.org/drawingml/2006/table">
@@ -4002,16 +4119,46 @@
                 <a:tableStyleId>{5C22544A-7EE6-4342-B048-85BDC9FD1C3A}</a:tableStyleId>
               </a:tblPr>
               <a:tblGrid>
-                <a:gridCol w="1325880"/>
-                <a:gridCol w="960120"/>
-                <a:gridCol w="1005840"/>
-                <a:gridCol w="2514600"/>
-                <a:gridCol w="2514600"/>
+                <a:gridCol w="1325880">
+                  <a:extLst>
+                    <a:ext uri="{9D8B030D-6E8A-4147-A177-3AD203B41FA5}">
+                      <a16:colId xmlns:a16="http://schemas.microsoft.com/office/drawing/2014/main" val="20000"/>
+                    </a:ext>
+                  </a:extLst>
+                </a:gridCol>
+                <a:gridCol w="960120">
+                  <a:extLst>
+                    <a:ext uri="{9D8B030D-6E8A-4147-A177-3AD203B41FA5}">
+                      <a16:colId xmlns:a16="http://schemas.microsoft.com/office/drawing/2014/main" val="20001"/>
+                    </a:ext>
+                  </a:extLst>
+                </a:gridCol>
+                <a:gridCol w="1005840">
+                  <a:extLst>
+                    <a:ext uri="{9D8B030D-6E8A-4147-A177-3AD203B41FA5}">
+                      <a16:colId xmlns:a16="http://schemas.microsoft.com/office/drawing/2014/main" val="20002"/>
+                    </a:ext>
+                  </a:extLst>
+                </a:gridCol>
+                <a:gridCol w="2514600">
+                  <a:extLst>
+                    <a:ext uri="{9D8B030D-6E8A-4147-A177-3AD203B41FA5}">
+                      <a16:colId xmlns:a16="http://schemas.microsoft.com/office/drawing/2014/main" val="20003"/>
+                    </a:ext>
+                  </a:extLst>
+                </a:gridCol>
+                <a:gridCol w="2514600">
+                  <a:extLst>
+                    <a:ext uri="{9D8B030D-6E8A-4147-A177-3AD203B41FA5}">
+                      <a16:colId xmlns:a16="http://schemas.microsoft.com/office/drawing/2014/main" val="20004"/>
+                    </a:ext>
+                  </a:extLst>
+                </a:gridCol>
               </a:tblGrid>
               <a:tr h="548640">
                 <a:tc>
                   <a:txBody>
-                    <a:bodyPr wrap="square" lIns="27432" rIns="27432" tIns="18288" bIns="18288" anchor="ctr"/>
+                    <a:bodyPr/>
                     <a:lstStyle/>
                     <a:p>
                       <a:pPr algn="ctr">
@@ -4035,7 +4182,7 @@
                       </a:r>
                     </a:p>
                   </a:txBody>
-                  <a:tcPr marL="27432" marR="27432" marT="18288" marB="18288">
+                  <a:tcPr marL="27432" marR="27432" marT="18288" marB="18288" anchor="ctr">
                     <a:solidFill>
                       <a:srgbClr val="000000"/>
                     </a:solidFill>
@@ -4043,7 +4190,7 @@
                 </a:tc>
                 <a:tc>
                   <a:txBody>
-                    <a:bodyPr wrap="square" lIns="27432" rIns="27432" tIns="18288" bIns="18288" anchor="ctr"/>
+                    <a:bodyPr/>
                     <a:lstStyle/>
                     <a:p>
                       <a:pPr algn="ctr">
@@ -4088,7 +4235,7 @@
                       </a:r>
                     </a:p>
                   </a:txBody>
-                  <a:tcPr marL="27432" marR="27432" marT="18288" marB="18288">
+                  <a:tcPr marL="27432" marR="27432" marT="18288" marB="18288" anchor="ctr">
                     <a:solidFill>
                       <a:srgbClr val="000000"/>
                     </a:solidFill>
@@ -4096,7 +4243,7 @@
                 </a:tc>
                 <a:tc>
                   <a:txBody>
-                    <a:bodyPr wrap="square" lIns="27432" rIns="27432" tIns="18288" bIns="18288" anchor="ctr"/>
+                    <a:bodyPr/>
                     <a:lstStyle/>
                     <a:p>
                       <a:pPr algn="ctr">
@@ -4141,7 +4288,7 @@
                       </a:r>
                     </a:p>
                   </a:txBody>
-                  <a:tcPr marL="27432" marR="27432" marT="18288" marB="18288">
+                  <a:tcPr marL="27432" marR="27432" marT="18288" marB="18288" anchor="ctr">
                     <a:solidFill>
                       <a:srgbClr val="000000"/>
                     </a:solidFill>
@@ -4149,7 +4296,7 @@
                 </a:tc>
                 <a:tc>
                   <a:txBody>
-                    <a:bodyPr wrap="square" lIns="27432" rIns="27432" tIns="18288" bIns="18288" anchor="ctr"/>
+                    <a:bodyPr/>
                     <a:lstStyle/>
                     <a:p>
                       <a:pPr algn="ctr">
@@ -4173,7 +4320,7 @@
                       </a:r>
                     </a:p>
                   </a:txBody>
-                  <a:tcPr marL="27432" marR="27432" marT="18288" marB="18288">
+                  <a:tcPr marL="27432" marR="27432" marT="18288" marB="18288" anchor="ctr">
                     <a:solidFill>
                       <a:srgbClr val="000000"/>
                     </a:solidFill>
@@ -4181,7 +4328,7 @@
                 </a:tc>
                 <a:tc>
                   <a:txBody>
-                    <a:bodyPr wrap="square" lIns="27432" rIns="27432" tIns="18288" bIns="18288" anchor="ctr"/>
+                    <a:bodyPr/>
                     <a:lstStyle/>
                     <a:p>
                       <a:pPr algn="ctr">
@@ -4205,20 +4352,25 @@
                       </a:r>
                     </a:p>
                   </a:txBody>
-                  <a:tcPr marL="27432" marR="27432" marT="18288" marB="18288">
+                  <a:tcPr marL="27432" marR="27432" marT="18288" marB="18288" anchor="ctr">
                     <a:solidFill>
                       <a:srgbClr val="000000"/>
                     </a:solidFill>
                   </a:tcPr>
                 </a:tc>
+                <a:extLst>
+                  <a:ext uri="{0D108BD9-81ED-4DB2-BD59-A6C34878D82A}">
+                    <a16:rowId xmlns:a16="http://schemas.microsoft.com/office/drawing/2014/main" val="10000"/>
+                  </a:ext>
+                </a:extLst>
               </a:tr>
               <a:tr h="502920">
                 <a:tc>
                   <a:txBody>
-                    <a:bodyPr wrap="square" lIns="27432" rIns="27432" tIns="18288" bIns="18288" anchor="ctr"/>
-                    <a:lstStyle/>
-                    <a:p>
-                      <a:pPr algn="l">
+                    <a:bodyPr/>
+                    <a:lstStyle/>
+                    <a:p>
+                      <a:pPr algn="ctr">
                         <a:lnSpc>
                           <a:spcPct val="100000"/>
                         </a:lnSpc>
@@ -4239,7 +4391,7 @@
                       </a:r>
                     </a:p>
                   </a:txBody>
-                  <a:tcPr marL="27432" marR="27432" marT="18288" marB="18288">
+                  <a:tcPr marL="27432" marR="27432" marT="18288" marB="18288" anchor="ctr">
                     <a:solidFill>
                       <a:srgbClr val="FFFFFF"/>
                     </a:solidFill>
@@ -4247,7 +4399,7 @@
                 </a:tc>
                 <a:tc>
                   <a:txBody>
-                    <a:bodyPr wrap="square" lIns="27432" rIns="27432" tIns="18288" bIns="18288" anchor="ctr"/>
+                    <a:bodyPr/>
                     <a:lstStyle/>
                     <a:p>
                       <a:pPr algn="ctr">
@@ -4271,7 +4423,7 @@
                       </a:r>
                     </a:p>
                   </a:txBody>
-                  <a:tcPr marL="27432" marR="27432" marT="18288" marB="18288">
+                  <a:tcPr marL="27432" marR="27432" marT="18288" marB="18288" anchor="ctr">
                     <a:solidFill>
                       <a:srgbClr val="FFFFFF"/>
                     </a:solidFill>
@@ -4279,7 +4431,7 @@
                 </a:tc>
                 <a:tc>
                   <a:txBody>
-                    <a:bodyPr wrap="square" lIns="27432" rIns="27432" tIns="18288" bIns="18288" anchor="ctr"/>
+                    <a:bodyPr/>
                     <a:lstStyle/>
                     <a:p>
                       <a:pPr algn="ctr">
@@ -4303,7 +4455,7 @@
                       </a:r>
                     </a:p>
                   </a:txBody>
-                  <a:tcPr marL="27432" marR="27432" marT="18288" marB="18288">
+                  <a:tcPr marL="27432" marR="27432" marT="18288" marB="18288" anchor="ctr">
                     <a:solidFill>
                       <a:srgbClr val="FFFFFF"/>
                     </a:solidFill>
@@ -4311,7 +4463,7 @@
                 </a:tc>
                 <a:tc>
                   <a:txBody>
-                    <a:bodyPr wrap="square" lIns="27432" rIns="27432" tIns="18288" bIns="18288" anchor="ctr"/>
+                    <a:bodyPr/>
                     <a:lstStyle/>
                     <a:p>
                       <a:pPr algn="ctr">
@@ -4335,7 +4487,7 @@
                       </a:r>
                     </a:p>
                   </a:txBody>
-                  <a:tcPr marL="27432" marR="27432" marT="18288" marB="18288">
+                  <a:tcPr marL="27432" marR="27432" marT="18288" marB="18288" anchor="ctr">
                     <a:solidFill>
                       <a:srgbClr val="FFFFFF"/>
                     </a:solidFill>
@@ -4343,7 +4495,7 @@
                 </a:tc>
                 <a:tc>
                   <a:txBody>
-                    <a:bodyPr wrap="square" lIns="27432" rIns="27432" tIns="18288" bIns="18288" anchor="ctr"/>
+                    <a:bodyPr/>
                     <a:lstStyle/>
                     <a:p>
                       <a:pPr algn="ctr">
@@ -4367,20 +4519,25 @@
                       </a:r>
                     </a:p>
                   </a:txBody>
-                  <a:tcPr marL="27432" marR="27432" marT="18288" marB="18288">
+                  <a:tcPr marL="27432" marR="27432" marT="18288" marB="18288" anchor="ctr">
                     <a:solidFill>
                       <a:srgbClr val="FFFFFF"/>
                     </a:solidFill>
                   </a:tcPr>
                 </a:tc>
+                <a:extLst>
+                  <a:ext uri="{0D108BD9-81ED-4DB2-BD59-A6C34878D82A}">
+                    <a16:rowId xmlns:a16="http://schemas.microsoft.com/office/drawing/2014/main" val="10001"/>
+                  </a:ext>
+                </a:extLst>
               </a:tr>
               <a:tr h="502920">
                 <a:tc>
                   <a:txBody>
-                    <a:bodyPr wrap="square" lIns="27432" rIns="27432" tIns="18288" bIns="18288" anchor="ctr"/>
-                    <a:lstStyle/>
-                    <a:p>
-                      <a:pPr algn="l">
+                    <a:bodyPr/>
+                    <a:lstStyle/>
+                    <a:p>
+                      <a:pPr algn="ctr">
                         <a:lnSpc>
                           <a:spcPct val="100000"/>
                         </a:lnSpc>
@@ -4401,7 +4558,7 @@
                       </a:r>
                     </a:p>
                   </a:txBody>
-                  <a:tcPr marL="27432" marR="27432" marT="18288" marB="18288">
+                  <a:tcPr marL="27432" marR="27432" marT="18288" marB="18288" anchor="ctr">
                     <a:solidFill>
                       <a:srgbClr val="F4F4F4"/>
                     </a:solidFill>
@@ -4409,7 +4566,7 @@
                 </a:tc>
                 <a:tc>
                   <a:txBody>
-                    <a:bodyPr wrap="square" lIns="27432" rIns="27432" tIns="18288" bIns="18288" anchor="ctr"/>
+                    <a:bodyPr/>
                     <a:lstStyle/>
                     <a:p>
                       <a:pPr algn="ctr">
@@ -4433,7 +4590,7 @@
                       </a:r>
                     </a:p>
                   </a:txBody>
-                  <a:tcPr marL="27432" marR="27432" marT="18288" marB="18288">
+                  <a:tcPr marL="27432" marR="27432" marT="18288" marB="18288" anchor="ctr">
                     <a:solidFill>
                       <a:srgbClr val="F4F4F4"/>
                     </a:solidFill>
@@ -4441,7 +4598,7 @@
                 </a:tc>
                 <a:tc>
                   <a:txBody>
-                    <a:bodyPr wrap="square" lIns="27432" rIns="27432" tIns="18288" bIns="18288" anchor="ctr"/>
+                    <a:bodyPr/>
                     <a:lstStyle/>
                     <a:p>
                       <a:pPr algn="ctr">
@@ -4465,7 +4622,7 @@
                       </a:r>
                     </a:p>
                   </a:txBody>
-                  <a:tcPr marL="27432" marR="27432" marT="18288" marB="18288">
+                  <a:tcPr marL="27432" marR="27432" marT="18288" marB="18288" anchor="ctr">
                     <a:solidFill>
                       <a:srgbClr val="F4F4F4"/>
                     </a:solidFill>
@@ -4473,7 +4630,7 @@
                 </a:tc>
                 <a:tc>
                   <a:txBody>
-                    <a:bodyPr wrap="square" lIns="27432" rIns="27432" tIns="18288" bIns="18288" anchor="ctr"/>
+                    <a:bodyPr/>
                     <a:lstStyle/>
                     <a:p>
                       <a:pPr algn="ctr">
@@ -4497,7 +4654,7 @@
                       </a:r>
                     </a:p>
                   </a:txBody>
-                  <a:tcPr marL="27432" marR="27432" marT="18288" marB="18288">
+                  <a:tcPr marL="27432" marR="27432" marT="18288" marB="18288" anchor="ctr">
                     <a:solidFill>
                       <a:srgbClr val="F4F4F4"/>
                     </a:solidFill>
@@ -4505,7 +4662,7 @@
                 </a:tc>
                 <a:tc>
                   <a:txBody>
-                    <a:bodyPr wrap="square" lIns="27432" rIns="27432" tIns="18288" bIns="18288" anchor="ctr"/>
+                    <a:bodyPr/>
                     <a:lstStyle/>
                     <a:p>
                       <a:pPr algn="ctr">
@@ -4529,20 +4686,25 @@
                       </a:r>
                     </a:p>
                   </a:txBody>
-                  <a:tcPr marL="27432" marR="27432" marT="18288" marB="18288">
+                  <a:tcPr marL="27432" marR="27432" marT="18288" marB="18288" anchor="ctr">
                     <a:solidFill>
                       <a:srgbClr val="F4F4F4"/>
                     </a:solidFill>
                   </a:tcPr>
                 </a:tc>
+                <a:extLst>
+                  <a:ext uri="{0D108BD9-81ED-4DB2-BD59-A6C34878D82A}">
+                    <a16:rowId xmlns:a16="http://schemas.microsoft.com/office/drawing/2014/main" val="10002"/>
+                  </a:ext>
+                </a:extLst>
               </a:tr>
               <a:tr h="502920">
                 <a:tc>
                   <a:txBody>
-                    <a:bodyPr wrap="square" lIns="27432" rIns="27432" tIns="18288" bIns="18288" anchor="ctr"/>
-                    <a:lstStyle/>
-                    <a:p>
-                      <a:pPr algn="l">
+                    <a:bodyPr/>
+                    <a:lstStyle/>
+                    <a:p>
+                      <a:pPr algn="ctr">
                         <a:lnSpc>
                           <a:spcPct val="100000"/>
                         </a:lnSpc>
@@ -4563,7 +4725,7 @@
                       </a:r>
                     </a:p>
                   </a:txBody>
-                  <a:tcPr marL="27432" marR="27432" marT="18288" marB="18288">
+                  <a:tcPr marL="27432" marR="27432" marT="18288" marB="18288" anchor="ctr">
                     <a:solidFill>
                       <a:srgbClr val="FFFFFF"/>
                     </a:solidFill>
@@ -4571,7 +4733,7 @@
                 </a:tc>
                 <a:tc>
                   <a:txBody>
-                    <a:bodyPr wrap="square" lIns="27432" rIns="27432" tIns="18288" bIns="18288" anchor="ctr"/>
+                    <a:bodyPr/>
                     <a:lstStyle/>
                     <a:p>
                       <a:pPr algn="ctr">
@@ -4595,7 +4757,7 @@
                       </a:r>
                     </a:p>
                   </a:txBody>
-                  <a:tcPr marL="27432" marR="27432" marT="18288" marB="18288">
+                  <a:tcPr marL="27432" marR="27432" marT="18288" marB="18288" anchor="ctr">
                     <a:solidFill>
                       <a:srgbClr val="FFFFFF"/>
                     </a:solidFill>
@@ -4603,7 +4765,7 @@
                 </a:tc>
                 <a:tc>
                   <a:txBody>
-                    <a:bodyPr wrap="square" lIns="27432" rIns="27432" tIns="18288" bIns="18288" anchor="ctr"/>
+                    <a:bodyPr/>
                     <a:lstStyle/>
                     <a:p>
                       <a:pPr algn="ctr">
@@ -4627,7 +4789,7 @@
                       </a:r>
                     </a:p>
                   </a:txBody>
-                  <a:tcPr marL="27432" marR="27432" marT="18288" marB="18288">
+                  <a:tcPr marL="27432" marR="27432" marT="18288" marB="18288" anchor="ctr">
                     <a:solidFill>
                       <a:srgbClr val="FFFFFF"/>
                     </a:solidFill>
@@ -4635,7 +4797,7 @@
                 </a:tc>
                 <a:tc>
                   <a:txBody>
-                    <a:bodyPr wrap="square" lIns="27432" rIns="27432" tIns="18288" bIns="18288" anchor="ctr"/>
+                    <a:bodyPr/>
                     <a:lstStyle/>
                     <a:p>
                       <a:pPr algn="ctr">
@@ -4659,7 +4821,7 @@
                       </a:r>
                     </a:p>
                   </a:txBody>
-                  <a:tcPr marL="27432" marR="27432" marT="18288" marB="18288">
+                  <a:tcPr marL="27432" marR="27432" marT="18288" marB="18288" anchor="ctr">
                     <a:solidFill>
                       <a:srgbClr val="FFFFFF"/>
                     </a:solidFill>
@@ -4667,7 +4829,7 @@
                 </a:tc>
                 <a:tc>
                   <a:txBody>
-                    <a:bodyPr wrap="square" lIns="27432" rIns="27432" tIns="18288" bIns="18288" anchor="ctr"/>
+                    <a:bodyPr/>
                     <a:lstStyle/>
                     <a:p>
                       <a:pPr algn="ctr">
@@ -4691,20 +4853,25 @@
                       </a:r>
                     </a:p>
                   </a:txBody>
-                  <a:tcPr marL="27432" marR="27432" marT="18288" marB="18288">
+                  <a:tcPr marL="27432" marR="27432" marT="18288" marB="18288" anchor="ctr">
                     <a:solidFill>
                       <a:srgbClr val="FFFFFF"/>
                     </a:solidFill>
                   </a:tcPr>
                 </a:tc>
+                <a:extLst>
+                  <a:ext uri="{0D108BD9-81ED-4DB2-BD59-A6C34878D82A}">
+                    <a16:rowId xmlns:a16="http://schemas.microsoft.com/office/drawing/2014/main" val="10003"/>
+                  </a:ext>
+                </a:extLst>
               </a:tr>
               <a:tr h="502920">
                 <a:tc>
                   <a:txBody>
-                    <a:bodyPr wrap="square" lIns="27432" rIns="27432" tIns="18288" bIns="18288" anchor="ctr"/>
-                    <a:lstStyle/>
-                    <a:p>
-                      <a:pPr algn="l">
+                    <a:bodyPr/>
+                    <a:lstStyle/>
+                    <a:p>
+                      <a:pPr algn="ctr">
                         <a:lnSpc>
                           <a:spcPct val="100000"/>
                         </a:lnSpc>
@@ -4725,7 +4892,7 @@
                       </a:r>
                     </a:p>
                   </a:txBody>
-                  <a:tcPr marL="27432" marR="27432" marT="18288" marB="18288">
+                  <a:tcPr marL="27432" marR="27432" marT="18288" marB="18288" anchor="ctr">
                     <a:solidFill>
                       <a:srgbClr val="F4F4F4"/>
                     </a:solidFill>
@@ -4733,7 +4900,7 @@
                 </a:tc>
                 <a:tc>
                   <a:txBody>
-                    <a:bodyPr wrap="square" lIns="27432" rIns="27432" tIns="18288" bIns="18288" anchor="ctr"/>
+                    <a:bodyPr/>
                     <a:lstStyle/>
                     <a:p>
                       <a:pPr algn="ctr">
@@ -4757,7 +4924,7 @@
                       </a:r>
                     </a:p>
                   </a:txBody>
-                  <a:tcPr marL="27432" marR="27432" marT="18288" marB="18288">
+                  <a:tcPr marL="27432" marR="27432" marT="18288" marB="18288" anchor="ctr">
                     <a:solidFill>
                       <a:srgbClr val="F4F4F4"/>
                     </a:solidFill>
@@ -4765,7 +4932,7 @@
                 </a:tc>
                 <a:tc>
                   <a:txBody>
-                    <a:bodyPr wrap="square" lIns="27432" rIns="27432" tIns="18288" bIns="18288" anchor="ctr"/>
+                    <a:bodyPr/>
                     <a:lstStyle/>
                     <a:p>
                       <a:pPr algn="ctr">
@@ -4789,7 +4956,7 @@
                       </a:r>
                     </a:p>
                   </a:txBody>
-                  <a:tcPr marL="27432" marR="27432" marT="18288" marB="18288">
+                  <a:tcPr marL="27432" marR="27432" marT="18288" marB="18288" anchor="ctr">
                     <a:solidFill>
                       <a:srgbClr val="F4F4F4"/>
                     </a:solidFill>
@@ -4797,7 +4964,7 @@
                 </a:tc>
                 <a:tc>
                   <a:txBody>
-                    <a:bodyPr wrap="square" lIns="27432" rIns="27432" tIns="18288" bIns="18288" anchor="ctr"/>
+                    <a:bodyPr/>
                     <a:lstStyle/>
                     <a:p>
                       <a:pPr algn="ctr">
@@ -4821,7 +4988,7 @@
                       </a:r>
                     </a:p>
                   </a:txBody>
-                  <a:tcPr marL="27432" marR="27432" marT="18288" marB="18288">
+                  <a:tcPr marL="27432" marR="27432" marT="18288" marB="18288" anchor="ctr">
                     <a:solidFill>
                       <a:srgbClr val="F4F4F4"/>
                     </a:solidFill>
@@ -4829,7 +4996,7 @@
                 </a:tc>
                 <a:tc>
                   <a:txBody>
-                    <a:bodyPr wrap="square" lIns="27432" rIns="27432" tIns="18288" bIns="18288" anchor="ctr"/>
+                    <a:bodyPr/>
                     <a:lstStyle/>
                     <a:p>
                       <a:pPr algn="ctr">
@@ -4853,12 +5020,17 @@
                       </a:r>
                     </a:p>
                   </a:txBody>
-                  <a:tcPr marL="27432" marR="27432" marT="18288" marB="18288">
+                  <a:tcPr marL="27432" marR="27432" marT="18288" marB="18288" anchor="ctr">
                     <a:solidFill>
                       <a:srgbClr val="F4F4F4"/>
                     </a:solidFill>
                   </a:tcPr>
                 </a:tc>
+                <a:extLst>
+                  <a:ext uri="{0D108BD9-81ED-4DB2-BD59-A6C34878D82A}">
+                    <a16:rowId xmlns:a16="http://schemas.microsoft.com/office/drawing/2014/main" val="10004"/>
+                  </a:ext>
+                </a:extLst>
               </a:tr>
             </a:tbl>
           </a:graphicData>
@@ -4881,7 +5053,7 @@
           <a:noFill/>
         </p:spPr>
         <p:txBody>
-          <a:bodyPr wrap="square" lIns="27432" rIns="27432" tIns="18288" bIns="18288"/>
+          <a:bodyPr wrap="square" lIns="27432" tIns="18288" rIns="27432" bIns="18288"/>
           <a:lstStyle/>
           <a:p>
             <a:pPr algn="l">
@@ -4965,7 +5137,7 @@
           <a:noFill/>
         </p:spPr>
         <p:txBody>
-          <a:bodyPr wrap="square" lIns="27432" rIns="27432" tIns="18288" bIns="18288"/>
+          <a:bodyPr wrap="square" lIns="27432" tIns="18288" rIns="27432" bIns="18288"/>
           <a:lstStyle/>
           <a:p>
             <a:pPr algn="ctr">
@@ -5007,7 +5179,7 @@
           <a:noFill/>
         </p:spPr>
         <p:txBody>
-          <a:bodyPr wrap="square" lIns="27432" rIns="27432" tIns="18288" bIns="18288"/>
+          <a:bodyPr wrap="square" lIns="27432" tIns="18288" rIns="27432" bIns="18288"/>
           <a:lstStyle/>
           <a:p>
             <a:pPr algn="l">
@@ -5041,7 +5213,7 @@
 </file>
 
 <file path=ppt/slides/slide12.xml><?xml version="1.0" encoding="utf-8"?>
-<p:sld xmlns:a="http://schemas.openxmlformats.org/drawingml/2006/main" xmlns:p="http://schemas.openxmlformats.org/presentationml/2006/main" xmlns:r="http://schemas.openxmlformats.org/officeDocument/2006/relationships">
+<p:sld xmlns:a="http://schemas.openxmlformats.org/drawingml/2006/main" xmlns:r="http://schemas.openxmlformats.org/officeDocument/2006/relationships" xmlns:p="http://schemas.openxmlformats.org/presentationml/2006/main">
   <p:cSld>
     <p:spTree>
       <p:nvGrpSpPr>
@@ -5049,7 +5221,14 @@
         <p:cNvGrpSpPr/>
         <p:nvPr/>
       </p:nvGrpSpPr>
-      <p:grpSpPr/>
+      <p:grpSpPr>
+        <a:xfrm>
+          <a:off x="0" y="0"/>
+          <a:ext cx="0" cy="0"/>
+          <a:chOff x="0" y="0"/>
+          <a:chExt cx="0" cy="0"/>
+        </a:xfrm>
+      </p:grpSpPr>
       <p:sp>
         <p:nvSpPr>
           <p:cNvPr id="2" name="TextBox 1"/>
@@ -5067,7 +5246,7 @@
           <a:noFill/>
         </p:spPr>
         <p:txBody>
-          <a:bodyPr wrap="square" lIns="27432" rIns="27432" tIns="18288" bIns="18288"/>
+          <a:bodyPr wrap="square" lIns="27432" tIns="18288" rIns="27432" bIns="18288"/>
           <a:lstStyle/>
           <a:p>
             <a:pPr algn="l">
@@ -5132,6 +5311,7 @@
           <a:lstStyle/>
           <a:p>
             <a:pPr algn="ctr"/>
+            <a:endParaRPr/>
           </a:p>
         </p:txBody>
       </p:sp>
@@ -5152,7 +5332,7 @@
           <a:noFill/>
         </p:spPr>
         <p:txBody>
-          <a:bodyPr wrap="square" lIns="27432" rIns="27432" tIns="18288" bIns="18288"/>
+          <a:bodyPr wrap="square" lIns="27432" tIns="18288" rIns="27432" bIns="18288"/>
           <a:lstStyle/>
           <a:p>
             <a:pPr algn="l">
@@ -5183,11 +5363,17 @@
           <p:cNvGraphicFramePr>
             <a:graphicFrameLocks noGrp="1"/>
           </p:cNvGraphicFramePr>
-          <p:nvPr/>
+          <p:nvPr>
+            <p:extLst>
+              <p:ext uri="{D42A27DB-BD31-4B8C-83A1-F6EECF244321}">
+                <p14:modId xmlns:p14="http://schemas.microsoft.com/office/powerpoint/2010/main" val="2436262507"/>
+              </p:ext>
+            </p:extLst>
+          </p:nvPr>
         </p:nvGraphicFramePr>
         <p:xfrm>
-          <a:off x="502920" y="1371600"/>
-          <a:ext cx="7315200" cy="3346704"/>
+          <a:off x="411480" y="1371600"/>
+          <a:ext cx="8321042" cy="3364992"/>
         </p:xfrm>
         <a:graphic>
           <a:graphicData uri="http://schemas.openxmlformats.org/drawingml/2006/table">
@@ -5196,16 +5382,46 @@
                 <a:tableStyleId>{5C22544A-7EE6-4342-B048-85BDC9FD1C3A}</a:tableStyleId>
               </a:tblPr>
               <a:tblGrid>
-                <a:gridCol w="2240280"/>
-                <a:gridCol w="960120"/>
-                <a:gridCol w="1508760"/>
-                <a:gridCol w="1508760"/>
-                <a:gridCol w="1097280"/>
+                <a:gridCol w="2548319">
+                  <a:extLst>
+                    <a:ext uri="{9D8B030D-6E8A-4147-A177-3AD203B41FA5}">
+                      <a16:colId xmlns:a16="http://schemas.microsoft.com/office/drawing/2014/main" val="20000"/>
+                    </a:ext>
+                  </a:extLst>
+                </a:gridCol>
+                <a:gridCol w="1092137">
+                  <a:extLst>
+                    <a:ext uri="{9D8B030D-6E8A-4147-A177-3AD203B41FA5}">
+                      <a16:colId xmlns:a16="http://schemas.microsoft.com/office/drawing/2014/main" val="20001"/>
+                    </a:ext>
+                  </a:extLst>
+                </a:gridCol>
+                <a:gridCol w="1716215">
+                  <a:extLst>
+                    <a:ext uri="{9D8B030D-6E8A-4147-A177-3AD203B41FA5}">
+                      <a16:colId xmlns:a16="http://schemas.microsoft.com/office/drawing/2014/main" val="20002"/>
+                    </a:ext>
+                  </a:extLst>
+                </a:gridCol>
+                <a:gridCol w="1716215">
+                  <a:extLst>
+                    <a:ext uri="{9D8B030D-6E8A-4147-A177-3AD203B41FA5}">
+                      <a16:colId xmlns:a16="http://schemas.microsoft.com/office/drawing/2014/main" val="20003"/>
+                    </a:ext>
+                  </a:extLst>
+                </a:gridCol>
+                <a:gridCol w="1248156">
+                  <a:extLst>
+                    <a:ext uri="{9D8B030D-6E8A-4147-A177-3AD203B41FA5}">
+                      <a16:colId xmlns:a16="http://schemas.microsoft.com/office/drawing/2014/main" val="20004"/>
+                    </a:ext>
+                  </a:extLst>
+                </a:gridCol>
               </a:tblGrid>
               <a:tr h="566928">
                 <a:tc>
                   <a:txBody>
-                    <a:bodyPr wrap="square" lIns="27432" rIns="27432" tIns="18288" bIns="18288" anchor="ctr"/>
+                    <a:bodyPr/>
                     <a:lstStyle/>
                     <a:p>
                       <a:pPr algn="ctr">
@@ -5229,7 +5445,7 @@
                       </a:r>
                     </a:p>
                   </a:txBody>
-                  <a:tcPr marL="27432" marR="27432" marT="18288" marB="18288">
+                  <a:tcPr marL="27432" marR="27432" marT="18288" marB="18288" anchor="ctr">
                     <a:solidFill>
                       <a:srgbClr val="000000"/>
                     </a:solidFill>
@@ -5237,7 +5453,7 @@
                 </a:tc>
                 <a:tc>
                   <a:txBody>
-                    <a:bodyPr wrap="square" lIns="27432" rIns="27432" tIns="18288" bIns="18288" anchor="ctr"/>
+                    <a:bodyPr/>
                     <a:lstStyle/>
                     <a:p>
                       <a:pPr algn="ctr">
@@ -5261,7 +5477,7 @@
                       </a:r>
                     </a:p>
                   </a:txBody>
-                  <a:tcPr marL="27432" marR="27432" marT="18288" marB="18288">
+                  <a:tcPr marL="27432" marR="27432" marT="18288" marB="18288" anchor="ctr">
                     <a:solidFill>
                       <a:srgbClr val="000000"/>
                     </a:solidFill>
@@ -5269,7 +5485,7 @@
                 </a:tc>
                 <a:tc>
                   <a:txBody>
-                    <a:bodyPr wrap="square" lIns="27432" rIns="27432" tIns="18288" bIns="18288" anchor="ctr"/>
+                    <a:bodyPr/>
                     <a:lstStyle/>
                     <a:p>
                       <a:pPr algn="ctr">
@@ -5314,7 +5530,7 @@
                       </a:r>
                     </a:p>
                   </a:txBody>
-                  <a:tcPr marL="27432" marR="27432" marT="18288" marB="18288">
+                  <a:tcPr marL="27432" marR="27432" marT="18288" marB="18288" anchor="ctr">
                     <a:solidFill>
                       <a:srgbClr val="000000"/>
                     </a:solidFill>
@@ -5322,7 +5538,7 @@
                 </a:tc>
                 <a:tc>
                   <a:txBody>
-                    <a:bodyPr wrap="square" lIns="27432" rIns="27432" tIns="18288" bIns="18288" anchor="ctr"/>
+                    <a:bodyPr/>
                     <a:lstStyle/>
                     <a:p>
                       <a:pPr algn="ctr">
@@ -5367,7 +5583,7 @@
                       </a:r>
                     </a:p>
                   </a:txBody>
-                  <a:tcPr marL="27432" marR="27432" marT="18288" marB="18288">
+                  <a:tcPr marL="27432" marR="27432" marT="18288" marB="18288" anchor="ctr">
                     <a:solidFill>
                       <a:srgbClr val="000000"/>
                     </a:solidFill>
@@ -5375,7 +5591,7 @@
                 </a:tc>
                 <a:tc>
                   <a:txBody>
-                    <a:bodyPr wrap="square" lIns="27432" rIns="27432" tIns="18288" bIns="18288" anchor="ctr"/>
+                    <a:bodyPr/>
                     <a:lstStyle/>
                     <a:p>
                       <a:pPr algn="ctr">
@@ -5399,20 +5615,25 @@
                       </a:r>
                     </a:p>
                   </a:txBody>
-                  <a:tcPr marL="27432" marR="27432" marT="18288" marB="18288">
+                  <a:tcPr marL="27432" marR="27432" marT="18288" marB="18288" anchor="ctr">
                     <a:solidFill>
                       <a:srgbClr val="000000"/>
                     </a:solidFill>
                   </a:tcPr>
                 </a:tc>
+                <a:extLst>
+                  <a:ext uri="{0D108BD9-81ED-4DB2-BD59-A6C34878D82A}">
+                    <a16:rowId xmlns:a16="http://schemas.microsoft.com/office/drawing/2014/main" val="10000"/>
+                  </a:ext>
+                </a:extLst>
               </a:tr>
               <a:tr h="347472">
                 <a:tc>
                   <a:txBody>
-                    <a:bodyPr wrap="square" lIns="27432" rIns="27432" tIns="18288" bIns="18288" anchor="ctr"/>
-                    <a:lstStyle/>
-                    <a:p>
-                      <a:pPr algn="l">
+                    <a:bodyPr/>
+                    <a:lstStyle/>
+                    <a:p>
+                      <a:pPr algn="ctr">
                         <a:lnSpc>
                           <a:spcPct val="100000"/>
                         </a:lnSpc>
@@ -5433,7 +5654,7 @@
                       </a:r>
                     </a:p>
                   </a:txBody>
-                  <a:tcPr marL="27432" marR="27432" marT="18288" marB="18288">
+                  <a:tcPr marL="27432" marR="27432" marT="18288" marB="18288" anchor="ctr">
                     <a:solidFill>
                       <a:srgbClr val="FFFFFF"/>
                     </a:solidFill>
@@ -5441,7 +5662,7 @@
                 </a:tc>
                 <a:tc>
                   <a:txBody>
-                    <a:bodyPr wrap="square" lIns="27432" rIns="27432" tIns="18288" bIns="18288" anchor="ctr"/>
+                    <a:bodyPr/>
                     <a:lstStyle/>
                     <a:p>
                       <a:pPr algn="ctr">
@@ -5465,7 +5686,7 @@
                       </a:r>
                     </a:p>
                   </a:txBody>
-                  <a:tcPr marL="27432" marR="27432" marT="18288" marB="18288">
+                  <a:tcPr marL="27432" marR="27432" marT="18288" marB="18288" anchor="ctr">
                     <a:solidFill>
                       <a:srgbClr val="FFFFFF"/>
                     </a:solidFill>
@@ -5473,7 +5694,7 @@
                 </a:tc>
                 <a:tc>
                   <a:txBody>
-                    <a:bodyPr wrap="square" lIns="27432" rIns="27432" tIns="18288" bIns="18288" anchor="ctr"/>
+                    <a:bodyPr/>
                     <a:lstStyle/>
                     <a:p>
                       <a:pPr algn="ctr">
@@ -5497,7 +5718,7 @@
                       </a:r>
                     </a:p>
                   </a:txBody>
-                  <a:tcPr marL="27432" marR="27432" marT="18288" marB="18288">
+                  <a:tcPr marL="27432" marR="27432" marT="18288" marB="18288" anchor="ctr">
                     <a:solidFill>
                       <a:srgbClr val="FFFFFF"/>
                     </a:solidFill>
@@ -5505,7 +5726,7 @@
                 </a:tc>
                 <a:tc>
                   <a:txBody>
-                    <a:bodyPr wrap="square" lIns="27432" rIns="27432" tIns="18288" bIns="18288" anchor="ctr"/>
+                    <a:bodyPr/>
                     <a:lstStyle/>
                     <a:p>
                       <a:pPr algn="ctr">
@@ -5529,7 +5750,7 @@
                       </a:r>
                     </a:p>
                   </a:txBody>
-                  <a:tcPr marL="27432" marR="27432" marT="18288" marB="18288">
+                  <a:tcPr marL="27432" marR="27432" marT="18288" marB="18288" anchor="ctr">
                     <a:solidFill>
                       <a:srgbClr val="FFFFFF"/>
                     </a:solidFill>
@@ -5537,7 +5758,7 @@
                 </a:tc>
                 <a:tc>
                   <a:txBody>
-                    <a:bodyPr wrap="square" lIns="27432" rIns="27432" tIns="18288" bIns="18288" anchor="ctr"/>
+                    <a:bodyPr/>
                     <a:lstStyle/>
                     <a:p>
                       <a:pPr algn="ctr">
@@ -5561,20 +5782,25 @@
                       </a:r>
                     </a:p>
                   </a:txBody>
-                  <a:tcPr marL="27432" marR="27432" marT="18288" marB="18288">
+                  <a:tcPr marL="27432" marR="27432" marT="18288" marB="18288" anchor="ctr">
                     <a:solidFill>
                       <a:srgbClr val="FFFFFF"/>
                     </a:solidFill>
                   </a:tcPr>
                 </a:tc>
+                <a:extLst>
+                  <a:ext uri="{0D108BD9-81ED-4DB2-BD59-A6C34878D82A}">
+                    <a16:rowId xmlns:a16="http://schemas.microsoft.com/office/drawing/2014/main" val="10001"/>
+                  </a:ext>
+                </a:extLst>
               </a:tr>
               <a:tr h="347472">
                 <a:tc>
                   <a:txBody>
-                    <a:bodyPr wrap="square" lIns="27432" rIns="27432" tIns="18288" bIns="18288" anchor="ctr"/>
-                    <a:lstStyle/>
-                    <a:p>
-                      <a:pPr algn="l">
+                    <a:bodyPr/>
+                    <a:lstStyle/>
+                    <a:p>
+                      <a:pPr algn="ctr">
                         <a:lnSpc>
                           <a:spcPct val="100000"/>
                         </a:lnSpc>
@@ -5595,7 +5821,7 @@
                       </a:r>
                     </a:p>
                   </a:txBody>
-                  <a:tcPr marL="27432" marR="27432" marT="18288" marB="18288">
+                  <a:tcPr marL="27432" marR="27432" marT="18288" marB="18288" anchor="ctr">
                     <a:solidFill>
                       <a:srgbClr val="F4F4F4"/>
                     </a:solidFill>
@@ -5603,7 +5829,7 @@
                 </a:tc>
                 <a:tc>
                   <a:txBody>
-                    <a:bodyPr wrap="square" lIns="27432" rIns="27432" tIns="18288" bIns="18288" anchor="ctr"/>
+                    <a:bodyPr/>
                     <a:lstStyle/>
                     <a:p>
                       <a:pPr algn="ctr">
@@ -5627,7 +5853,7 @@
                       </a:r>
                     </a:p>
                   </a:txBody>
-                  <a:tcPr marL="27432" marR="27432" marT="18288" marB="18288">
+                  <a:tcPr marL="27432" marR="27432" marT="18288" marB="18288" anchor="ctr">
                     <a:solidFill>
                       <a:srgbClr val="F4F4F4"/>
                     </a:solidFill>
@@ -5635,7 +5861,7 @@
                 </a:tc>
                 <a:tc>
                   <a:txBody>
-                    <a:bodyPr wrap="square" lIns="27432" rIns="27432" tIns="18288" bIns="18288" anchor="ctr"/>
+                    <a:bodyPr/>
                     <a:lstStyle/>
                     <a:p>
                       <a:pPr algn="ctr">
@@ -5659,7 +5885,7 @@
                       </a:r>
                     </a:p>
                   </a:txBody>
-                  <a:tcPr marL="27432" marR="27432" marT="18288" marB="18288">
+                  <a:tcPr marL="27432" marR="27432" marT="18288" marB="18288" anchor="ctr">
                     <a:solidFill>
                       <a:srgbClr val="F4F4F4"/>
                     </a:solidFill>
@@ -5667,7 +5893,7 @@
                 </a:tc>
                 <a:tc>
                   <a:txBody>
-                    <a:bodyPr wrap="square" lIns="27432" rIns="27432" tIns="18288" bIns="18288" anchor="ctr"/>
+                    <a:bodyPr/>
                     <a:lstStyle/>
                     <a:p>
                       <a:pPr algn="ctr">
@@ -5691,7 +5917,7 @@
                       </a:r>
                     </a:p>
                   </a:txBody>
-                  <a:tcPr marL="27432" marR="27432" marT="18288" marB="18288">
+                  <a:tcPr marL="27432" marR="27432" marT="18288" marB="18288" anchor="ctr">
                     <a:solidFill>
                       <a:srgbClr val="F4F4F4"/>
                     </a:solidFill>
@@ -5699,7 +5925,7 @@
                 </a:tc>
                 <a:tc>
                   <a:txBody>
-                    <a:bodyPr wrap="square" lIns="27432" rIns="27432" tIns="18288" bIns="18288" anchor="ctr"/>
+                    <a:bodyPr/>
                     <a:lstStyle/>
                     <a:p>
                       <a:pPr algn="ctr">
@@ -5723,20 +5949,25 @@
                       </a:r>
                     </a:p>
                   </a:txBody>
-                  <a:tcPr marL="27432" marR="27432" marT="18288" marB="18288">
+                  <a:tcPr marL="27432" marR="27432" marT="18288" marB="18288" anchor="ctr">
                     <a:solidFill>
                       <a:srgbClr val="F4F4F4"/>
                     </a:solidFill>
                   </a:tcPr>
                 </a:tc>
+                <a:extLst>
+                  <a:ext uri="{0D108BD9-81ED-4DB2-BD59-A6C34878D82A}">
+                    <a16:rowId xmlns:a16="http://schemas.microsoft.com/office/drawing/2014/main" val="10002"/>
+                  </a:ext>
+                </a:extLst>
               </a:tr>
               <a:tr h="347472">
                 <a:tc>
                   <a:txBody>
-                    <a:bodyPr wrap="square" lIns="27432" rIns="27432" tIns="18288" bIns="18288" anchor="ctr"/>
-                    <a:lstStyle/>
-                    <a:p>
-                      <a:pPr algn="l">
+                    <a:bodyPr/>
+                    <a:lstStyle/>
+                    <a:p>
+                      <a:pPr algn="ctr">
                         <a:lnSpc>
                           <a:spcPct val="100000"/>
                         </a:lnSpc>
@@ -5757,7 +5988,7 @@
                       </a:r>
                     </a:p>
                   </a:txBody>
-                  <a:tcPr marL="27432" marR="27432" marT="18288" marB="18288">
+                  <a:tcPr marL="27432" marR="27432" marT="18288" marB="18288" anchor="ctr">
                     <a:solidFill>
                       <a:srgbClr val="FFFFFF"/>
                     </a:solidFill>
@@ -5765,7 +5996,7 @@
                 </a:tc>
                 <a:tc>
                   <a:txBody>
-                    <a:bodyPr wrap="square" lIns="27432" rIns="27432" tIns="18288" bIns="18288" anchor="ctr"/>
+                    <a:bodyPr/>
                     <a:lstStyle/>
                     <a:p>
                       <a:pPr algn="ctr">
@@ -5789,7 +6020,7 @@
                       </a:r>
                     </a:p>
                   </a:txBody>
-                  <a:tcPr marL="27432" marR="27432" marT="18288" marB="18288">
+                  <a:tcPr marL="27432" marR="27432" marT="18288" marB="18288" anchor="ctr">
                     <a:solidFill>
                       <a:srgbClr val="FFFFFF"/>
                     </a:solidFill>
@@ -5797,7 +6028,7 @@
                 </a:tc>
                 <a:tc>
                   <a:txBody>
-                    <a:bodyPr wrap="square" lIns="27432" rIns="27432" tIns="18288" bIns="18288" anchor="ctr"/>
+                    <a:bodyPr/>
                     <a:lstStyle/>
                     <a:p>
                       <a:pPr algn="ctr">
@@ -5821,7 +6052,7 @@
                       </a:r>
                     </a:p>
                   </a:txBody>
-                  <a:tcPr marL="27432" marR="27432" marT="18288" marB="18288">
+                  <a:tcPr marL="27432" marR="27432" marT="18288" marB="18288" anchor="ctr">
                     <a:solidFill>
                       <a:srgbClr val="FFFFFF"/>
                     </a:solidFill>
@@ -5829,7 +6060,7 @@
                 </a:tc>
                 <a:tc>
                   <a:txBody>
-                    <a:bodyPr wrap="square" lIns="27432" rIns="27432" tIns="18288" bIns="18288" anchor="ctr"/>
+                    <a:bodyPr/>
                     <a:lstStyle/>
                     <a:p>
                       <a:pPr algn="ctr">
@@ -5853,7 +6084,7 @@
                       </a:r>
                     </a:p>
                   </a:txBody>
-                  <a:tcPr marL="27432" marR="27432" marT="18288" marB="18288">
+                  <a:tcPr marL="27432" marR="27432" marT="18288" marB="18288" anchor="ctr">
                     <a:solidFill>
                       <a:srgbClr val="FFFFFF"/>
                     </a:solidFill>
@@ -5861,7 +6092,7 @@
                 </a:tc>
                 <a:tc>
                   <a:txBody>
-                    <a:bodyPr wrap="square" lIns="27432" rIns="27432" tIns="18288" bIns="18288" anchor="ctr"/>
+                    <a:bodyPr/>
                     <a:lstStyle/>
                     <a:p>
                       <a:pPr algn="ctr">
@@ -5885,20 +6116,25 @@
                       </a:r>
                     </a:p>
                   </a:txBody>
-                  <a:tcPr marL="27432" marR="27432" marT="18288" marB="18288">
+                  <a:tcPr marL="27432" marR="27432" marT="18288" marB="18288" anchor="ctr">
                     <a:solidFill>
                       <a:srgbClr val="FFFFFF"/>
                     </a:solidFill>
                   </a:tcPr>
                 </a:tc>
+                <a:extLst>
+                  <a:ext uri="{0D108BD9-81ED-4DB2-BD59-A6C34878D82A}">
+                    <a16:rowId xmlns:a16="http://schemas.microsoft.com/office/drawing/2014/main" val="10003"/>
+                  </a:ext>
+                </a:extLst>
               </a:tr>
               <a:tr h="347472">
                 <a:tc>
                   <a:txBody>
-                    <a:bodyPr wrap="square" lIns="27432" rIns="27432" tIns="18288" bIns="18288" anchor="ctr"/>
-                    <a:lstStyle/>
-                    <a:p>
-                      <a:pPr algn="l">
+                    <a:bodyPr/>
+                    <a:lstStyle/>
+                    <a:p>
+                      <a:pPr algn="ctr">
                         <a:lnSpc>
                           <a:spcPct val="100000"/>
                         </a:lnSpc>
@@ -5919,7 +6155,7 @@
                       </a:r>
                     </a:p>
                   </a:txBody>
-                  <a:tcPr marL="27432" marR="27432" marT="18288" marB="18288">
+                  <a:tcPr marL="27432" marR="27432" marT="18288" marB="18288" anchor="ctr">
                     <a:solidFill>
                       <a:srgbClr val="F4F4F4"/>
                     </a:solidFill>
@@ -5927,7 +6163,7 @@
                 </a:tc>
                 <a:tc>
                   <a:txBody>
-                    <a:bodyPr wrap="square" lIns="27432" rIns="27432" tIns="18288" bIns="18288" anchor="ctr"/>
+                    <a:bodyPr/>
                     <a:lstStyle/>
                     <a:p>
                       <a:pPr algn="ctr">
@@ -5951,7 +6187,7 @@
                       </a:r>
                     </a:p>
                   </a:txBody>
-                  <a:tcPr marL="27432" marR="27432" marT="18288" marB="18288">
+                  <a:tcPr marL="27432" marR="27432" marT="18288" marB="18288" anchor="ctr">
                     <a:solidFill>
                       <a:srgbClr val="F4F4F4"/>
                     </a:solidFill>
@@ -5959,7 +6195,7 @@
                 </a:tc>
                 <a:tc>
                   <a:txBody>
-                    <a:bodyPr wrap="square" lIns="27432" rIns="27432" tIns="18288" bIns="18288" anchor="ctr"/>
+                    <a:bodyPr/>
                     <a:lstStyle/>
                     <a:p>
                       <a:pPr algn="ctr">
@@ -5983,7 +6219,7 @@
                       </a:r>
                     </a:p>
                   </a:txBody>
-                  <a:tcPr marL="27432" marR="27432" marT="18288" marB="18288">
+                  <a:tcPr marL="27432" marR="27432" marT="18288" marB="18288" anchor="ctr">
                     <a:solidFill>
                       <a:srgbClr val="F4F4F4"/>
                     </a:solidFill>
@@ -5991,7 +6227,7 @@
                 </a:tc>
                 <a:tc>
                   <a:txBody>
-                    <a:bodyPr wrap="square" lIns="27432" rIns="27432" tIns="18288" bIns="18288" anchor="ctr"/>
+                    <a:bodyPr/>
                     <a:lstStyle/>
                     <a:p>
                       <a:pPr algn="ctr">
@@ -6015,7 +6251,7 @@
                       </a:r>
                     </a:p>
                   </a:txBody>
-                  <a:tcPr marL="27432" marR="27432" marT="18288" marB="18288">
+                  <a:tcPr marL="27432" marR="27432" marT="18288" marB="18288" anchor="ctr">
                     <a:solidFill>
                       <a:srgbClr val="F4F4F4"/>
                     </a:solidFill>
@@ -6023,7 +6259,7 @@
                 </a:tc>
                 <a:tc>
                   <a:txBody>
-                    <a:bodyPr wrap="square" lIns="27432" rIns="27432" tIns="18288" bIns="18288" anchor="ctr"/>
+                    <a:bodyPr/>
                     <a:lstStyle/>
                     <a:p>
                       <a:pPr algn="ctr">
@@ -6047,20 +6283,25 @@
                       </a:r>
                     </a:p>
                   </a:txBody>
-                  <a:tcPr marL="27432" marR="27432" marT="18288" marB="18288">
+                  <a:tcPr marL="27432" marR="27432" marT="18288" marB="18288" anchor="ctr">
                     <a:solidFill>
                       <a:srgbClr val="F4F4F4"/>
                     </a:solidFill>
                   </a:tcPr>
                 </a:tc>
+                <a:extLst>
+                  <a:ext uri="{0D108BD9-81ED-4DB2-BD59-A6C34878D82A}">
+                    <a16:rowId xmlns:a16="http://schemas.microsoft.com/office/drawing/2014/main" val="10004"/>
+                  </a:ext>
+                </a:extLst>
               </a:tr>
               <a:tr h="347472">
                 <a:tc>
                   <a:txBody>
-                    <a:bodyPr wrap="square" lIns="27432" rIns="27432" tIns="18288" bIns="18288" anchor="ctr"/>
-                    <a:lstStyle/>
-                    <a:p>
-                      <a:pPr algn="l">
+                    <a:bodyPr/>
+                    <a:lstStyle/>
+                    <a:p>
+                      <a:pPr algn="ctr">
                         <a:lnSpc>
                           <a:spcPct val="100000"/>
                         </a:lnSpc>
@@ -6081,7 +6322,7 @@
                       </a:r>
                     </a:p>
                   </a:txBody>
-                  <a:tcPr marL="27432" marR="27432" marT="18288" marB="18288">
+                  <a:tcPr marL="27432" marR="27432" marT="18288" marB="18288" anchor="ctr">
                     <a:solidFill>
                       <a:srgbClr val="FFFFFF"/>
                     </a:solidFill>
@@ -6089,7 +6330,7 @@
                 </a:tc>
                 <a:tc>
                   <a:txBody>
-                    <a:bodyPr wrap="square" lIns="27432" rIns="27432" tIns="18288" bIns="18288" anchor="ctr"/>
+                    <a:bodyPr/>
                     <a:lstStyle/>
                     <a:p>
                       <a:pPr algn="ctr">
@@ -6113,7 +6354,7 @@
                       </a:r>
                     </a:p>
                   </a:txBody>
-                  <a:tcPr marL="27432" marR="27432" marT="18288" marB="18288">
+                  <a:tcPr marL="27432" marR="27432" marT="18288" marB="18288" anchor="ctr">
                     <a:solidFill>
                       <a:srgbClr val="FFFFFF"/>
                     </a:solidFill>
@@ -6121,7 +6362,7 @@
                 </a:tc>
                 <a:tc>
                   <a:txBody>
-                    <a:bodyPr wrap="square" lIns="27432" rIns="27432" tIns="18288" bIns="18288" anchor="ctr"/>
+                    <a:bodyPr/>
                     <a:lstStyle/>
                     <a:p>
                       <a:pPr algn="ctr">
@@ -6145,7 +6386,7 @@
                       </a:r>
                     </a:p>
                   </a:txBody>
-                  <a:tcPr marL="27432" marR="27432" marT="18288" marB="18288">
+                  <a:tcPr marL="27432" marR="27432" marT="18288" marB="18288" anchor="ctr">
                     <a:solidFill>
                       <a:srgbClr val="FFFFFF"/>
                     </a:solidFill>
@@ -6153,7 +6394,7 @@
                 </a:tc>
                 <a:tc>
                   <a:txBody>
-                    <a:bodyPr wrap="square" lIns="27432" rIns="27432" tIns="18288" bIns="18288" anchor="ctr"/>
+                    <a:bodyPr/>
                     <a:lstStyle/>
                     <a:p>
                       <a:pPr algn="ctr">
@@ -6177,7 +6418,7 @@
                       </a:r>
                     </a:p>
                   </a:txBody>
-                  <a:tcPr marL="27432" marR="27432" marT="18288" marB="18288">
+                  <a:tcPr marL="27432" marR="27432" marT="18288" marB="18288" anchor="ctr">
                     <a:solidFill>
                       <a:srgbClr val="FFFFFF"/>
                     </a:solidFill>
@@ -6185,7 +6426,7 @@
                 </a:tc>
                 <a:tc>
                   <a:txBody>
-                    <a:bodyPr wrap="square" lIns="27432" rIns="27432" tIns="18288" bIns="18288" anchor="ctr"/>
+                    <a:bodyPr/>
                     <a:lstStyle/>
                     <a:p>
                       <a:pPr algn="ctr">
@@ -6209,20 +6450,25 @@
                       </a:r>
                     </a:p>
                   </a:txBody>
-                  <a:tcPr marL="27432" marR="27432" marT="18288" marB="18288">
+                  <a:tcPr marL="27432" marR="27432" marT="18288" marB="18288" anchor="ctr">
                     <a:solidFill>
                       <a:srgbClr val="FFFFFF"/>
                     </a:solidFill>
                   </a:tcPr>
                 </a:tc>
+                <a:extLst>
+                  <a:ext uri="{0D108BD9-81ED-4DB2-BD59-A6C34878D82A}">
+                    <a16:rowId xmlns:a16="http://schemas.microsoft.com/office/drawing/2014/main" val="10005"/>
+                  </a:ext>
+                </a:extLst>
               </a:tr>
               <a:tr h="347472">
                 <a:tc>
                   <a:txBody>
-                    <a:bodyPr wrap="square" lIns="27432" rIns="27432" tIns="18288" bIns="18288" anchor="ctr"/>
-                    <a:lstStyle/>
-                    <a:p>
-                      <a:pPr algn="l">
+                    <a:bodyPr/>
+                    <a:lstStyle/>
+                    <a:p>
+                      <a:pPr algn="ctr">
                         <a:lnSpc>
                           <a:spcPct val="100000"/>
                         </a:lnSpc>
@@ -6243,7 +6489,7 @@
                       </a:r>
                     </a:p>
                   </a:txBody>
-                  <a:tcPr marL="27432" marR="27432" marT="18288" marB="18288">
+                  <a:tcPr marL="27432" marR="27432" marT="18288" marB="18288" anchor="ctr">
                     <a:solidFill>
                       <a:srgbClr val="F4F4F4"/>
                     </a:solidFill>
@@ -6251,7 +6497,7 @@
                 </a:tc>
                 <a:tc>
                   <a:txBody>
-                    <a:bodyPr wrap="square" lIns="27432" rIns="27432" tIns="18288" bIns="18288" anchor="ctr"/>
+                    <a:bodyPr/>
                     <a:lstStyle/>
                     <a:p>
                       <a:pPr algn="ctr">
@@ -6275,7 +6521,7 @@
                       </a:r>
                     </a:p>
                   </a:txBody>
-                  <a:tcPr marL="27432" marR="27432" marT="18288" marB="18288">
+                  <a:tcPr marL="27432" marR="27432" marT="18288" marB="18288" anchor="ctr">
                     <a:solidFill>
                       <a:srgbClr val="F4F4F4"/>
                     </a:solidFill>
@@ -6283,7 +6529,7 @@
                 </a:tc>
                 <a:tc>
                   <a:txBody>
-                    <a:bodyPr wrap="square" lIns="27432" rIns="27432" tIns="18288" bIns="18288" anchor="ctr"/>
+                    <a:bodyPr/>
                     <a:lstStyle/>
                     <a:p>
                       <a:pPr algn="ctr">
@@ -6307,7 +6553,7 @@
                       </a:r>
                     </a:p>
                   </a:txBody>
-                  <a:tcPr marL="27432" marR="27432" marT="18288" marB="18288">
+                  <a:tcPr marL="27432" marR="27432" marT="18288" marB="18288" anchor="ctr">
                     <a:solidFill>
                       <a:srgbClr val="F4F4F4"/>
                     </a:solidFill>
@@ -6315,7 +6561,7 @@
                 </a:tc>
                 <a:tc>
                   <a:txBody>
-                    <a:bodyPr wrap="square" lIns="27432" rIns="27432" tIns="18288" bIns="18288" anchor="ctr"/>
+                    <a:bodyPr/>
                     <a:lstStyle/>
                     <a:p>
                       <a:pPr algn="ctr">
@@ -6339,7 +6585,7 @@
                       </a:r>
                     </a:p>
                   </a:txBody>
-                  <a:tcPr marL="27432" marR="27432" marT="18288" marB="18288">
+                  <a:tcPr marL="27432" marR="27432" marT="18288" marB="18288" anchor="ctr">
                     <a:solidFill>
                       <a:srgbClr val="F4F4F4"/>
                     </a:solidFill>
@@ -6347,7 +6593,7 @@
                 </a:tc>
                 <a:tc>
                   <a:txBody>
-                    <a:bodyPr wrap="square" lIns="27432" rIns="27432" tIns="18288" bIns="18288" anchor="ctr"/>
+                    <a:bodyPr/>
                     <a:lstStyle/>
                     <a:p>
                       <a:pPr algn="ctr">
@@ -6371,20 +6617,25 @@
                       </a:r>
                     </a:p>
                   </a:txBody>
-                  <a:tcPr marL="27432" marR="27432" marT="18288" marB="18288">
+                  <a:tcPr marL="27432" marR="27432" marT="18288" marB="18288" anchor="ctr">
                     <a:solidFill>
                       <a:srgbClr val="F4F4F4"/>
                     </a:solidFill>
                   </a:tcPr>
                 </a:tc>
+                <a:extLst>
+                  <a:ext uri="{0D108BD9-81ED-4DB2-BD59-A6C34878D82A}">
+                    <a16:rowId xmlns:a16="http://schemas.microsoft.com/office/drawing/2014/main" val="10006"/>
+                  </a:ext>
+                </a:extLst>
               </a:tr>
               <a:tr h="347472">
                 <a:tc>
                   <a:txBody>
-                    <a:bodyPr wrap="square" lIns="27432" rIns="27432" tIns="18288" bIns="18288" anchor="ctr"/>
-                    <a:lstStyle/>
-                    <a:p>
-                      <a:pPr algn="l">
+                    <a:bodyPr/>
+                    <a:lstStyle/>
+                    <a:p>
+                      <a:pPr algn="ctr">
                         <a:lnSpc>
                           <a:spcPct val="100000"/>
                         </a:lnSpc>
@@ -6405,7 +6656,7 @@
                       </a:r>
                     </a:p>
                   </a:txBody>
-                  <a:tcPr marL="27432" marR="27432" marT="18288" marB="18288">
+                  <a:tcPr marL="27432" marR="27432" marT="18288" marB="18288" anchor="ctr">
                     <a:solidFill>
                       <a:srgbClr val="FFFFFF"/>
                     </a:solidFill>
@@ -6413,7 +6664,7 @@
                 </a:tc>
                 <a:tc>
                   <a:txBody>
-                    <a:bodyPr wrap="square" lIns="27432" rIns="27432" tIns="18288" bIns="18288" anchor="ctr"/>
+                    <a:bodyPr/>
                     <a:lstStyle/>
                     <a:p>
                       <a:pPr algn="ctr">
@@ -6437,7 +6688,7 @@
                       </a:r>
                     </a:p>
                   </a:txBody>
-                  <a:tcPr marL="27432" marR="27432" marT="18288" marB="18288">
+                  <a:tcPr marL="27432" marR="27432" marT="18288" marB="18288" anchor="ctr">
                     <a:solidFill>
                       <a:srgbClr val="FFFFFF"/>
                     </a:solidFill>
@@ -6445,7 +6696,7 @@
                 </a:tc>
                 <a:tc>
                   <a:txBody>
-                    <a:bodyPr wrap="square" lIns="27432" rIns="27432" tIns="18288" bIns="18288" anchor="ctr"/>
+                    <a:bodyPr/>
                     <a:lstStyle/>
                     <a:p>
                       <a:pPr algn="ctr">
@@ -6469,7 +6720,7 @@
                       </a:r>
                     </a:p>
                   </a:txBody>
-                  <a:tcPr marL="27432" marR="27432" marT="18288" marB="18288">
+                  <a:tcPr marL="27432" marR="27432" marT="18288" marB="18288" anchor="ctr">
                     <a:solidFill>
                       <a:srgbClr val="FFFFFF"/>
                     </a:solidFill>
@@ -6477,7 +6728,7 @@
                 </a:tc>
                 <a:tc>
                   <a:txBody>
-                    <a:bodyPr wrap="square" lIns="27432" rIns="27432" tIns="18288" bIns="18288" anchor="ctr"/>
+                    <a:bodyPr/>
                     <a:lstStyle/>
                     <a:p>
                       <a:pPr algn="ctr">
@@ -6501,7 +6752,7 @@
                       </a:r>
                     </a:p>
                   </a:txBody>
-                  <a:tcPr marL="27432" marR="27432" marT="18288" marB="18288">
+                  <a:tcPr marL="27432" marR="27432" marT="18288" marB="18288" anchor="ctr">
                     <a:solidFill>
                       <a:srgbClr val="FFFFFF"/>
                     </a:solidFill>
@@ -6509,7 +6760,7 @@
                 </a:tc>
                 <a:tc>
                   <a:txBody>
-                    <a:bodyPr wrap="square" lIns="27432" rIns="27432" tIns="18288" bIns="18288" anchor="ctr"/>
+                    <a:bodyPr/>
                     <a:lstStyle/>
                     <a:p>
                       <a:pPr algn="ctr">
@@ -6533,20 +6784,25 @@
                       </a:r>
                     </a:p>
                   </a:txBody>
-                  <a:tcPr marL="27432" marR="27432" marT="18288" marB="18288">
+                  <a:tcPr marL="27432" marR="27432" marT="18288" marB="18288" anchor="ctr">
                     <a:solidFill>
                       <a:srgbClr val="FFFFFF"/>
                     </a:solidFill>
                   </a:tcPr>
                 </a:tc>
+                <a:extLst>
+                  <a:ext uri="{0D108BD9-81ED-4DB2-BD59-A6C34878D82A}">
+                    <a16:rowId xmlns:a16="http://schemas.microsoft.com/office/drawing/2014/main" val="10007"/>
+                  </a:ext>
+                </a:extLst>
               </a:tr>
               <a:tr h="347472">
                 <a:tc>
                   <a:txBody>
-                    <a:bodyPr wrap="square" lIns="27432" rIns="27432" tIns="18288" bIns="18288" anchor="ctr"/>
-                    <a:lstStyle/>
-                    <a:p>
-                      <a:pPr algn="l">
+                    <a:bodyPr/>
+                    <a:lstStyle/>
+                    <a:p>
+                      <a:pPr algn="ctr">
                         <a:lnSpc>
                           <a:spcPct val="100000"/>
                         </a:lnSpc>
@@ -6567,7 +6823,7 @@
                       </a:r>
                     </a:p>
                   </a:txBody>
-                  <a:tcPr marL="27432" marR="27432" marT="18288" marB="18288">
+                  <a:tcPr marL="27432" marR="27432" marT="18288" marB="18288" anchor="ctr">
                     <a:solidFill>
                       <a:srgbClr val="F4F4F4"/>
                     </a:solidFill>
@@ -6575,7 +6831,7 @@
                 </a:tc>
                 <a:tc>
                   <a:txBody>
-                    <a:bodyPr wrap="square" lIns="27432" rIns="27432" tIns="18288" bIns="18288" anchor="ctr"/>
+                    <a:bodyPr/>
                     <a:lstStyle/>
                     <a:p>
                       <a:pPr algn="ctr">
@@ -6599,7 +6855,7 @@
                       </a:r>
                     </a:p>
                   </a:txBody>
-                  <a:tcPr marL="27432" marR="27432" marT="18288" marB="18288">
+                  <a:tcPr marL="27432" marR="27432" marT="18288" marB="18288" anchor="ctr">
                     <a:solidFill>
                       <a:srgbClr val="F4F4F4"/>
                     </a:solidFill>
@@ -6607,7 +6863,7 @@
                 </a:tc>
                 <a:tc>
                   <a:txBody>
-                    <a:bodyPr wrap="square" lIns="27432" rIns="27432" tIns="18288" bIns="18288" anchor="ctr"/>
+                    <a:bodyPr/>
                     <a:lstStyle/>
                     <a:p>
                       <a:pPr algn="ctr">
@@ -6631,7 +6887,7 @@
                       </a:r>
                     </a:p>
                   </a:txBody>
-                  <a:tcPr marL="27432" marR="27432" marT="18288" marB="18288">
+                  <a:tcPr marL="27432" marR="27432" marT="18288" marB="18288" anchor="ctr">
                     <a:solidFill>
                       <a:srgbClr val="F4F4F4"/>
                     </a:solidFill>
@@ -6639,7 +6895,7 @@
                 </a:tc>
                 <a:tc>
                   <a:txBody>
-                    <a:bodyPr wrap="square" lIns="27432" rIns="27432" tIns="18288" bIns="18288" anchor="ctr"/>
+                    <a:bodyPr/>
                     <a:lstStyle/>
                     <a:p>
                       <a:pPr algn="ctr">
@@ -6663,7 +6919,7 @@
                       </a:r>
                     </a:p>
                   </a:txBody>
-                  <a:tcPr marL="27432" marR="27432" marT="18288" marB="18288">
+                  <a:tcPr marL="27432" marR="27432" marT="18288" marB="18288" anchor="ctr">
                     <a:solidFill>
                       <a:srgbClr val="F4F4F4"/>
                     </a:solidFill>
@@ -6671,7 +6927,7 @@
                 </a:tc>
                 <a:tc>
                   <a:txBody>
-                    <a:bodyPr wrap="square" lIns="27432" rIns="27432" tIns="18288" bIns="18288" anchor="ctr"/>
+                    <a:bodyPr/>
                     <a:lstStyle/>
                     <a:p>
                       <a:pPr algn="ctr">
@@ -6695,12 +6951,17 @@
                       </a:r>
                     </a:p>
                   </a:txBody>
-                  <a:tcPr marL="27432" marR="27432" marT="18288" marB="18288">
+                  <a:tcPr marL="27432" marR="27432" marT="18288" marB="18288" anchor="ctr">
                     <a:solidFill>
                       <a:srgbClr val="F4F4F4"/>
                     </a:solidFill>
                   </a:tcPr>
                 </a:tc>
+                <a:extLst>
+                  <a:ext uri="{0D108BD9-81ED-4DB2-BD59-A6C34878D82A}">
+                    <a16:rowId xmlns:a16="http://schemas.microsoft.com/office/drawing/2014/main" val="10008"/>
+                  </a:ext>
+                </a:extLst>
               </a:tr>
             </a:tbl>
           </a:graphicData>
@@ -6723,7 +6984,7 @@
           <a:noFill/>
         </p:spPr>
         <p:txBody>
-          <a:bodyPr wrap="square" lIns="27432" rIns="27432" tIns="18288" bIns="18288"/>
+          <a:bodyPr wrap="square" lIns="27432" tIns="18288" rIns="27432" bIns="18288"/>
           <a:lstStyle/>
           <a:p>
             <a:pPr algn="l">
@@ -6798,8 +7059,8 @@
         </p:nvSpPr>
         <p:spPr>
           <a:xfrm>
-            <a:off x="658368" y="5806440"/>
-            <a:ext cx="7909560" cy="502920"/>
+            <a:off x="658368" y="5852160"/>
+            <a:ext cx="7522748" cy="502920"/>
           </a:xfrm>
           <a:prstGeom prst="rect">
             <a:avLst/>
@@ -6807,7 +7068,7 @@
           <a:noFill/>
         </p:spPr>
         <p:txBody>
-          <a:bodyPr wrap="square" lIns="27432" rIns="27432" tIns="18288" bIns="18288"/>
+          <a:bodyPr wrap="square" lIns="27432" tIns="18288" rIns="27432" bIns="18288"/>
           <a:lstStyle/>
           <a:p>
             <a:pPr algn="l">
@@ -6827,7 +7088,36 @@
                 <a:ea typeface="メイリオ"/>
                 <a:cs typeface="Times New Roman"/>
               </a:rPr>
-              <a:t>まとめ: ADラベルは入力空間から決まる。全体性能だけでなく、AD外の誤差増加と個別サンプルをセットで読む。</a:t>
+              <a:t>まとめ: ADラベルは入力空間から決まる。</a:t>
+            </a:r>
+            <a:endParaRPr lang="en-US" sz="1800" b="1">
+              <a:solidFill>
+                <a:srgbClr val="000000"/>
+              </a:solidFill>
+              <a:latin typeface="Times New Roman"/>
+              <a:ea typeface="メイリオ"/>
+              <a:cs typeface="Times New Roman"/>
+            </a:endParaRPr>
+          </a:p>
+          <a:p>
+            <a:pPr algn="l">
+              <a:lnSpc>
+                <a:spcPct val="100000"/>
+              </a:lnSpc>
+              <a:spcAft>
+                <a:spcPts val="200"/>
+              </a:spcAft>
+            </a:pPr>
+            <a:r>
+              <a:rPr sz="1800" b="1">
+                <a:solidFill>
+                  <a:srgbClr val="000000"/>
+                </a:solidFill>
+                <a:latin typeface="Times New Roman"/>
+                <a:ea typeface="メイリオ"/>
+                <a:cs typeface="Times New Roman"/>
+              </a:rPr>
+              <a:t>全体性能だけでなく、AD外の誤差増加と個別サンプルをセットで読む。</a:t>
             </a:r>
           </a:p>
         </p:txBody>
@@ -6849,7 +7139,7 @@
           <a:noFill/>
         </p:spPr>
         <p:txBody>
-          <a:bodyPr wrap="square" lIns="27432" rIns="27432" tIns="18288" bIns="18288"/>
+          <a:bodyPr wrap="square" lIns="27432" tIns="18288" rIns="27432" bIns="18288"/>
           <a:lstStyle/>
           <a:p>
             <a:pPr algn="l">
@@ -6883,7 +7173,7 @@
 </file>
 
 <file path=ppt/slides/slide2.xml><?xml version="1.0" encoding="utf-8"?>
-<p:sld xmlns:a="http://schemas.openxmlformats.org/drawingml/2006/main" xmlns:p="http://schemas.openxmlformats.org/presentationml/2006/main" xmlns:r="http://schemas.openxmlformats.org/officeDocument/2006/relationships">
+<p:sld xmlns:a="http://schemas.openxmlformats.org/drawingml/2006/main" xmlns:r="http://schemas.openxmlformats.org/officeDocument/2006/relationships" xmlns:p="http://schemas.openxmlformats.org/presentationml/2006/main">
   <p:cSld>
     <p:spTree>
       <p:nvGrpSpPr>
@@ -6891,7 +7181,14 @@
         <p:cNvGrpSpPr/>
         <p:nvPr/>
       </p:nvGrpSpPr>
-      <p:grpSpPr/>
+      <p:grpSpPr>
+        <a:xfrm>
+          <a:off x="0" y="0"/>
+          <a:ext cx="0" cy="0"/>
+          <a:chOff x="0" y="0"/>
+          <a:chExt cx="0" cy="0"/>
+        </a:xfrm>
+      </p:grpSpPr>
       <p:sp>
         <p:nvSpPr>
           <p:cNvPr id="2" name="TextBox 1"/>
@@ -6909,7 +7206,7 @@
           <a:noFill/>
         </p:spPr>
         <p:txBody>
-          <a:bodyPr wrap="square" anchor="t" lIns="0" rIns="0" tIns="0" bIns="0">
+          <a:bodyPr wrap="square" lIns="0" tIns="0" rIns="0" bIns="0" anchor="t">
             <a:spAutoFit/>
           </a:bodyPr>
           <a:lstStyle/>
@@ -6978,6 +7275,7 @@
           <a:lstStyle/>
           <a:p>
             <a:pPr algn="ctr"/>
+            <a:endParaRPr/>
           </a:p>
         </p:txBody>
       </p:sp>
@@ -6989,8 +7287,8 @@
         </p:nvSpPr>
         <p:spPr>
           <a:xfrm>
-            <a:off x="640080" y="1325880"/>
-            <a:ext cx="4709160" cy="2743200"/>
+            <a:off x="187877" y="1325880"/>
+            <a:ext cx="5376247" cy="2219967"/>
           </a:xfrm>
           <a:prstGeom prst="rect">
             <a:avLst/>
@@ -6998,7 +7296,7 @@
           <a:noFill/>
         </p:spPr>
         <p:txBody>
-          <a:bodyPr wrap="square" anchor="t" lIns="27432" rIns="27432" tIns="27432" bIns="27432">
+          <a:bodyPr wrap="square" lIns="27432" tIns="27432" rIns="27432" bIns="27432" anchor="t">
             <a:spAutoFit/>
           </a:bodyPr>
           <a:lstStyle/>
@@ -7020,7 +7318,36 @@
                 <a:ea typeface="メイリオ"/>
                 <a:cs typeface="Times New Roman"/>
               </a:rPr>
-              <a:t>・ 本編では、RMSE最小モデルを選び、その予測結果に AD ラベルを付けて確認した</a:t>
+              <a:t>・ 本編では、RMSE最小モデルを選び、</a:t>
+            </a:r>
+            <a:endParaRPr lang="en-US" sz="2100" b="0">
+              <a:solidFill>
+                <a:srgbClr val="000000"/>
+              </a:solidFill>
+              <a:latin typeface="Times New Roman"/>
+              <a:ea typeface="メイリオ"/>
+              <a:cs typeface="Times New Roman"/>
+            </a:endParaRPr>
+          </a:p>
+          <a:p>
+            <a:pPr algn="l">
+              <a:lnSpc>
+                <a:spcPct val="108000"/>
+              </a:lnSpc>
+              <a:spcAft>
+                <a:spcPts val="200"/>
+              </a:spcAft>
+            </a:pPr>
+            <a:r>
+              <a:rPr sz="2100" b="0">
+                <a:solidFill>
+                  <a:srgbClr val="000000"/>
+                </a:solidFill>
+                <a:latin typeface="Times New Roman"/>
+                <a:ea typeface="メイリオ"/>
+                <a:cs typeface="Times New Roman"/>
+              </a:rPr>
+              <a:t>その予測結果に AD ラベルを付けて確認した</a:t>
             </a:r>
           </a:p>
           <a:p>
@@ -7109,6 +7436,7 @@
           <a:lstStyle/>
           <a:p>
             <a:pPr algn="ctr"/>
+            <a:endParaRPr/>
           </a:p>
         </p:txBody>
       </p:sp>
@@ -7129,7 +7457,7 @@
           <a:noFill/>
         </p:spPr>
         <p:txBody>
-          <a:bodyPr wrap="square" anchor="t" lIns="9144" rIns="9144" tIns="9144" bIns="9144">
+          <a:bodyPr wrap="square" lIns="9144" tIns="9144" rIns="9144" bIns="9144" anchor="t">
             <a:spAutoFit/>
           </a:bodyPr>
           <a:lstStyle/>
@@ -7173,7 +7501,7 @@
           <a:noFill/>
         </p:spPr>
         <p:txBody>
-          <a:bodyPr wrap="square" anchor="ctr" lIns="9144" rIns="9144" tIns="9144" bIns="9144">
+          <a:bodyPr wrap="square" lIns="9144" tIns="9144" rIns="9144" bIns="9144" anchor="ctr">
             <a:normAutofit/>
           </a:bodyPr>
           <a:lstStyle/>
@@ -7242,6 +7570,7 @@
           <a:lstStyle/>
           <a:p>
             <a:pPr algn="ctr"/>
+            <a:endParaRPr/>
           </a:p>
         </p:txBody>
       </p:sp>
@@ -7262,7 +7591,7 @@
           <a:noFill/>
         </p:spPr>
         <p:txBody>
-          <a:bodyPr wrap="square" anchor="t" lIns="9144" rIns="9144" tIns="9144" bIns="9144">
+          <a:bodyPr wrap="square" lIns="9144" tIns="9144" rIns="9144" bIns="9144" anchor="t">
             <a:spAutoFit/>
           </a:bodyPr>
           <a:lstStyle/>
@@ -7306,7 +7635,7 @@
           <a:noFill/>
         </p:spPr>
         <p:txBody>
-          <a:bodyPr wrap="square" anchor="ctr" lIns="9144" rIns="9144" tIns="9144" bIns="9144">
+          <a:bodyPr wrap="square" lIns="9144" tIns="9144" rIns="9144" bIns="9144" anchor="ctr">
             <a:normAutofit/>
           </a:bodyPr>
           <a:lstStyle/>
@@ -7375,6 +7704,7 @@
           <a:lstStyle/>
           <a:p>
             <a:pPr algn="ctr"/>
+            <a:endParaRPr/>
           </a:p>
         </p:txBody>
       </p:sp>
@@ -7395,7 +7725,7 @@
           <a:noFill/>
         </p:spPr>
         <p:txBody>
-          <a:bodyPr wrap="square" anchor="t" lIns="9144" rIns="9144" tIns="9144" bIns="9144">
+          <a:bodyPr wrap="square" lIns="9144" tIns="9144" rIns="9144" bIns="9144" anchor="t">
             <a:spAutoFit/>
           </a:bodyPr>
           <a:lstStyle/>
@@ -7439,7 +7769,7 @@
           <a:noFill/>
         </p:spPr>
         <p:txBody>
-          <a:bodyPr wrap="square" anchor="ctr" lIns="9144" rIns="9144" tIns="9144" bIns="9144">
+          <a:bodyPr wrap="square" lIns="9144" tIns="9144" rIns="9144" bIns="9144" anchor="ctr">
             <a:normAutofit/>
           </a:bodyPr>
           <a:lstStyle/>
@@ -7508,6 +7838,7 @@
           <a:lstStyle/>
           <a:p>
             <a:pPr algn="ctr"/>
+            <a:endParaRPr/>
           </a:p>
         </p:txBody>
       </p:sp>
@@ -7528,7 +7859,7 @@
           <a:noFill/>
         </p:spPr>
         <p:txBody>
-          <a:bodyPr wrap="square" anchor="t" lIns="9144" rIns="9144" tIns="9144" bIns="9144">
+          <a:bodyPr wrap="square" lIns="9144" tIns="9144" rIns="9144" bIns="9144" anchor="t">
             <a:spAutoFit/>
           </a:bodyPr>
           <a:lstStyle/>
@@ -7572,7 +7903,7 @@
           <a:noFill/>
         </p:spPr>
         <p:txBody>
-          <a:bodyPr wrap="square" anchor="ctr" lIns="9144" rIns="9144" tIns="9144" bIns="9144">
+          <a:bodyPr wrap="square" lIns="9144" tIns="9144" rIns="9144" bIns="9144" anchor="ctr">
             <a:normAutofit/>
           </a:bodyPr>
           <a:lstStyle/>
@@ -7607,8 +7938,8 @@
         </p:nvSpPr>
         <p:spPr>
           <a:xfrm>
-            <a:off x="566928" y="4754880"/>
-            <a:ext cx="8046720" cy="502920"/>
+            <a:off x="1838794" y="4572000"/>
+            <a:ext cx="5466411" cy="1103187"/>
           </a:xfrm>
           <a:prstGeom prst="rect">
             <a:avLst/>
@@ -7616,7 +7947,7 @@
           <a:noFill/>
         </p:spPr>
         <p:txBody>
-          <a:bodyPr wrap="square" anchor="t" lIns="18288" rIns="18288" tIns="18288" bIns="18288">
+          <a:bodyPr wrap="square" lIns="18288" tIns="18288" rIns="18288" bIns="18288" anchor="t">
             <a:spAutoFit/>
           </a:bodyPr>
           <a:lstStyle/>
@@ -7638,7 +7969,36 @@
                 <a:ea typeface="メイリオ"/>
                 <a:cs typeface="Times New Roman"/>
               </a:rPr>
-              <a:t>AD は「モデルが何を予測したか」ではなく「入力が学習データにどれだけ近いか」から決まる</a:t>
+              <a:t>AD は「モデルが何を予測したか」ではなく「入力が学習データにどれだけ近いか」</a:t>
+            </a:r>
+            <a:endParaRPr lang="en-US" sz="2100" b="1">
+              <a:solidFill>
+                <a:srgbClr val="000000"/>
+              </a:solidFill>
+              <a:latin typeface="Times New Roman"/>
+              <a:ea typeface="メイリオ"/>
+              <a:cs typeface="Times New Roman"/>
+            </a:endParaRPr>
+          </a:p>
+          <a:p>
+            <a:pPr algn="ctr">
+              <a:lnSpc>
+                <a:spcPct val="108000"/>
+              </a:lnSpc>
+              <a:spcAft>
+                <a:spcPts val="200"/>
+              </a:spcAft>
+            </a:pPr>
+            <a:r>
+              <a:rPr sz="2100" b="1">
+                <a:solidFill>
+                  <a:srgbClr val="000000"/>
+                </a:solidFill>
+                <a:latin typeface="Times New Roman"/>
+                <a:ea typeface="メイリオ"/>
+                <a:cs typeface="Times New Roman"/>
+              </a:rPr>
+              <a:t>から決まる</a:t>
             </a:r>
           </a:p>
         </p:txBody>
@@ -7660,7 +8020,7 @@
           <a:noFill/>
         </p:spPr>
         <p:txBody>
-          <a:bodyPr wrap="square" anchor="t" lIns="0" rIns="0" tIns="0" bIns="0">
+          <a:bodyPr wrap="square" lIns="0" tIns="0" rIns="0" bIns="0" anchor="t">
             <a:spAutoFit/>
           </a:bodyPr>
           <a:lstStyle/>
@@ -7696,7 +8056,7 @@
 </file>
 
 <file path=ppt/slides/slide3.xml><?xml version="1.0" encoding="utf-8"?>
-<p:sld xmlns:a="http://schemas.openxmlformats.org/drawingml/2006/main" xmlns:p="http://schemas.openxmlformats.org/presentationml/2006/main" xmlns:r="http://schemas.openxmlformats.org/officeDocument/2006/relationships">
+<p:sld xmlns:a="http://schemas.openxmlformats.org/drawingml/2006/main" xmlns:r="http://schemas.openxmlformats.org/officeDocument/2006/relationships" xmlns:p="http://schemas.openxmlformats.org/presentationml/2006/main">
   <p:cSld>
     <p:spTree>
       <p:nvGrpSpPr>
@@ -7704,7 +8064,14 @@
         <p:cNvGrpSpPr/>
         <p:nvPr/>
       </p:nvGrpSpPr>
-      <p:grpSpPr/>
+      <p:grpSpPr>
+        <a:xfrm>
+          <a:off x="0" y="0"/>
+          <a:ext cx="0" cy="0"/>
+          <a:chOff x="0" y="0"/>
+          <a:chExt cx="0" cy="0"/>
+        </a:xfrm>
+      </p:grpSpPr>
       <p:sp>
         <p:nvSpPr>
           <p:cNvPr id="2" name="TextBox 1"/>
@@ -7722,7 +8089,7 @@
           <a:noFill/>
         </p:spPr>
         <p:txBody>
-          <a:bodyPr wrap="square" anchor="t" lIns="0" rIns="0" tIns="0" bIns="0">
+          <a:bodyPr wrap="square" lIns="0" tIns="0" rIns="0" bIns="0" anchor="t">
             <a:spAutoFit/>
           </a:bodyPr>
           <a:lstStyle/>
@@ -7791,6 +8158,7 @@
           <a:lstStyle/>
           <a:p>
             <a:pPr algn="ctr"/>
+            <a:endParaRPr/>
           </a:p>
         </p:txBody>
       </p:sp>
@@ -7836,6 +8204,7 @@
           <a:lstStyle/>
           <a:p>
             <a:pPr algn="ctr"/>
+            <a:endParaRPr/>
           </a:p>
         </p:txBody>
       </p:sp>
@@ -7856,7 +8225,7 @@
           <a:noFill/>
         </p:spPr>
         <p:txBody>
-          <a:bodyPr wrap="square" anchor="t" lIns="9144" rIns="9144" tIns="9144" bIns="9144">
+          <a:bodyPr wrap="square" lIns="9144" tIns="9144" rIns="9144" bIns="9144" anchor="t">
             <a:spAutoFit/>
           </a:bodyPr>
           <a:lstStyle/>
@@ -7900,7 +8269,7 @@
           <a:noFill/>
         </p:spPr>
         <p:txBody>
-          <a:bodyPr wrap="square" anchor="t" lIns="9144" rIns="9144" tIns="9144" bIns="9144">
+          <a:bodyPr wrap="square" lIns="9144" tIns="9144" rIns="9144" bIns="9144" anchor="t">
             <a:normAutofit/>
           </a:bodyPr>
           <a:lstStyle/>
@@ -8025,6 +8394,7 @@
           <a:lstStyle/>
           <a:p>
             <a:pPr algn="ctr"/>
+            <a:endParaRPr/>
           </a:p>
         </p:txBody>
       </p:sp>
@@ -8045,7 +8415,7 @@
           <a:noFill/>
         </p:spPr>
         <p:txBody>
-          <a:bodyPr wrap="square" anchor="t" lIns="9144" rIns="9144" tIns="9144" bIns="9144">
+          <a:bodyPr wrap="square" lIns="9144" tIns="9144" rIns="9144" bIns="9144" anchor="t">
             <a:spAutoFit/>
           </a:bodyPr>
           <a:lstStyle/>
@@ -8089,7 +8459,7 @@
           <a:noFill/>
         </p:spPr>
         <p:txBody>
-          <a:bodyPr wrap="square" anchor="t" lIns="9144" rIns="9144" tIns="9144" bIns="9144">
+          <a:bodyPr wrap="square" lIns="9144" tIns="9144" rIns="9144" bIns="9144" anchor="t">
             <a:normAutofit/>
           </a:bodyPr>
           <a:lstStyle/>
@@ -8214,6 +8584,7 @@
           <a:lstStyle/>
           <a:p>
             <a:pPr algn="ctr"/>
+            <a:endParaRPr/>
           </a:p>
         </p:txBody>
       </p:sp>
@@ -8234,7 +8605,7 @@
           <a:noFill/>
         </p:spPr>
         <p:txBody>
-          <a:bodyPr wrap="square" anchor="t" lIns="9144" rIns="9144" tIns="9144" bIns="9144">
+          <a:bodyPr wrap="square" lIns="9144" tIns="9144" rIns="9144" bIns="9144" anchor="t">
             <a:spAutoFit/>
           </a:bodyPr>
           <a:lstStyle/>
@@ -8278,7 +8649,7 @@
           <a:noFill/>
         </p:spPr>
         <p:txBody>
-          <a:bodyPr wrap="square" anchor="t" lIns="9144" rIns="9144" tIns="9144" bIns="9144">
+          <a:bodyPr wrap="square" lIns="9144" tIns="9144" rIns="9144" bIns="9144" anchor="t">
             <a:normAutofit/>
           </a:bodyPr>
           <a:lstStyle/>
@@ -8368,6 +8739,7 @@
           <a:lstStyle/>
           <a:p>
             <a:pPr algn="ctr"/>
+            <a:endParaRPr/>
           </a:p>
         </p:txBody>
       </p:sp>
@@ -8388,7 +8760,7 @@
           <a:noFill/>
         </p:spPr>
         <p:txBody>
-          <a:bodyPr wrap="square" anchor="t" lIns="9144" rIns="9144" tIns="9144" bIns="9144">
+          <a:bodyPr wrap="square" lIns="9144" tIns="9144" rIns="9144" bIns="9144" anchor="t">
             <a:spAutoFit/>
           </a:bodyPr>
           <a:lstStyle/>
@@ -8432,7 +8804,7 @@
           <a:noFill/>
         </p:spPr>
         <p:txBody>
-          <a:bodyPr wrap="square" anchor="t" lIns="9144" rIns="9144" tIns="9144" bIns="9144">
+          <a:bodyPr wrap="square" lIns="9144" tIns="9144" rIns="9144" bIns="9144" anchor="t">
             <a:normAutofit/>
           </a:bodyPr>
           <a:lstStyle/>
@@ -8557,6 +8929,7 @@
           <a:lstStyle/>
           <a:p>
             <a:pPr algn="ctr"/>
+            <a:endParaRPr/>
           </a:p>
         </p:txBody>
       </p:sp>
@@ -8577,7 +8950,7 @@
           <a:noFill/>
         </p:spPr>
         <p:txBody>
-          <a:bodyPr wrap="square" anchor="t" lIns="9144" rIns="9144" tIns="9144" bIns="9144">
+          <a:bodyPr wrap="square" lIns="9144" tIns="9144" rIns="9144" bIns="9144" anchor="t">
             <a:spAutoFit/>
           </a:bodyPr>
           <a:lstStyle/>
@@ -8621,7 +8994,7 @@
           <a:noFill/>
         </p:spPr>
         <p:txBody>
-          <a:bodyPr wrap="square" anchor="t" lIns="9144" rIns="9144" tIns="9144" bIns="9144">
+          <a:bodyPr wrap="square" lIns="9144" tIns="9144" rIns="9144" bIns="9144" anchor="t">
             <a:normAutofit/>
           </a:bodyPr>
           <a:lstStyle/>
@@ -8746,6 +9119,7 @@
           <a:lstStyle/>
           <a:p>
             <a:pPr algn="ctr"/>
+            <a:endParaRPr/>
           </a:p>
         </p:txBody>
       </p:sp>
@@ -8766,7 +9140,7 @@
           <a:noFill/>
         </p:spPr>
         <p:txBody>
-          <a:bodyPr wrap="square" anchor="t" lIns="9144" rIns="9144" tIns="9144" bIns="9144">
+          <a:bodyPr wrap="square" lIns="9144" tIns="9144" rIns="9144" bIns="9144" anchor="t">
             <a:spAutoFit/>
           </a:bodyPr>
           <a:lstStyle/>
@@ -8810,7 +9184,7 @@
           <a:noFill/>
         </p:spPr>
         <p:txBody>
-          <a:bodyPr wrap="square" anchor="t" lIns="9144" rIns="9144" tIns="9144" bIns="9144">
+          <a:bodyPr wrap="square" lIns="9144" tIns="9144" rIns="9144" bIns="9144" anchor="t">
             <a:normAutofit/>
           </a:bodyPr>
           <a:lstStyle/>
@@ -8866,8 +9240,8 @@
         </p:nvSpPr>
         <p:spPr>
           <a:xfrm>
-            <a:off x="640080" y="5596128"/>
-            <a:ext cx="7863840" cy="438912"/>
+            <a:off x="1010092" y="5440680"/>
+            <a:ext cx="7123815" cy="710066"/>
           </a:xfrm>
           <a:prstGeom prst="rect">
             <a:avLst/>
@@ -8875,7 +9249,7 @@
           <a:noFill/>
         </p:spPr>
         <p:txBody>
-          <a:bodyPr wrap="square" anchor="t" lIns="9144" rIns="9144" tIns="9144" bIns="9144">
+          <a:bodyPr wrap="square" lIns="9144" tIns="9144" rIns="9144" bIns="9144" anchor="t">
             <a:spAutoFit/>
           </a:bodyPr>
           <a:lstStyle/>
@@ -8919,7 +9293,7 @@
           <a:noFill/>
         </p:spPr>
         <p:txBody>
-          <a:bodyPr wrap="square" anchor="t" lIns="0" rIns="0" tIns="0" bIns="0">
+          <a:bodyPr wrap="square" lIns="0" tIns="0" rIns="0" bIns="0" anchor="t">
             <a:spAutoFit/>
           </a:bodyPr>
           <a:lstStyle/>
@@ -8955,7 +9329,7 @@
 </file>
 
 <file path=ppt/slides/slide4.xml><?xml version="1.0" encoding="utf-8"?>
-<p:sld xmlns:a="http://schemas.openxmlformats.org/drawingml/2006/main" xmlns:p="http://schemas.openxmlformats.org/presentationml/2006/main" xmlns:r="http://schemas.openxmlformats.org/officeDocument/2006/relationships">
+<p:sld xmlns:a="http://schemas.openxmlformats.org/drawingml/2006/main" xmlns:r="http://schemas.openxmlformats.org/officeDocument/2006/relationships" xmlns:p="http://schemas.openxmlformats.org/presentationml/2006/main">
   <p:cSld>
     <p:spTree>
       <p:nvGrpSpPr>
@@ -8963,7 +9337,14 @@
         <p:cNvGrpSpPr/>
         <p:nvPr/>
       </p:nvGrpSpPr>
-      <p:grpSpPr/>
+      <p:grpSpPr>
+        <a:xfrm>
+          <a:off x="0" y="0"/>
+          <a:ext cx="0" cy="0"/>
+          <a:chOff x="0" y="0"/>
+          <a:chExt cx="0" cy="0"/>
+        </a:xfrm>
+      </p:grpSpPr>
       <p:sp>
         <p:nvSpPr>
           <p:cNvPr id="2" name="TextBox 1"/>
@@ -8981,7 +9362,7 @@
           <a:noFill/>
         </p:spPr>
         <p:txBody>
-          <a:bodyPr wrap="square" anchor="t" lIns="0" rIns="0" tIns="0" bIns="0">
+          <a:bodyPr wrap="square" lIns="0" tIns="0" rIns="0" bIns="0" anchor="t">
             <a:spAutoFit/>
           </a:bodyPr>
           <a:lstStyle/>
@@ -9050,6 +9431,7 @@
           <a:lstStyle/>
           <a:p>
             <a:pPr algn="ctr"/>
+            <a:endParaRPr/>
           </a:p>
         </p:txBody>
       </p:sp>
@@ -9062,7 +9444,7 @@
         <p:spPr>
           <a:xfrm>
             <a:off x="530352" y="1170432"/>
-            <a:ext cx="4297680" cy="1874519"/>
+            <a:ext cx="4297680" cy="2258568"/>
           </a:xfrm>
           <a:prstGeom prst="rect">
             <a:avLst/>
@@ -9095,6 +9477,7 @@
           <a:lstStyle/>
           <a:p>
             <a:pPr algn="ctr"/>
+            <a:endParaRPr/>
           </a:p>
         </p:txBody>
       </p:sp>
@@ -9115,7 +9498,7 @@
           <a:noFill/>
         </p:spPr>
         <p:txBody>
-          <a:bodyPr wrap="square" anchor="t" lIns="9144" rIns="9144" tIns="9144" bIns="9144">
+          <a:bodyPr wrap="square" lIns="9144" tIns="9144" rIns="9144" bIns="9144" anchor="t">
             <a:normAutofit/>
           </a:bodyPr>
           <a:lstStyle/>
@@ -9243,7 +9626,7 @@
           <a:noFill/>
         </p:spPr>
         <p:txBody>
-          <a:bodyPr wrap="square" anchor="t" lIns="27432" rIns="27432" tIns="27432" bIns="27432">
+          <a:bodyPr wrap="square" lIns="27432" tIns="27432" rIns="27432" bIns="27432" anchor="t">
             <a:spAutoFit/>
           </a:bodyPr>
           <a:lstStyle/>
@@ -9318,11 +9701,17 @@
           <p:cNvGraphicFramePr>
             <a:graphicFrameLocks noGrp="1"/>
           </p:cNvGraphicFramePr>
-          <p:nvPr/>
+          <p:nvPr>
+            <p:extLst>
+              <p:ext uri="{D42A27DB-BD31-4B8C-83A1-F6EECF244321}">
+                <p14:modId xmlns:p14="http://schemas.microsoft.com/office/powerpoint/2010/main" val="2928511899"/>
+              </p:ext>
+            </p:extLst>
+          </p:nvPr>
         </p:nvGraphicFramePr>
         <p:xfrm>
           <a:off x="658368" y="3730752"/>
-          <a:ext cx="3886198" cy="1353310"/>
+          <a:ext cx="3886198" cy="1828800"/>
         </p:xfrm>
         <a:graphic>
           <a:graphicData uri="http://schemas.openxmlformats.org/drawingml/2006/table">
@@ -9331,14 +9720,32 @@
                 <a:tableStyleId>{5C22544A-7EE6-4342-B048-85BDC9FD1C3A}</a:tableStyleId>
               </a:tblPr>
               <a:tblGrid>
-                <a:gridCol w="1665514"/>
-                <a:gridCol w="1110342"/>
-                <a:gridCol w="1110342"/>
+                <a:gridCol w="1665514">
+                  <a:extLst>
+                    <a:ext uri="{9D8B030D-6E8A-4147-A177-3AD203B41FA5}">
+                      <a16:colId xmlns:a16="http://schemas.microsoft.com/office/drawing/2014/main" val="20000"/>
+                    </a:ext>
+                  </a:extLst>
+                </a:gridCol>
+                <a:gridCol w="1110342">
+                  <a:extLst>
+                    <a:ext uri="{9D8B030D-6E8A-4147-A177-3AD203B41FA5}">
+                      <a16:colId xmlns:a16="http://schemas.microsoft.com/office/drawing/2014/main" val="20001"/>
+                    </a:ext>
+                  </a:extLst>
+                </a:gridCol>
+                <a:gridCol w="1110342">
+                  <a:extLst>
+                    <a:ext uri="{9D8B030D-6E8A-4147-A177-3AD203B41FA5}">
+                      <a16:colId xmlns:a16="http://schemas.microsoft.com/office/drawing/2014/main" val="20002"/>
+                    </a:ext>
+                  </a:extLst>
+                </a:gridCol>
               </a:tblGrid>
               <a:tr h="270662">
                 <a:tc>
                   <a:txBody>
-                    <a:bodyPr lIns="27432" rIns="27432" tIns="18288" bIns="18288"/>
+                    <a:bodyPr/>
                     <a:lstStyle/>
                     <a:p>
                       <a:pPr algn="ctr"/>
@@ -9355,7 +9762,7 @@
                       </a:r>
                     </a:p>
                   </a:txBody>
-                  <a:tcPr>
+                  <a:tcPr anchor="ctr">
                     <a:solidFill>
                       <a:srgbClr val="000000"/>
                     </a:solidFill>
@@ -9363,7 +9770,7 @@
                 </a:tc>
                 <a:tc>
                   <a:txBody>
-                    <a:bodyPr lIns="27432" rIns="27432" tIns="18288" bIns="18288"/>
+                    <a:bodyPr/>
                     <a:lstStyle/>
                     <a:p>
                       <a:pPr algn="ctr"/>
@@ -9380,7 +9787,7 @@
                       </a:r>
                     </a:p>
                   </a:txBody>
-                  <a:tcPr>
+                  <a:tcPr anchor="ctr">
                     <a:solidFill>
                       <a:srgbClr val="000000"/>
                     </a:solidFill>
@@ -9388,7 +9795,7 @@
                 </a:tc>
                 <a:tc>
                   <a:txBody>
-                    <a:bodyPr lIns="27432" rIns="27432" tIns="18288" bIns="18288"/>
+                    <a:bodyPr/>
                     <a:lstStyle/>
                     <a:p>
                       <a:pPr algn="ctr"/>
@@ -9405,22 +9812,25 @@
                       </a:r>
                     </a:p>
                   </a:txBody>
-                  <a:tcPr>
+                  <a:tcPr anchor="ctr">
                     <a:solidFill>
                       <a:srgbClr val="000000"/>
                     </a:solidFill>
                   </a:tcPr>
                 </a:tc>
+                <a:extLst>
+                  <a:ext uri="{0D108BD9-81ED-4DB2-BD59-A6C34878D82A}">
+                    <a16:rowId xmlns:a16="http://schemas.microsoft.com/office/drawing/2014/main" val="10000"/>
+                  </a:ext>
+                </a:extLst>
               </a:tr>
               <a:tr h="270662">
                 <a:tc>
                   <a:txBody>
-                    <a:bodyPr wrap="square" lIns="27432" rIns="27432" tIns="18288" bIns="18288">
-                      <a:normAutofit/>
-                    </a:bodyPr>
-                    <a:lstStyle/>
-                    <a:p>
-                      <a:pPr algn="l"/>
+                    <a:bodyPr/>
+                    <a:lstStyle/>
+                    <a:p>
+                      <a:pPr algn="ctr"/>
                       <a:r>
                         <a:rPr sz="1800" b="1">
                           <a:solidFill>
@@ -9434,7 +9844,7 @@
                       </a:r>
                     </a:p>
                   </a:txBody>
-                  <a:tcPr>
+                  <a:tcPr anchor="ctr">
                     <a:solidFill>
                       <a:srgbClr val="FFFFFF"/>
                     </a:solidFill>
@@ -9442,9 +9852,7 @@
                 </a:tc>
                 <a:tc>
                   <a:txBody>
-                    <a:bodyPr wrap="square" lIns="27432" rIns="27432" tIns="18288" bIns="18288">
-                      <a:normAutofit/>
-                    </a:bodyPr>
+                    <a:bodyPr/>
                     <a:lstStyle/>
                     <a:p>
                       <a:pPr algn="ctr"/>
@@ -9461,7 +9869,7 @@
                       </a:r>
                     </a:p>
                   </a:txBody>
-                  <a:tcPr>
+                  <a:tcPr anchor="ctr">
                     <a:solidFill>
                       <a:srgbClr val="FFFFFF"/>
                     </a:solidFill>
@@ -9469,9 +9877,7 @@
                 </a:tc>
                 <a:tc>
                   <a:txBody>
-                    <a:bodyPr wrap="square" lIns="27432" rIns="27432" tIns="18288" bIns="18288">
-                      <a:normAutofit/>
-                    </a:bodyPr>
+                    <a:bodyPr/>
                     <a:lstStyle/>
                     <a:p>
                       <a:pPr algn="ctr"/>
@@ -9488,22 +9894,25 @@
                       </a:r>
                     </a:p>
                   </a:txBody>
-                  <a:tcPr>
+                  <a:tcPr anchor="ctr">
                     <a:solidFill>
                       <a:srgbClr val="FFFFFF"/>
                     </a:solidFill>
                   </a:tcPr>
                 </a:tc>
+                <a:extLst>
+                  <a:ext uri="{0D108BD9-81ED-4DB2-BD59-A6C34878D82A}">
+                    <a16:rowId xmlns:a16="http://schemas.microsoft.com/office/drawing/2014/main" val="10001"/>
+                  </a:ext>
+                </a:extLst>
               </a:tr>
               <a:tr h="270662">
                 <a:tc>
                   <a:txBody>
-                    <a:bodyPr wrap="square" lIns="27432" rIns="27432" tIns="18288" bIns="18288">
-                      <a:normAutofit/>
-                    </a:bodyPr>
-                    <a:lstStyle/>
-                    <a:p>
-                      <a:pPr algn="l"/>
+                    <a:bodyPr/>
+                    <a:lstStyle/>
+                    <a:p>
+                      <a:pPr algn="ctr"/>
                       <a:r>
                         <a:rPr sz="1800" b="1">
                           <a:solidFill>
@@ -9517,7 +9926,7 @@
                       </a:r>
                     </a:p>
                   </a:txBody>
-                  <a:tcPr>
+                  <a:tcPr anchor="ctr">
                     <a:solidFill>
                       <a:srgbClr val="F8F8F8"/>
                     </a:solidFill>
@@ -9525,9 +9934,7 @@
                 </a:tc>
                 <a:tc>
                   <a:txBody>
-                    <a:bodyPr wrap="square" lIns="27432" rIns="27432" tIns="18288" bIns="18288">
-                      <a:normAutofit/>
-                    </a:bodyPr>
+                    <a:bodyPr/>
                     <a:lstStyle/>
                     <a:p>
                       <a:pPr algn="ctr"/>
@@ -9544,7 +9951,7 @@
                       </a:r>
                     </a:p>
                   </a:txBody>
-                  <a:tcPr>
+                  <a:tcPr anchor="ctr">
                     <a:solidFill>
                       <a:srgbClr val="F8F8F8"/>
                     </a:solidFill>
@@ -9552,9 +9959,7 @@
                 </a:tc>
                 <a:tc>
                   <a:txBody>
-                    <a:bodyPr wrap="square" lIns="27432" rIns="27432" tIns="18288" bIns="18288">
-                      <a:normAutofit/>
-                    </a:bodyPr>
+                    <a:bodyPr/>
                     <a:lstStyle/>
                     <a:p>
                       <a:pPr algn="ctr"/>
@@ -9571,22 +9976,25 @@
                       </a:r>
                     </a:p>
                   </a:txBody>
-                  <a:tcPr>
+                  <a:tcPr anchor="ctr">
                     <a:solidFill>
                       <a:srgbClr val="F8F8F8"/>
                     </a:solidFill>
                   </a:tcPr>
                 </a:tc>
+                <a:extLst>
+                  <a:ext uri="{0D108BD9-81ED-4DB2-BD59-A6C34878D82A}">
+                    <a16:rowId xmlns:a16="http://schemas.microsoft.com/office/drawing/2014/main" val="10002"/>
+                  </a:ext>
+                </a:extLst>
               </a:tr>
               <a:tr h="270662">
                 <a:tc>
                   <a:txBody>
-                    <a:bodyPr wrap="square" lIns="27432" rIns="27432" tIns="18288" bIns="18288">
-                      <a:normAutofit/>
-                    </a:bodyPr>
-                    <a:lstStyle/>
-                    <a:p>
-                      <a:pPr algn="l"/>
+                    <a:bodyPr/>
+                    <a:lstStyle/>
+                    <a:p>
+                      <a:pPr algn="ctr"/>
                       <a:r>
                         <a:rPr sz="1800" b="1">
                           <a:solidFill>
@@ -9600,7 +10008,7 @@
                       </a:r>
                     </a:p>
                   </a:txBody>
-                  <a:tcPr>
+                  <a:tcPr anchor="ctr">
                     <a:solidFill>
                       <a:srgbClr val="FFFFFF"/>
                     </a:solidFill>
@@ -9608,9 +10016,7 @@
                 </a:tc>
                 <a:tc>
                   <a:txBody>
-                    <a:bodyPr wrap="square" lIns="27432" rIns="27432" tIns="18288" bIns="18288">
-                      <a:normAutofit/>
-                    </a:bodyPr>
+                    <a:bodyPr/>
                     <a:lstStyle/>
                     <a:p>
                       <a:pPr algn="ctr"/>
@@ -9627,7 +10033,7 @@
                       </a:r>
                     </a:p>
                   </a:txBody>
-                  <a:tcPr>
+                  <a:tcPr anchor="ctr">
                     <a:solidFill>
                       <a:srgbClr val="FFFFFF"/>
                     </a:solidFill>
@@ -9635,9 +10041,7 @@
                 </a:tc>
                 <a:tc>
                   <a:txBody>
-                    <a:bodyPr wrap="square" lIns="27432" rIns="27432" tIns="18288" bIns="18288">
-                      <a:normAutofit/>
-                    </a:bodyPr>
+                    <a:bodyPr/>
                     <a:lstStyle/>
                     <a:p>
                       <a:pPr algn="ctr"/>
@@ -9654,22 +10058,25 @@
                       </a:r>
                     </a:p>
                   </a:txBody>
-                  <a:tcPr>
+                  <a:tcPr anchor="ctr">
                     <a:solidFill>
                       <a:srgbClr val="FFFFFF"/>
                     </a:solidFill>
                   </a:tcPr>
                 </a:tc>
+                <a:extLst>
+                  <a:ext uri="{0D108BD9-81ED-4DB2-BD59-A6C34878D82A}">
+                    <a16:rowId xmlns:a16="http://schemas.microsoft.com/office/drawing/2014/main" val="10003"/>
+                  </a:ext>
+                </a:extLst>
               </a:tr>
               <a:tr h="270662">
                 <a:tc>
                   <a:txBody>
-                    <a:bodyPr wrap="square" lIns="27432" rIns="27432" tIns="18288" bIns="18288">
-                      <a:normAutofit/>
-                    </a:bodyPr>
-                    <a:lstStyle/>
-                    <a:p>
-                      <a:pPr algn="l"/>
+                    <a:bodyPr/>
+                    <a:lstStyle/>
+                    <a:p>
+                      <a:pPr algn="ctr"/>
                       <a:r>
                         <a:rPr sz="1800" b="1">
                           <a:solidFill>
@@ -9683,7 +10090,7 @@
                       </a:r>
                     </a:p>
                   </a:txBody>
-                  <a:tcPr>
+                  <a:tcPr anchor="ctr">
                     <a:solidFill>
                       <a:srgbClr val="F8F8F8"/>
                     </a:solidFill>
@@ -9691,9 +10098,7 @@
                 </a:tc>
                 <a:tc>
                   <a:txBody>
-                    <a:bodyPr wrap="square" lIns="27432" rIns="27432" tIns="18288" bIns="18288">
-                      <a:normAutofit/>
-                    </a:bodyPr>
+                    <a:bodyPr/>
                     <a:lstStyle/>
                     <a:p>
                       <a:pPr algn="ctr"/>
@@ -9710,7 +10115,7 @@
                       </a:r>
                     </a:p>
                   </a:txBody>
-                  <a:tcPr>
+                  <a:tcPr anchor="ctr">
                     <a:solidFill>
                       <a:srgbClr val="F8F8F8"/>
                     </a:solidFill>
@@ -9718,9 +10123,7 @@
                 </a:tc>
                 <a:tc>
                   <a:txBody>
-                    <a:bodyPr wrap="square" lIns="27432" rIns="27432" tIns="18288" bIns="18288">
-                      <a:normAutofit/>
-                    </a:bodyPr>
+                    <a:bodyPr/>
                     <a:lstStyle/>
                     <a:p>
                       <a:pPr algn="ctr"/>
@@ -9737,12 +10140,17 @@
                       </a:r>
                     </a:p>
                   </a:txBody>
-                  <a:tcPr>
+                  <a:tcPr anchor="ctr">
                     <a:solidFill>
                       <a:srgbClr val="F8F8F8"/>
                     </a:solidFill>
                   </a:tcPr>
                 </a:tc>
+                <a:extLst>
+                  <a:ext uri="{0D108BD9-81ED-4DB2-BD59-A6C34878D82A}">
+                    <a16:rowId xmlns:a16="http://schemas.microsoft.com/office/drawing/2014/main" val="10004"/>
+                  </a:ext>
+                </a:extLst>
               </a:tr>
             </a:tbl>
           </a:graphicData>
@@ -9790,6 +10198,7 @@
           <a:lstStyle/>
           <a:p>
             <a:pPr algn="ctr"/>
+            <a:endParaRPr/>
           </a:p>
         </p:txBody>
       </p:sp>
@@ -9810,7 +10219,7 @@
           <a:noFill/>
         </p:spPr>
         <p:txBody>
-          <a:bodyPr wrap="square" anchor="t" lIns="9144" rIns="9144" tIns="9144" bIns="9144">
+          <a:bodyPr wrap="square" lIns="9144" tIns="9144" rIns="9144" bIns="9144" anchor="t">
             <a:spAutoFit/>
           </a:bodyPr>
           <a:lstStyle/>
@@ -9854,7 +10263,7 @@
           <a:noFill/>
         </p:spPr>
         <p:txBody>
-          <a:bodyPr wrap="square" anchor="ctr" lIns="9144" rIns="9144" tIns="9144" bIns="9144">
+          <a:bodyPr wrap="square" lIns="9144" tIns="9144" rIns="9144" bIns="9144" anchor="ctr">
             <a:normAutofit/>
           </a:bodyPr>
           <a:lstStyle/>
@@ -9923,6 +10332,7 @@
           <a:lstStyle/>
           <a:p>
             <a:pPr algn="ctr"/>
+            <a:endParaRPr/>
           </a:p>
         </p:txBody>
       </p:sp>
@@ -9943,7 +10353,7 @@
           <a:noFill/>
         </p:spPr>
         <p:txBody>
-          <a:bodyPr wrap="square" anchor="t" lIns="9144" rIns="9144" tIns="9144" bIns="9144">
+          <a:bodyPr wrap="square" lIns="9144" tIns="9144" rIns="9144" bIns="9144" anchor="t">
             <a:spAutoFit/>
           </a:bodyPr>
           <a:lstStyle/>
@@ -9987,7 +10397,7 @@
           <a:noFill/>
         </p:spPr>
         <p:txBody>
-          <a:bodyPr wrap="square" anchor="ctr" lIns="9144" rIns="9144" tIns="9144" bIns="9144">
+          <a:bodyPr wrap="square" lIns="9144" tIns="9144" rIns="9144" bIns="9144" anchor="ctr">
             <a:normAutofit/>
           </a:bodyPr>
           <a:lstStyle/>
@@ -10031,7 +10441,7 @@
           <a:noFill/>
         </p:spPr>
         <p:txBody>
-          <a:bodyPr wrap="square" anchor="t" lIns="18288" rIns="18288" tIns="18288" bIns="18288">
+          <a:bodyPr wrap="square" lIns="18288" tIns="18288" rIns="18288" bIns="18288" anchor="t">
             <a:spAutoFit/>
           </a:bodyPr>
           <a:lstStyle/>
@@ -10075,7 +10485,7 @@
           <a:noFill/>
         </p:spPr>
         <p:txBody>
-          <a:bodyPr wrap="square" anchor="t" lIns="0" rIns="0" tIns="0" bIns="0">
+          <a:bodyPr wrap="square" lIns="0" tIns="0" rIns="0" bIns="0" anchor="t">
             <a:spAutoFit/>
           </a:bodyPr>
           <a:lstStyle/>
@@ -10111,7 +10521,7 @@
 </file>
 
 <file path=ppt/slides/slide5.xml><?xml version="1.0" encoding="utf-8"?>
-<p:sld xmlns:a="http://schemas.openxmlformats.org/drawingml/2006/main" xmlns:p="http://schemas.openxmlformats.org/presentationml/2006/main" xmlns:r="http://schemas.openxmlformats.org/officeDocument/2006/relationships">
+<p:sld xmlns:a="http://schemas.openxmlformats.org/drawingml/2006/main" xmlns:r="http://schemas.openxmlformats.org/officeDocument/2006/relationships" xmlns:p="http://schemas.openxmlformats.org/presentationml/2006/main">
   <p:cSld>
     <p:spTree>
       <p:nvGrpSpPr>
@@ -10119,7 +10529,14 @@
         <p:cNvGrpSpPr/>
         <p:nvPr/>
       </p:nvGrpSpPr>
-      <p:grpSpPr/>
+      <p:grpSpPr>
+        <a:xfrm>
+          <a:off x="0" y="0"/>
+          <a:ext cx="0" cy="0"/>
+          <a:chOff x="0" y="0"/>
+          <a:chExt cx="0" cy="0"/>
+        </a:xfrm>
+      </p:grpSpPr>
       <p:sp>
         <p:nvSpPr>
           <p:cNvPr id="2" name="TextBox 1"/>
@@ -10137,7 +10554,7 @@
           <a:noFill/>
         </p:spPr>
         <p:txBody>
-          <a:bodyPr wrap="square" lIns="27432" rIns="27432" tIns="18288" bIns="18288"/>
+          <a:bodyPr wrap="square" lIns="27432" tIns="18288" rIns="27432" bIns="18288"/>
           <a:lstStyle/>
           <a:p>
             <a:pPr algn="l">
@@ -10202,6 +10619,7 @@
           <a:lstStyle/>
           <a:p>
             <a:pPr algn="ctr"/>
+            <a:endParaRPr/>
           </a:p>
         </p:txBody>
       </p:sp>
@@ -10222,7 +10640,7 @@
           <a:noFill/>
         </p:spPr>
         <p:txBody>
-          <a:bodyPr wrap="square" lIns="27432" rIns="27432" tIns="18288" bIns="18288"/>
+          <a:bodyPr wrap="square" lIns="27432" tIns="18288" rIns="27432" bIns="18288"/>
           <a:lstStyle/>
           <a:p>
             <a:pPr algn="l">
@@ -10264,7 +10682,7 @@
           <a:noFill/>
         </p:spPr>
         <p:txBody>
-          <a:bodyPr wrap="square" lIns="27432" rIns="27432" tIns="18288" bIns="18288"/>
+          <a:bodyPr wrap="square" lIns="27432" tIns="18288" rIns="27432" bIns="18288"/>
           <a:lstStyle/>
           <a:p>
             <a:pPr algn="l">
@@ -10295,7 +10713,13 @@
           <p:cNvGraphicFramePr>
             <a:graphicFrameLocks noGrp="1"/>
           </p:cNvGraphicFramePr>
-          <p:nvPr/>
+          <p:nvPr>
+            <p:extLst>
+              <p:ext uri="{D42A27DB-BD31-4B8C-83A1-F6EECF244321}">
+                <p14:modId xmlns:p14="http://schemas.microsoft.com/office/powerpoint/2010/main" val="2726473529"/>
+              </p:ext>
+            </p:extLst>
+          </p:nvPr>
         </p:nvGraphicFramePr>
         <p:xfrm>
           <a:off x="502920" y="1444752"/>
@@ -10308,15 +10732,39 @@
                 <a:tableStyleId>{5C22544A-7EE6-4342-B048-85BDC9FD1C3A}</a:tableStyleId>
               </a:tblPr>
               <a:tblGrid>
-                <a:gridCol w="1965960"/>
-                <a:gridCol w="685800"/>
-                <a:gridCol w="731520"/>
-                <a:gridCol w="594360"/>
+                <a:gridCol w="1965960">
+                  <a:extLst>
+                    <a:ext uri="{9D8B030D-6E8A-4147-A177-3AD203B41FA5}">
+                      <a16:colId xmlns:a16="http://schemas.microsoft.com/office/drawing/2014/main" val="20000"/>
+                    </a:ext>
+                  </a:extLst>
+                </a:gridCol>
+                <a:gridCol w="685800">
+                  <a:extLst>
+                    <a:ext uri="{9D8B030D-6E8A-4147-A177-3AD203B41FA5}">
+                      <a16:colId xmlns:a16="http://schemas.microsoft.com/office/drawing/2014/main" val="20001"/>
+                    </a:ext>
+                  </a:extLst>
+                </a:gridCol>
+                <a:gridCol w="731520">
+                  <a:extLst>
+                    <a:ext uri="{9D8B030D-6E8A-4147-A177-3AD203B41FA5}">
+                      <a16:colId xmlns:a16="http://schemas.microsoft.com/office/drawing/2014/main" val="20002"/>
+                    </a:ext>
+                  </a:extLst>
+                </a:gridCol>
+                <a:gridCol w="594360">
+                  <a:extLst>
+                    <a:ext uri="{9D8B030D-6E8A-4147-A177-3AD203B41FA5}">
+                      <a16:colId xmlns:a16="http://schemas.microsoft.com/office/drawing/2014/main" val="20003"/>
+                    </a:ext>
+                  </a:extLst>
+                </a:gridCol>
               </a:tblGrid>
               <a:tr h="502920">
                 <a:tc>
                   <a:txBody>
-                    <a:bodyPr wrap="square" lIns="27432" rIns="27432" tIns="18288" bIns="18288" anchor="ctr"/>
+                    <a:bodyPr/>
                     <a:lstStyle/>
                     <a:p>
                       <a:pPr algn="ctr">
@@ -10340,7 +10788,7 @@
                       </a:r>
                     </a:p>
                   </a:txBody>
-                  <a:tcPr marL="27432" marR="27432" marT="18288" marB="18288">
+                  <a:tcPr marL="27432" marR="27432" marT="18288" marB="18288" anchor="ctr">
                     <a:solidFill>
                       <a:srgbClr val="000000"/>
                     </a:solidFill>
@@ -10348,7 +10796,7 @@
                 </a:tc>
                 <a:tc>
                   <a:txBody>
-                    <a:bodyPr wrap="square" lIns="27432" rIns="27432" tIns="18288" bIns="18288" anchor="ctr"/>
+                    <a:bodyPr/>
                     <a:lstStyle/>
                     <a:p>
                       <a:pPr algn="ctr">
@@ -10372,7 +10820,7 @@
                       </a:r>
                     </a:p>
                   </a:txBody>
-                  <a:tcPr marL="27432" marR="27432" marT="18288" marB="18288">
+                  <a:tcPr marL="27432" marR="27432" marT="18288" marB="18288" anchor="ctr">
                     <a:solidFill>
                       <a:srgbClr val="000000"/>
                     </a:solidFill>
@@ -10380,7 +10828,7 @@
                 </a:tc>
                 <a:tc>
                   <a:txBody>
-                    <a:bodyPr wrap="square" lIns="27432" rIns="27432" tIns="18288" bIns="18288" anchor="ctr"/>
+                    <a:bodyPr/>
                     <a:lstStyle/>
                     <a:p>
                       <a:pPr algn="ctr">
@@ -10404,7 +10852,7 @@
                       </a:r>
                     </a:p>
                   </a:txBody>
-                  <a:tcPr marL="27432" marR="27432" marT="18288" marB="18288">
+                  <a:tcPr marL="27432" marR="27432" marT="18288" marB="18288" anchor="ctr">
                     <a:solidFill>
                       <a:srgbClr val="000000"/>
                     </a:solidFill>
@@ -10412,7 +10860,7 @@
                 </a:tc>
                 <a:tc>
                   <a:txBody>
-                    <a:bodyPr wrap="square" lIns="27432" rIns="27432" tIns="18288" bIns="18288" anchor="ctr"/>
+                    <a:bodyPr/>
                     <a:lstStyle/>
                     <a:p>
                       <a:pPr algn="ctr">
@@ -10436,20 +10884,25 @@
                       </a:r>
                     </a:p>
                   </a:txBody>
-                  <a:tcPr marL="27432" marR="27432" marT="18288" marB="18288">
+                  <a:tcPr marL="27432" marR="27432" marT="18288" marB="18288" anchor="ctr">
                     <a:solidFill>
                       <a:srgbClr val="000000"/>
                     </a:solidFill>
                   </a:tcPr>
                 </a:tc>
+                <a:extLst>
+                  <a:ext uri="{0D108BD9-81ED-4DB2-BD59-A6C34878D82A}">
+                    <a16:rowId xmlns:a16="http://schemas.microsoft.com/office/drawing/2014/main" val="10000"/>
+                  </a:ext>
+                </a:extLst>
               </a:tr>
               <a:tr h="347472">
                 <a:tc>
                   <a:txBody>
-                    <a:bodyPr wrap="square" lIns="27432" rIns="27432" tIns="18288" bIns="18288" anchor="ctr"/>
-                    <a:lstStyle/>
-                    <a:p>
-                      <a:pPr algn="l">
+                    <a:bodyPr/>
+                    <a:lstStyle/>
+                    <a:p>
+                      <a:pPr algn="ctr">
                         <a:lnSpc>
                           <a:spcPct val="100000"/>
                         </a:lnSpc>
@@ -10470,7 +10923,7 @@
                       </a:r>
                     </a:p>
                   </a:txBody>
-                  <a:tcPr marL="27432" marR="27432" marT="18288" marB="18288">
+                  <a:tcPr marL="27432" marR="27432" marT="18288" marB="18288" anchor="ctr">
                     <a:solidFill>
                       <a:srgbClr val="FFFFFF"/>
                     </a:solidFill>
@@ -10478,7 +10931,7 @@
                 </a:tc>
                 <a:tc>
                   <a:txBody>
-                    <a:bodyPr wrap="square" lIns="27432" rIns="27432" tIns="18288" bIns="18288" anchor="ctr"/>
+                    <a:bodyPr/>
                     <a:lstStyle/>
                     <a:p>
                       <a:pPr algn="ctr">
@@ -10502,7 +10955,7 @@
                       </a:r>
                     </a:p>
                   </a:txBody>
-                  <a:tcPr marL="27432" marR="27432" marT="18288" marB="18288">
+                  <a:tcPr marL="27432" marR="27432" marT="18288" marB="18288" anchor="ctr">
                     <a:solidFill>
                       <a:srgbClr val="FFFFFF"/>
                     </a:solidFill>
@@ -10510,7 +10963,7 @@
                 </a:tc>
                 <a:tc>
                   <a:txBody>
-                    <a:bodyPr wrap="square" lIns="27432" rIns="27432" tIns="18288" bIns="18288" anchor="ctr"/>
+                    <a:bodyPr/>
                     <a:lstStyle/>
                     <a:p>
                       <a:pPr algn="ctr">
@@ -10534,7 +10987,7 @@
                       </a:r>
                     </a:p>
                   </a:txBody>
-                  <a:tcPr marL="27432" marR="27432" marT="18288" marB="18288">
+                  <a:tcPr marL="27432" marR="27432" marT="18288" marB="18288" anchor="ctr">
                     <a:solidFill>
                       <a:srgbClr val="FFFFFF"/>
                     </a:solidFill>
@@ -10542,7 +10995,7 @@
                 </a:tc>
                 <a:tc>
                   <a:txBody>
-                    <a:bodyPr wrap="square" lIns="27432" rIns="27432" tIns="18288" bIns="18288" anchor="ctr"/>
+                    <a:bodyPr/>
                     <a:lstStyle/>
                     <a:p>
                       <a:pPr algn="ctr">
@@ -10566,20 +11019,25 @@
                       </a:r>
                     </a:p>
                   </a:txBody>
-                  <a:tcPr marL="27432" marR="27432" marT="18288" marB="18288">
+                  <a:tcPr marL="27432" marR="27432" marT="18288" marB="18288" anchor="ctr">
                     <a:solidFill>
                       <a:srgbClr val="FFFFFF"/>
                     </a:solidFill>
                   </a:tcPr>
                 </a:tc>
+                <a:extLst>
+                  <a:ext uri="{0D108BD9-81ED-4DB2-BD59-A6C34878D82A}">
+                    <a16:rowId xmlns:a16="http://schemas.microsoft.com/office/drawing/2014/main" val="10001"/>
+                  </a:ext>
+                </a:extLst>
               </a:tr>
               <a:tr h="347472">
                 <a:tc>
                   <a:txBody>
-                    <a:bodyPr wrap="square" lIns="27432" rIns="27432" tIns="18288" bIns="18288" anchor="ctr"/>
-                    <a:lstStyle/>
-                    <a:p>
-                      <a:pPr algn="l">
+                    <a:bodyPr/>
+                    <a:lstStyle/>
+                    <a:p>
+                      <a:pPr algn="ctr">
                         <a:lnSpc>
                           <a:spcPct val="100000"/>
                         </a:lnSpc>
@@ -10600,7 +11058,7 @@
                       </a:r>
                     </a:p>
                   </a:txBody>
-                  <a:tcPr marL="27432" marR="27432" marT="18288" marB="18288">
+                  <a:tcPr marL="27432" marR="27432" marT="18288" marB="18288" anchor="ctr">
                     <a:solidFill>
                       <a:srgbClr val="F4F4F4"/>
                     </a:solidFill>
@@ -10608,7 +11066,7 @@
                 </a:tc>
                 <a:tc>
                   <a:txBody>
-                    <a:bodyPr wrap="square" lIns="27432" rIns="27432" tIns="18288" bIns="18288" anchor="ctr"/>
+                    <a:bodyPr/>
                     <a:lstStyle/>
                     <a:p>
                       <a:pPr algn="ctr">
@@ -10632,7 +11090,7 @@
                       </a:r>
                     </a:p>
                   </a:txBody>
-                  <a:tcPr marL="27432" marR="27432" marT="18288" marB="18288">
+                  <a:tcPr marL="27432" marR="27432" marT="18288" marB="18288" anchor="ctr">
                     <a:solidFill>
                       <a:srgbClr val="F4F4F4"/>
                     </a:solidFill>
@@ -10640,7 +11098,7 @@
                 </a:tc>
                 <a:tc>
                   <a:txBody>
-                    <a:bodyPr wrap="square" lIns="27432" rIns="27432" tIns="18288" bIns="18288" anchor="ctr"/>
+                    <a:bodyPr/>
                     <a:lstStyle/>
                     <a:p>
                       <a:pPr algn="ctr">
@@ -10664,7 +11122,7 @@
                       </a:r>
                     </a:p>
                   </a:txBody>
-                  <a:tcPr marL="27432" marR="27432" marT="18288" marB="18288">
+                  <a:tcPr marL="27432" marR="27432" marT="18288" marB="18288" anchor="ctr">
                     <a:solidFill>
                       <a:srgbClr val="F4F4F4"/>
                     </a:solidFill>
@@ -10672,7 +11130,7 @@
                 </a:tc>
                 <a:tc>
                   <a:txBody>
-                    <a:bodyPr wrap="square" lIns="27432" rIns="27432" tIns="18288" bIns="18288" anchor="ctr"/>
+                    <a:bodyPr/>
                     <a:lstStyle/>
                     <a:p>
                       <a:pPr algn="ctr">
@@ -10696,20 +11154,25 @@
                       </a:r>
                     </a:p>
                   </a:txBody>
-                  <a:tcPr marL="27432" marR="27432" marT="18288" marB="18288">
+                  <a:tcPr marL="27432" marR="27432" marT="18288" marB="18288" anchor="ctr">
                     <a:solidFill>
                       <a:srgbClr val="F4F4F4"/>
                     </a:solidFill>
                   </a:tcPr>
                 </a:tc>
+                <a:extLst>
+                  <a:ext uri="{0D108BD9-81ED-4DB2-BD59-A6C34878D82A}">
+                    <a16:rowId xmlns:a16="http://schemas.microsoft.com/office/drawing/2014/main" val="10002"/>
+                  </a:ext>
+                </a:extLst>
               </a:tr>
               <a:tr h="347472">
                 <a:tc>
                   <a:txBody>
-                    <a:bodyPr wrap="square" lIns="27432" rIns="27432" tIns="18288" bIns="18288" anchor="ctr"/>
-                    <a:lstStyle/>
-                    <a:p>
-                      <a:pPr algn="l">
+                    <a:bodyPr/>
+                    <a:lstStyle/>
+                    <a:p>
+                      <a:pPr algn="ctr">
                         <a:lnSpc>
                           <a:spcPct val="100000"/>
                         </a:lnSpc>
@@ -10730,7 +11193,7 @@
                       </a:r>
                     </a:p>
                   </a:txBody>
-                  <a:tcPr marL="27432" marR="27432" marT="18288" marB="18288">
+                  <a:tcPr marL="27432" marR="27432" marT="18288" marB="18288" anchor="ctr">
                     <a:solidFill>
                       <a:srgbClr val="FFFFFF"/>
                     </a:solidFill>
@@ -10738,7 +11201,7 @@
                 </a:tc>
                 <a:tc>
                   <a:txBody>
-                    <a:bodyPr wrap="square" lIns="27432" rIns="27432" tIns="18288" bIns="18288" anchor="ctr"/>
+                    <a:bodyPr/>
                     <a:lstStyle/>
                     <a:p>
                       <a:pPr algn="ctr">
@@ -10762,7 +11225,7 @@
                       </a:r>
                     </a:p>
                   </a:txBody>
-                  <a:tcPr marL="27432" marR="27432" marT="18288" marB="18288">
+                  <a:tcPr marL="27432" marR="27432" marT="18288" marB="18288" anchor="ctr">
                     <a:solidFill>
                       <a:srgbClr val="FFFFFF"/>
                     </a:solidFill>
@@ -10770,7 +11233,7 @@
                 </a:tc>
                 <a:tc>
                   <a:txBody>
-                    <a:bodyPr wrap="square" lIns="27432" rIns="27432" tIns="18288" bIns="18288" anchor="ctr"/>
+                    <a:bodyPr/>
                     <a:lstStyle/>
                     <a:p>
                       <a:pPr algn="ctr">
@@ -10794,7 +11257,7 @@
                       </a:r>
                     </a:p>
                   </a:txBody>
-                  <a:tcPr marL="27432" marR="27432" marT="18288" marB="18288">
+                  <a:tcPr marL="27432" marR="27432" marT="18288" marB="18288" anchor="ctr">
                     <a:solidFill>
                       <a:srgbClr val="FFFFFF"/>
                     </a:solidFill>
@@ -10802,7 +11265,7 @@
                 </a:tc>
                 <a:tc>
                   <a:txBody>
-                    <a:bodyPr wrap="square" lIns="27432" rIns="27432" tIns="18288" bIns="18288" anchor="ctr"/>
+                    <a:bodyPr/>
                     <a:lstStyle/>
                     <a:p>
                       <a:pPr algn="ctr">
@@ -10826,20 +11289,25 @@
                       </a:r>
                     </a:p>
                   </a:txBody>
-                  <a:tcPr marL="27432" marR="27432" marT="18288" marB="18288">
+                  <a:tcPr marL="27432" marR="27432" marT="18288" marB="18288" anchor="ctr">
                     <a:solidFill>
                       <a:srgbClr val="FFFFFF"/>
                     </a:solidFill>
                   </a:tcPr>
                 </a:tc>
+                <a:extLst>
+                  <a:ext uri="{0D108BD9-81ED-4DB2-BD59-A6C34878D82A}">
+                    <a16:rowId xmlns:a16="http://schemas.microsoft.com/office/drawing/2014/main" val="10003"/>
+                  </a:ext>
+                </a:extLst>
               </a:tr>
               <a:tr h="347472">
                 <a:tc>
                   <a:txBody>
-                    <a:bodyPr wrap="square" lIns="27432" rIns="27432" tIns="18288" bIns="18288" anchor="ctr"/>
-                    <a:lstStyle/>
-                    <a:p>
-                      <a:pPr algn="l">
+                    <a:bodyPr/>
+                    <a:lstStyle/>
+                    <a:p>
+                      <a:pPr algn="ctr">
                         <a:lnSpc>
                           <a:spcPct val="100000"/>
                         </a:lnSpc>
@@ -10860,7 +11328,7 @@
                       </a:r>
                     </a:p>
                   </a:txBody>
-                  <a:tcPr marL="27432" marR="27432" marT="18288" marB="18288">
+                  <a:tcPr marL="27432" marR="27432" marT="18288" marB="18288" anchor="ctr">
                     <a:solidFill>
                       <a:srgbClr val="F4F4F4"/>
                     </a:solidFill>
@@ -10868,7 +11336,7 @@
                 </a:tc>
                 <a:tc>
                   <a:txBody>
-                    <a:bodyPr wrap="square" lIns="27432" rIns="27432" tIns="18288" bIns="18288" anchor="ctr"/>
+                    <a:bodyPr/>
                     <a:lstStyle/>
                     <a:p>
                       <a:pPr algn="ctr">
@@ -10892,7 +11360,7 @@
                       </a:r>
                     </a:p>
                   </a:txBody>
-                  <a:tcPr marL="27432" marR="27432" marT="18288" marB="18288">
+                  <a:tcPr marL="27432" marR="27432" marT="18288" marB="18288" anchor="ctr">
                     <a:solidFill>
                       <a:srgbClr val="F4F4F4"/>
                     </a:solidFill>
@@ -10900,7 +11368,7 @@
                 </a:tc>
                 <a:tc>
                   <a:txBody>
-                    <a:bodyPr wrap="square" lIns="27432" rIns="27432" tIns="18288" bIns="18288" anchor="ctr"/>
+                    <a:bodyPr/>
                     <a:lstStyle/>
                     <a:p>
                       <a:pPr algn="ctr">
@@ -10924,7 +11392,7 @@
                       </a:r>
                     </a:p>
                   </a:txBody>
-                  <a:tcPr marL="27432" marR="27432" marT="18288" marB="18288">
+                  <a:tcPr marL="27432" marR="27432" marT="18288" marB="18288" anchor="ctr">
                     <a:solidFill>
                       <a:srgbClr val="F4F4F4"/>
                     </a:solidFill>
@@ -10932,7 +11400,7 @@
                 </a:tc>
                 <a:tc>
                   <a:txBody>
-                    <a:bodyPr wrap="square" lIns="27432" rIns="27432" tIns="18288" bIns="18288" anchor="ctr"/>
+                    <a:bodyPr/>
                     <a:lstStyle/>
                     <a:p>
                       <a:pPr algn="ctr">
@@ -10956,20 +11424,25 @@
                       </a:r>
                     </a:p>
                   </a:txBody>
-                  <a:tcPr marL="27432" marR="27432" marT="18288" marB="18288">
+                  <a:tcPr marL="27432" marR="27432" marT="18288" marB="18288" anchor="ctr">
                     <a:solidFill>
                       <a:srgbClr val="F4F4F4"/>
                     </a:solidFill>
                   </a:tcPr>
                 </a:tc>
+                <a:extLst>
+                  <a:ext uri="{0D108BD9-81ED-4DB2-BD59-A6C34878D82A}">
+                    <a16:rowId xmlns:a16="http://schemas.microsoft.com/office/drawing/2014/main" val="10004"/>
+                  </a:ext>
+                </a:extLst>
               </a:tr>
               <a:tr h="347472">
                 <a:tc>
                   <a:txBody>
-                    <a:bodyPr wrap="square" lIns="27432" rIns="27432" tIns="18288" bIns="18288" anchor="ctr"/>
-                    <a:lstStyle/>
-                    <a:p>
-                      <a:pPr algn="l">
+                    <a:bodyPr/>
+                    <a:lstStyle/>
+                    <a:p>
+                      <a:pPr algn="ctr">
                         <a:lnSpc>
                           <a:spcPct val="100000"/>
                         </a:lnSpc>
@@ -10990,7 +11463,7 @@
                       </a:r>
                     </a:p>
                   </a:txBody>
-                  <a:tcPr marL="27432" marR="27432" marT="18288" marB="18288">
+                  <a:tcPr marL="27432" marR="27432" marT="18288" marB="18288" anchor="ctr">
                     <a:solidFill>
                       <a:srgbClr val="FFFFFF"/>
                     </a:solidFill>
@@ -10998,7 +11471,7 @@
                 </a:tc>
                 <a:tc>
                   <a:txBody>
-                    <a:bodyPr wrap="square" lIns="27432" rIns="27432" tIns="18288" bIns="18288" anchor="ctr"/>
+                    <a:bodyPr/>
                     <a:lstStyle/>
                     <a:p>
                       <a:pPr algn="ctr">
@@ -11022,7 +11495,7 @@
                       </a:r>
                     </a:p>
                   </a:txBody>
-                  <a:tcPr marL="27432" marR="27432" marT="18288" marB="18288">
+                  <a:tcPr marL="27432" marR="27432" marT="18288" marB="18288" anchor="ctr">
                     <a:solidFill>
                       <a:srgbClr val="FFFFFF"/>
                     </a:solidFill>
@@ -11030,7 +11503,7 @@
                 </a:tc>
                 <a:tc>
                   <a:txBody>
-                    <a:bodyPr wrap="square" lIns="27432" rIns="27432" tIns="18288" bIns="18288" anchor="ctr"/>
+                    <a:bodyPr/>
                     <a:lstStyle/>
                     <a:p>
                       <a:pPr algn="ctr">
@@ -11054,7 +11527,7 @@
                       </a:r>
                     </a:p>
                   </a:txBody>
-                  <a:tcPr marL="27432" marR="27432" marT="18288" marB="18288">
+                  <a:tcPr marL="27432" marR="27432" marT="18288" marB="18288" anchor="ctr">
                     <a:solidFill>
                       <a:srgbClr val="FFFFFF"/>
                     </a:solidFill>
@@ -11062,7 +11535,7 @@
                 </a:tc>
                 <a:tc>
                   <a:txBody>
-                    <a:bodyPr wrap="square" lIns="27432" rIns="27432" tIns="18288" bIns="18288" anchor="ctr"/>
+                    <a:bodyPr/>
                     <a:lstStyle/>
                     <a:p>
                       <a:pPr algn="ctr">
@@ -11086,20 +11559,25 @@
                       </a:r>
                     </a:p>
                   </a:txBody>
-                  <a:tcPr marL="27432" marR="27432" marT="18288" marB="18288">
+                  <a:tcPr marL="27432" marR="27432" marT="18288" marB="18288" anchor="ctr">
                     <a:solidFill>
                       <a:srgbClr val="FFFFFF"/>
                     </a:solidFill>
                   </a:tcPr>
                 </a:tc>
+                <a:extLst>
+                  <a:ext uri="{0D108BD9-81ED-4DB2-BD59-A6C34878D82A}">
+                    <a16:rowId xmlns:a16="http://schemas.microsoft.com/office/drawing/2014/main" val="10005"/>
+                  </a:ext>
+                </a:extLst>
               </a:tr>
               <a:tr h="347472">
                 <a:tc>
                   <a:txBody>
-                    <a:bodyPr wrap="square" lIns="27432" rIns="27432" tIns="18288" bIns="18288" anchor="ctr"/>
-                    <a:lstStyle/>
-                    <a:p>
-                      <a:pPr algn="l">
+                    <a:bodyPr/>
+                    <a:lstStyle/>
+                    <a:p>
+                      <a:pPr algn="ctr">
                         <a:lnSpc>
                           <a:spcPct val="100000"/>
                         </a:lnSpc>
@@ -11120,7 +11598,7 @@
                       </a:r>
                     </a:p>
                   </a:txBody>
-                  <a:tcPr marL="27432" marR="27432" marT="18288" marB="18288">
+                  <a:tcPr marL="27432" marR="27432" marT="18288" marB="18288" anchor="ctr">
                     <a:solidFill>
                       <a:srgbClr val="F4F4F4"/>
                     </a:solidFill>
@@ -11128,7 +11606,7 @@
                 </a:tc>
                 <a:tc>
                   <a:txBody>
-                    <a:bodyPr wrap="square" lIns="27432" rIns="27432" tIns="18288" bIns="18288" anchor="ctr"/>
+                    <a:bodyPr/>
                     <a:lstStyle/>
                     <a:p>
                       <a:pPr algn="ctr">
@@ -11152,7 +11630,7 @@
                       </a:r>
                     </a:p>
                   </a:txBody>
-                  <a:tcPr marL="27432" marR="27432" marT="18288" marB="18288">
+                  <a:tcPr marL="27432" marR="27432" marT="18288" marB="18288" anchor="ctr">
                     <a:solidFill>
                       <a:srgbClr val="F4F4F4"/>
                     </a:solidFill>
@@ -11160,7 +11638,7 @@
                 </a:tc>
                 <a:tc>
                   <a:txBody>
-                    <a:bodyPr wrap="square" lIns="27432" rIns="27432" tIns="18288" bIns="18288" anchor="ctr"/>
+                    <a:bodyPr/>
                     <a:lstStyle/>
                     <a:p>
                       <a:pPr algn="ctr">
@@ -11184,7 +11662,7 @@
                       </a:r>
                     </a:p>
                   </a:txBody>
-                  <a:tcPr marL="27432" marR="27432" marT="18288" marB="18288">
+                  <a:tcPr marL="27432" marR="27432" marT="18288" marB="18288" anchor="ctr">
                     <a:solidFill>
                       <a:srgbClr val="F4F4F4"/>
                     </a:solidFill>
@@ -11192,7 +11670,7 @@
                 </a:tc>
                 <a:tc>
                   <a:txBody>
-                    <a:bodyPr wrap="square" lIns="27432" rIns="27432" tIns="18288" bIns="18288" anchor="ctr"/>
+                    <a:bodyPr/>
                     <a:lstStyle/>
                     <a:p>
                       <a:pPr algn="ctr">
@@ -11216,12 +11694,17 @@
                       </a:r>
                     </a:p>
                   </a:txBody>
-                  <a:tcPr marL="27432" marR="27432" marT="18288" marB="18288">
+                  <a:tcPr marL="27432" marR="27432" marT="18288" marB="18288" anchor="ctr">
                     <a:solidFill>
                       <a:srgbClr val="F4F4F4"/>
                     </a:solidFill>
                   </a:tcPr>
                 </a:tc>
+                <a:extLst>
+                  <a:ext uri="{0D108BD9-81ED-4DB2-BD59-A6C34878D82A}">
+                    <a16:rowId xmlns:a16="http://schemas.microsoft.com/office/drawing/2014/main" val="10006"/>
+                  </a:ext>
+                </a:extLst>
               </a:tr>
             </a:tbl>
           </a:graphicData>
@@ -11233,7 +11716,13 @@
           <p:cNvGraphicFramePr>
             <a:graphicFrameLocks noGrp="1"/>
           </p:cNvGraphicFramePr>
-          <p:nvPr/>
+          <p:nvPr>
+            <p:extLst>
+              <p:ext uri="{D42A27DB-BD31-4B8C-83A1-F6EECF244321}">
+                <p14:modId xmlns:p14="http://schemas.microsoft.com/office/powerpoint/2010/main" val="2670392602"/>
+              </p:ext>
+            </p:extLst>
+          </p:nvPr>
         </p:nvGraphicFramePr>
         <p:xfrm>
           <a:off x="4663440" y="1444752"/>
@@ -11246,15 +11735,39 @@
                 <a:tableStyleId>{5C22544A-7EE6-4342-B048-85BDC9FD1C3A}</a:tableStyleId>
               </a:tblPr>
               <a:tblGrid>
-                <a:gridCol w="1965960"/>
-                <a:gridCol w="685800"/>
-                <a:gridCol w="731520"/>
-                <a:gridCol w="594360"/>
+                <a:gridCol w="1965960">
+                  <a:extLst>
+                    <a:ext uri="{9D8B030D-6E8A-4147-A177-3AD203B41FA5}">
+                      <a16:colId xmlns:a16="http://schemas.microsoft.com/office/drawing/2014/main" val="20000"/>
+                    </a:ext>
+                  </a:extLst>
+                </a:gridCol>
+                <a:gridCol w="685800">
+                  <a:extLst>
+                    <a:ext uri="{9D8B030D-6E8A-4147-A177-3AD203B41FA5}">
+                      <a16:colId xmlns:a16="http://schemas.microsoft.com/office/drawing/2014/main" val="20001"/>
+                    </a:ext>
+                  </a:extLst>
+                </a:gridCol>
+                <a:gridCol w="731520">
+                  <a:extLst>
+                    <a:ext uri="{9D8B030D-6E8A-4147-A177-3AD203B41FA5}">
+                      <a16:colId xmlns:a16="http://schemas.microsoft.com/office/drawing/2014/main" val="20002"/>
+                    </a:ext>
+                  </a:extLst>
+                </a:gridCol>
+                <a:gridCol w="594360">
+                  <a:extLst>
+                    <a:ext uri="{9D8B030D-6E8A-4147-A177-3AD203B41FA5}">
+                      <a16:colId xmlns:a16="http://schemas.microsoft.com/office/drawing/2014/main" val="20003"/>
+                    </a:ext>
+                  </a:extLst>
+                </a:gridCol>
               </a:tblGrid>
               <a:tr h="502920">
                 <a:tc>
                   <a:txBody>
-                    <a:bodyPr wrap="square" lIns="27432" rIns="27432" tIns="18288" bIns="18288" anchor="ctr"/>
+                    <a:bodyPr/>
                     <a:lstStyle/>
                     <a:p>
                       <a:pPr algn="ctr">
@@ -11278,7 +11791,7 @@
                       </a:r>
                     </a:p>
                   </a:txBody>
-                  <a:tcPr marL="27432" marR="27432" marT="18288" marB="18288">
+                  <a:tcPr marL="27432" marR="27432" marT="18288" marB="18288" anchor="ctr">
                     <a:solidFill>
                       <a:srgbClr val="000000"/>
                     </a:solidFill>
@@ -11286,7 +11799,7 @@
                 </a:tc>
                 <a:tc>
                   <a:txBody>
-                    <a:bodyPr wrap="square" lIns="27432" rIns="27432" tIns="18288" bIns="18288" anchor="ctr"/>
+                    <a:bodyPr/>
                     <a:lstStyle/>
                     <a:p>
                       <a:pPr algn="ctr">
@@ -11310,7 +11823,7 @@
                       </a:r>
                     </a:p>
                   </a:txBody>
-                  <a:tcPr marL="27432" marR="27432" marT="18288" marB="18288">
+                  <a:tcPr marL="27432" marR="27432" marT="18288" marB="18288" anchor="ctr">
                     <a:solidFill>
                       <a:srgbClr val="000000"/>
                     </a:solidFill>
@@ -11318,7 +11831,7 @@
                 </a:tc>
                 <a:tc>
                   <a:txBody>
-                    <a:bodyPr wrap="square" lIns="27432" rIns="27432" tIns="18288" bIns="18288" anchor="ctr"/>
+                    <a:bodyPr/>
                     <a:lstStyle/>
                     <a:p>
                       <a:pPr algn="ctr">
@@ -11342,7 +11855,7 @@
                       </a:r>
                     </a:p>
                   </a:txBody>
-                  <a:tcPr marL="27432" marR="27432" marT="18288" marB="18288">
+                  <a:tcPr marL="27432" marR="27432" marT="18288" marB="18288" anchor="ctr">
                     <a:solidFill>
                       <a:srgbClr val="000000"/>
                     </a:solidFill>
@@ -11350,7 +11863,7 @@
                 </a:tc>
                 <a:tc>
                   <a:txBody>
-                    <a:bodyPr wrap="square" lIns="27432" rIns="27432" tIns="18288" bIns="18288" anchor="ctr"/>
+                    <a:bodyPr/>
                     <a:lstStyle/>
                     <a:p>
                       <a:pPr algn="ctr">
@@ -11374,20 +11887,25 @@
                       </a:r>
                     </a:p>
                   </a:txBody>
-                  <a:tcPr marL="27432" marR="27432" marT="18288" marB="18288">
+                  <a:tcPr marL="27432" marR="27432" marT="18288" marB="18288" anchor="ctr">
                     <a:solidFill>
                       <a:srgbClr val="000000"/>
                     </a:solidFill>
                   </a:tcPr>
                 </a:tc>
+                <a:extLst>
+                  <a:ext uri="{0D108BD9-81ED-4DB2-BD59-A6C34878D82A}">
+                    <a16:rowId xmlns:a16="http://schemas.microsoft.com/office/drawing/2014/main" val="10000"/>
+                  </a:ext>
+                </a:extLst>
               </a:tr>
               <a:tr h="347472">
                 <a:tc>
                   <a:txBody>
-                    <a:bodyPr wrap="square" lIns="27432" rIns="27432" tIns="18288" bIns="18288" anchor="ctr"/>
-                    <a:lstStyle/>
-                    <a:p>
-                      <a:pPr algn="l">
+                    <a:bodyPr/>
+                    <a:lstStyle/>
+                    <a:p>
+                      <a:pPr algn="ctr">
                         <a:lnSpc>
                           <a:spcPct val="100000"/>
                         </a:lnSpc>
@@ -11408,7 +11926,7 @@
                       </a:r>
                     </a:p>
                   </a:txBody>
-                  <a:tcPr marL="27432" marR="27432" marT="18288" marB="18288">
+                  <a:tcPr marL="27432" marR="27432" marT="18288" marB="18288" anchor="ctr">
                     <a:solidFill>
                       <a:srgbClr val="FFFFFF"/>
                     </a:solidFill>
@@ -11416,7 +11934,7 @@
                 </a:tc>
                 <a:tc>
                   <a:txBody>
-                    <a:bodyPr wrap="square" lIns="27432" rIns="27432" tIns="18288" bIns="18288" anchor="ctr"/>
+                    <a:bodyPr/>
                     <a:lstStyle/>
                     <a:p>
                       <a:pPr algn="ctr">
@@ -11440,7 +11958,7 @@
                       </a:r>
                     </a:p>
                   </a:txBody>
-                  <a:tcPr marL="27432" marR="27432" marT="18288" marB="18288">
+                  <a:tcPr marL="27432" marR="27432" marT="18288" marB="18288" anchor="ctr">
                     <a:solidFill>
                       <a:srgbClr val="FFFFFF"/>
                     </a:solidFill>
@@ -11448,7 +11966,7 @@
                 </a:tc>
                 <a:tc>
                   <a:txBody>
-                    <a:bodyPr wrap="square" lIns="27432" rIns="27432" tIns="18288" bIns="18288" anchor="ctr"/>
+                    <a:bodyPr/>
                     <a:lstStyle/>
                     <a:p>
                       <a:pPr algn="ctr">
@@ -11472,7 +11990,7 @@
                       </a:r>
                     </a:p>
                   </a:txBody>
-                  <a:tcPr marL="27432" marR="27432" marT="18288" marB="18288">
+                  <a:tcPr marL="27432" marR="27432" marT="18288" marB="18288" anchor="ctr">
                     <a:solidFill>
                       <a:srgbClr val="FFFFFF"/>
                     </a:solidFill>
@@ -11480,7 +11998,7 @@
                 </a:tc>
                 <a:tc>
                   <a:txBody>
-                    <a:bodyPr wrap="square" lIns="27432" rIns="27432" tIns="18288" bIns="18288" anchor="ctr"/>
+                    <a:bodyPr/>
                     <a:lstStyle/>
                     <a:p>
                       <a:pPr algn="ctr">
@@ -11504,20 +12022,25 @@
                       </a:r>
                     </a:p>
                   </a:txBody>
-                  <a:tcPr marL="27432" marR="27432" marT="18288" marB="18288">
+                  <a:tcPr marL="27432" marR="27432" marT="18288" marB="18288" anchor="ctr">
                     <a:solidFill>
                       <a:srgbClr val="FFFFFF"/>
                     </a:solidFill>
                   </a:tcPr>
                 </a:tc>
+                <a:extLst>
+                  <a:ext uri="{0D108BD9-81ED-4DB2-BD59-A6C34878D82A}">
+                    <a16:rowId xmlns:a16="http://schemas.microsoft.com/office/drawing/2014/main" val="10001"/>
+                  </a:ext>
+                </a:extLst>
               </a:tr>
               <a:tr h="347472">
                 <a:tc>
                   <a:txBody>
-                    <a:bodyPr wrap="square" lIns="27432" rIns="27432" tIns="18288" bIns="18288" anchor="ctr"/>
-                    <a:lstStyle/>
-                    <a:p>
-                      <a:pPr algn="l">
+                    <a:bodyPr/>
+                    <a:lstStyle/>
+                    <a:p>
+                      <a:pPr algn="ctr">
                         <a:lnSpc>
                           <a:spcPct val="100000"/>
                         </a:lnSpc>
@@ -11538,7 +12061,7 @@
                       </a:r>
                     </a:p>
                   </a:txBody>
-                  <a:tcPr marL="27432" marR="27432" marT="18288" marB="18288">
+                  <a:tcPr marL="27432" marR="27432" marT="18288" marB="18288" anchor="ctr">
                     <a:solidFill>
                       <a:srgbClr val="F4F4F4"/>
                     </a:solidFill>
@@ -11546,7 +12069,7 @@
                 </a:tc>
                 <a:tc>
                   <a:txBody>
-                    <a:bodyPr wrap="square" lIns="27432" rIns="27432" tIns="18288" bIns="18288" anchor="ctr"/>
+                    <a:bodyPr/>
                     <a:lstStyle/>
                     <a:p>
                       <a:pPr algn="ctr">
@@ -11570,7 +12093,7 @@
                       </a:r>
                     </a:p>
                   </a:txBody>
-                  <a:tcPr marL="27432" marR="27432" marT="18288" marB="18288">
+                  <a:tcPr marL="27432" marR="27432" marT="18288" marB="18288" anchor="ctr">
                     <a:solidFill>
                       <a:srgbClr val="F4F4F4"/>
                     </a:solidFill>
@@ -11578,7 +12101,7 @@
                 </a:tc>
                 <a:tc>
                   <a:txBody>
-                    <a:bodyPr wrap="square" lIns="27432" rIns="27432" tIns="18288" bIns="18288" anchor="ctr"/>
+                    <a:bodyPr/>
                     <a:lstStyle/>
                     <a:p>
                       <a:pPr algn="ctr">
@@ -11602,7 +12125,7 @@
                       </a:r>
                     </a:p>
                   </a:txBody>
-                  <a:tcPr marL="27432" marR="27432" marT="18288" marB="18288">
+                  <a:tcPr marL="27432" marR="27432" marT="18288" marB="18288" anchor="ctr">
                     <a:solidFill>
                       <a:srgbClr val="F4F4F4"/>
                     </a:solidFill>
@@ -11610,7 +12133,7 @@
                 </a:tc>
                 <a:tc>
                   <a:txBody>
-                    <a:bodyPr wrap="square" lIns="27432" rIns="27432" tIns="18288" bIns="18288" anchor="ctr"/>
+                    <a:bodyPr/>
                     <a:lstStyle/>
                     <a:p>
                       <a:pPr algn="ctr">
@@ -11634,20 +12157,25 @@
                       </a:r>
                     </a:p>
                   </a:txBody>
-                  <a:tcPr marL="27432" marR="27432" marT="18288" marB="18288">
+                  <a:tcPr marL="27432" marR="27432" marT="18288" marB="18288" anchor="ctr">
                     <a:solidFill>
                       <a:srgbClr val="F4F4F4"/>
                     </a:solidFill>
                   </a:tcPr>
                 </a:tc>
+                <a:extLst>
+                  <a:ext uri="{0D108BD9-81ED-4DB2-BD59-A6C34878D82A}">
+                    <a16:rowId xmlns:a16="http://schemas.microsoft.com/office/drawing/2014/main" val="10002"/>
+                  </a:ext>
+                </a:extLst>
               </a:tr>
               <a:tr h="347472">
                 <a:tc>
                   <a:txBody>
-                    <a:bodyPr wrap="square" lIns="27432" rIns="27432" tIns="18288" bIns="18288" anchor="ctr"/>
-                    <a:lstStyle/>
-                    <a:p>
-                      <a:pPr algn="l">
+                    <a:bodyPr/>
+                    <a:lstStyle/>
+                    <a:p>
+                      <a:pPr algn="ctr">
                         <a:lnSpc>
                           <a:spcPct val="100000"/>
                         </a:lnSpc>
@@ -11668,7 +12196,7 @@
                       </a:r>
                     </a:p>
                   </a:txBody>
-                  <a:tcPr marL="27432" marR="27432" marT="18288" marB="18288">
+                  <a:tcPr marL="27432" marR="27432" marT="18288" marB="18288" anchor="ctr">
                     <a:solidFill>
                       <a:srgbClr val="FFFFFF"/>
                     </a:solidFill>
@@ -11676,7 +12204,7 @@
                 </a:tc>
                 <a:tc>
                   <a:txBody>
-                    <a:bodyPr wrap="square" lIns="27432" rIns="27432" tIns="18288" bIns="18288" anchor="ctr"/>
+                    <a:bodyPr/>
                     <a:lstStyle/>
                     <a:p>
                       <a:pPr algn="ctr">
@@ -11700,7 +12228,7 @@
                       </a:r>
                     </a:p>
                   </a:txBody>
-                  <a:tcPr marL="27432" marR="27432" marT="18288" marB="18288">
+                  <a:tcPr marL="27432" marR="27432" marT="18288" marB="18288" anchor="ctr">
                     <a:solidFill>
                       <a:srgbClr val="FFFFFF"/>
                     </a:solidFill>
@@ -11708,7 +12236,7 @@
                 </a:tc>
                 <a:tc>
                   <a:txBody>
-                    <a:bodyPr wrap="square" lIns="27432" rIns="27432" tIns="18288" bIns="18288" anchor="ctr"/>
+                    <a:bodyPr/>
                     <a:lstStyle/>
                     <a:p>
                       <a:pPr algn="ctr">
@@ -11732,7 +12260,7 @@
                       </a:r>
                     </a:p>
                   </a:txBody>
-                  <a:tcPr marL="27432" marR="27432" marT="18288" marB="18288">
+                  <a:tcPr marL="27432" marR="27432" marT="18288" marB="18288" anchor="ctr">
                     <a:solidFill>
                       <a:srgbClr val="FFFFFF"/>
                     </a:solidFill>
@@ -11740,7 +12268,7 @@
                 </a:tc>
                 <a:tc>
                   <a:txBody>
-                    <a:bodyPr wrap="square" lIns="27432" rIns="27432" tIns="18288" bIns="18288" anchor="ctr"/>
+                    <a:bodyPr/>
                     <a:lstStyle/>
                     <a:p>
                       <a:pPr algn="ctr">
@@ -11764,20 +12292,25 @@
                       </a:r>
                     </a:p>
                   </a:txBody>
-                  <a:tcPr marL="27432" marR="27432" marT="18288" marB="18288">
+                  <a:tcPr marL="27432" marR="27432" marT="18288" marB="18288" anchor="ctr">
                     <a:solidFill>
                       <a:srgbClr val="FFFFFF"/>
                     </a:solidFill>
                   </a:tcPr>
                 </a:tc>
+                <a:extLst>
+                  <a:ext uri="{0D108BD9-81ED-4DB2-BD59-A6C34878D82A}">
+                    <a16:rowId xmlns:a16="http://schemas.microsoft.com/office/drawing/2014/main" val="10003"/>
+                  </a:ext>
+                </a:extLst>
               </a:tr>
               <a:tr h="347472">
                 <a:tc>
                   <a:txBody>
-                    <a:bodyPr wrap="square" lIns="27432" rIns="27432" tIns="18288" bIns="18288" anchor="ctr"/>
-                    <a:lstStyle/>
-                    <a:p>
-                      <a:pPr algn="l">
+                    <a:bodyPr/>
+                    <a:lstStyle/>
+                    <a:p>
+                      <a:pPr algn="ctr">
                         <a:lnSpc>
                           <a:spcPct val="100000"/>
                         </a:lnSpc>
@@ -11798,7 +12331,7 @@
                       </a:r>
                     </a:p>
                   </a:txBody>
-                  <a:tcPr marL="27432" marR="27432" marT="18288" marB="18288">
+                  <a:tcPr marL="27432" marR="27432" marT="18288" marB="18288" anchor="ctr">
                     <a:solidFill>
                       <a:srgbClr val="F4F4F4"/>
                     </a:solidFill>
@@ -11806,7 +12339,7 @@
                 </a:tc>
                 <a:tc>
                   <a:txBody>
-                    <a:bodyPr wrap="square" lIns="27432" rIns="27432" tIns="18288" bIns="18288" anchor="ctr"/>
+                    <a:bodyPr/>
                     <a:lstStyle/>
                     <a:p>
                       <a:pPr algn="ctr">
@@ -11830,7 +12363,7 @@
                       </a:r>
                     </a:p>
                   </a:txBody>
-                  <a:tcPr marL="27432" marR="27432" marT="18288" marB="18288">
+                  <a:tcPr marL="27432" marR="27432" marT="18288" marB="18288" anchor="ctr">
                     <a:solidFill>
                       <a:srgbClr val="F4F4F4"/>
                     </a:solidFill>
@@ -11838,7 +12371,7 @@
                 </a:tc>
                 <a:tc>
                   <a:txBody>
-                    <a:bodyPr wrap="square" lIns="27432" rIns="27432" tIns="18288" bIns="18288" anchor="ctr"/>
+                    <a:bodyPr/>
                     <a:lstStyle/>
                     <a:p>
                       <a:pPr algn="ctr">
@@ -11862,7 +12395,7 @@
                       </a:r>
                     </a:p>
                   </a:txBody>
-                  <a:tcPr marL="27432" marR="27432" marT="18288" marB="18288">
+                  <a:tcPr marL="27432" marR="27432" marT="18288" marB="18288" anchor="ctr">
                     <a:solidFill>
                       <a:srgbClr val="F4F4F4"/>
                     </a:solidFill>
@@ -11870,7 +12403,7 @@
                 </a:tc>
                 <a:tc>
                   <a:txBody>
-                    <a:bodyPr wrap="square" lIns="27432" rIns="27432" tIns="18288" bIns="18288" anchor="ctr"/>
+                    <a:bodyPr/>
                     <a:lstStyle/>
                     <a:p>
                       <a:pPr algn="ctr">
@@ -11894,20 +12427,25 @@
                       </a:r>
                     </a:p>
                   </a:txBody>
-                  <a:tcPr marL="27432" marR="27432" marT="18288" marB="18288">
+                  <a:tcPr marL="27432" marR="27432" marT="18288" marB="18288" anchor="ctr">
                     <a:solidFill>
                       <a:srgbClr val="F4F4F4"/>
                     </a:solidFill>
                   </a:tcPr>
                 </a:tc>
+                <a:extLst>
+                  <a:ext uri="{0D108BD9-81ED-4DB2-BD59-A6C34878D82A}">
+                    <a16:rowId xmlns:a16="http://schemas.microsoft.com/office/drawing/2014/main" val="10004"/>
+                  </a:ext>
+                </a:extLst>
               </a:tr>
               <a:tr h="347472">
                 <a:tc>
                   <a:txBody>
-                    <a:bodyPr wrap="square" lIns="27432" rIns="27432" tIns="18288" bIns="18288" anchor="ctr"/>
-                    <a:lstStyle/>
-                    <a:p>
-                      <a:pPr algn="l">
+                    <a:bodyPr/>
+                    <a:lstStyle/>
+                    <a:p>
+                      <a:pPr algn="ctr">
                         <a:lnSpc>
                           <a:spcPct val="100000"/>
                         </a:lnSpc>
@@ -11928,7 +12466,7 @@
                       </a:r>
                     </a:p>
                   </a:txBody>
-                  <a:tcPr marL="27432" marR="27432" marT="18288" marB="18288">
+                  <a:tcPr marL="27432" marR="27432" marT="18288" marB="18288" anchor="ctr">
                     <a:solidFill>
                       <a:srgbClr val="FFFFFF"/>
                     </a:solidFill>
@@ -11936,7 +12474,7 @@
                 </a:tc>
                 <a:tc>
                   <a:txBody>
-                    <a:bodyPr wrap="square" lIns="27432" rIns="27432" tIns="18288" bIns="18288" anchor="ctr"/>
+                    <a:bodyPr/>
                     <a:lstStyle/>
                     <a:p>
                       <a:pPr algn="ctr">
@@ -11960,7 +12498,7 @@
                       </a:r>
                     </a:p>
                   </a:txBody>
-                  <a:tcPr marL="27432" marR="27432" marT="18288" marB="18288">
+                  <a:tcPr marL="27432" marR="27432" marT="18288" marB="18288" anchor="ctr">
                     <a:solidFill>
                       <a:srgbClr val="FFFFFF"/>
                     </a:solidFill>
@@ -11968,7 +12506,7 @@
                 </a:tc>
                 <a:tc>
                   <a:txBody>
-                    <a:bodyPr wrap="square" lIns="27432" rIns="27432" tIns="18288" bIns="18288" anchor="ctr"/>
+                    <a:bodyPr/>
                     <a:lstStyle/>
                     <a:p>
                       <a:pPr algn="ctr">
@@ -11992,7 +12530,7 @@
                       </a:r>
                     </a:p>
                   </a:txBody>
-                  <a:tcPr marL="27432" marR="27432" marT="18288" marB="18288">
+                  <a:tcPr marL="27432" marR="27432" marT="18288" marB="18288" anchor="ctr">
                     <a:solidFill>
                       <a:srgbClr val="FFFFFF"/>
                     </a:solidFill>
@@ -12000,7 +12538,7 @@
                 </a:tc>
                 <a:tc>
                   <a:txBody>
-                    <a:bodyPr wrap="square" lIns="27432" rIns="27432" tIns="18288" bIns="18288" anchor="ctr"/>
+                    <a:bodyPr/>
                     <a:lstStyle/>
                     <a:p>
                       <a:pPr algn="ctr">
@@ -12024,12 +12562,17 @@
                       </a:r>
                     </a:p>
                   </a:txBody>
-                  <a:tcPr marL="27432" marR="27432" marT="18288" marB="18288">
+                  <a:tcPr marL="27432" marR="27432" marT="18288" marB="18288" anchor="ctr">
                     <a:solidFill>
                       <a:srgbClr val="FFFFFF"/>
                     </a:solidFill>
                   </a:tcPr>
                 </a:tc>
+                <a:extLst>
+                  <a:ext uri="{0D108BD9-81ED-4DB2-BD59-A6C34878D82A}">
+                    <a16:rowId xmlns:a16="http://schemas.microsoft.com/office/drawing/2014/main" val="10005"/>
+                  </a:ext>
+                </a:extLst>
               </a:tr>
             </a:tbl>
           </a:graphicData>
@@ -12052,7 +12595,7 @@
           <a:noFill/>
         </p:spPr>
         <p:txBody>
-          <a:bodyPr wrap="square" lIns="27432" rIns="27432" tIns="18288" bIns="18288"/>
+          <a:bodyPr wrap="square" lIns="27432" tIns="18288" rIns="27432" bIns="18288"/>
           <a:lstStyle/>
           <a:p>
             <a:pPr algn="l">
@@ -12136,7 +12679,7 @@
           <a:noFill/>
         </p:spPr>
         <p:txBody>
-          <a:bodyPr wrap="square" lIns="27432" rIns="27432" tIns="18288" bIns="18288"/>
+          <a:bodyPr wrap="square" lIns="27432" tIns="18288" rIns="27432" bIns="18288"/>
           <a:lstStyle/>
           <a:p>
             <a:pPr algn="l">
@@ -12170,7 +12713,7 @@
 </file>
 
 <file path=ppt/slides/slide6.xml><?xml version="1.0" encoding="utf-8"?>
-<p:sld xmlns:a="http://schemas.openxmlformats.org/drawingml/2006/main" xmlns:p="http://schemas.openxmlformats.org/presentationml/2006/main" xmlns:r="http://schemas.openxmlformats.org/officeDocument/2006/relationships">
+<p:sld xmlns:a="http://schemas.openxmlformats.org/drawingml/2006/main" xmlns:r="http://schemas.openxmlformats.org/officeDocument/2006/relationships" xmlns:p="http://schemas.openxmlformats.org/presentationml/2006/main">
   <p:cSld>
     <p:spTree>
       <p:nvGrpSpPr>
@@ -12178,7 +12721,14 @@
         <p:cNvGrpSpPr/>
         <p:nvPr/>
       </p:nvGrpSpPr>
-      <p:grpSpPr/>
+      <p:grpSpPr>
+        <a:xfrm>
+          <a:off x="0" y="0"/>
+          <a:ext cx="0" cy="0"/>
+          <a:chOff x="0" y="0"/>
+          <a:chExt cx="0" cy="0"/>
+        </a:xfrm>
+      </p:grpSpPr>
       <p:sp>
         <p:nvSpPr>
           <p:cNvPr id="2" name="TextBox 1"/>
@@ -12187,8 +12737,8 @@
         </p:nvSpPr>
         <p:spPr>
           <a:xfrm>
-            <a:off x="411480" y="320040"/>
-            <a:ext cx="8321040" cy="566928"/>
+            <a:off x="148005" y="283464"/>
+            <a:ext cx="8838846" cy="566928"/>
           </a:xfrm>
           <a:prstGeom prst="rect">
             <a:avLst/>
@@ -12196,7 +12746,7 @@
           <a:noFill/>
         </p:spPr>
         <p:txBody>
-          <a:bodyPr wrap="square" anchor="t" lIns="0" rIns="0" tIns="0" bIns="0">
+          <a:bodyPr wrap="square" lIns="0" tIns="0" rIns="0" bIns="0" anchor="t">
             <a:spAutoFit/>
           </a:bodyPr>
           <a:lstStyle/>
@@ -12265,6 +12815,7 @@
           <a:lstStyle/>
           <a:p>
             <a:pPr algn="ctr"/>
+            <a:endParaRPr/>
           </a:p>
         </p:txBody>
       </p:sp>
@@ -12310,6 +12861,7 @@
           <a:lstStyle/>
           <a:p>
             <a:pPr algn="ctr"/>
+            <a:endParaRPr/>
           </a:p>
         </p:txBody>
       </p:sp>
@@ -12330,8 +12882,8 @@
           <a:noFill/>
         </p:spPr>
         <p:txBody>
-          <a:bodyPr wrap="square" anchor="t" lIns="9144" rIns="9144" tIns="9144" bIns="9144">
-            <a:normAutofit/>
+          <a:bodyPr wrap="square" lIns="9144" tIns="9144" rIns="9144" bIns="9144" anchor="t">
+            <a:normAutofit fontScale="85000" lnSpcReduction="20000"/>
           </a:bodyPr>
           <a:lstStyle/>
           <a:p>
@@ -12512,8 +13064,8 @@
         </p:nvSpPr>
         <p:spPr>
           <a:xfrm>
-            <a:off x="5257800" y="1207008"/>
-            <a:ext cx="3246120" cy="1828800"/>
+            <a:off x="5129784" y="1115568"/>
+            <a:ext cx="3886200" cy="1648400"/>
           </a:xfrm>
           <a:prstGeom prst="rect">
             <a:avLst/>
@@ -12521,7 +13073,7 @@
           <a:noFill/>
         </p:spPr>
         <p:txBody>
-          <a:bodyPr wrap="square" anchor="t" lIns="27432" rIns="27432" tIns="27432" bIns="27432">
+          <a:bodyPr wrap="square" lIns="27432" tIns="27432" rIns="27432" bIns="27432" anchor="t">
             <a:spAutoFit/>
           </a:bodyPr>
           <a:lstStyle/>
@@ -12564,8 +13116,16 @@
                 <a:ea typeface="メイリオ"/>
                 <a:cs typeface="Times New Roman"/>
               </a:rPr>
-              <a:t>・ 同じサンプルに対する誤差をモデル横断で比較できる</a:t>
-            </a:r>
+              <a:t>・ 同じサンプルに対する誤差を</a:t>
+            </a:r>
+            <a:endParaRPr lang="en-US" sz="1800" b="0">
+              <a:solidFill>
+                <a:srgbClr val="000000"/>
+              </a:solidFill>
+              <a:latin typeface="Times New Roman"/>
+              <a:ea typeface="メイリオ"/>
+              <a:cs typeface="Times New Roman"/>
+            </a:endParaRPr>
           </a:p>
           <a:p>
             <a:pPr algn="l">
@@ -12585,7 +13145,57 @@
                 <a:ea typeface="メイリオ"/>
                 <a:cs typeface="Times New Roman"/>
               </a:rPr>
-              <a:t>・ groupby で AD内外の平均誤差を計算しやすい</a:t>
+              <a:t>モデル横断で比較できる</a:t>
+            </a:r>
+          </a:p>
+          <a:p>
+            <a:pPr algn="l">
+              <a:lnSpc>
+                <a:spcPct val="108000"/>
+              </a:lnSpc>
+              <a:spcAft>
+                <a:spcPts val="200"/>
+              </a:spcAft>
+            </a:pPr>
+            <a:r>
+              <a:rPr sz="1800" b="0">
+                <a:solidFill>
+                  <a:srgbClr val="000000"/>
+                </a:solidFill>
+                <a:latin typeface="Times New Roman"/>
+                <a:ea typeface="メイリオ"/>
+                <a:cs typeface="Times New Roman"/>
+              </a:rPr>
+              <a:t>・ groupby で AD内外の平均誤差を</a:t>
+            </a:r>
+            <a:endParaRPr lang="en-US" sz="1800" b="0">
+              <a:solidFill>
+                <a:srgbClr val="000000"/>
+              </a:solidFill>
+              <a:latin typeface="Times New Roman"/>
+              <a:ea typeface="メイリオ"/>
+              <a:cs typeface="Times New Roman"/>
+            </a:endParaRPr>
+          </a:p>
+          <a:p>
+            <a:pPr algn="l">
+              <a:lnSpc>
+                <a:spcPct val="108000"/>
+              </a:lnSpc>
+              <a:spcAft>
+                <a:spcPts val="200"/>
+              </a:spcAft>
+            </a:pPr>
+            <a:r>
+              <a:rPr sz="1800" b="0">
+                <a:solidFill>
+                  <a:srgbClr val="000000"/>
+                </a:solidFill>
+                <a:latin typeface="Times New Roman"/>
+                <a:ea typeface="メイリオ"/>
+                <a:cs typeface="Times New Roman"/>
+              </a:rPr>
+              <a:t>計算しやすい</a:t>
             </a:r>
           </a:p>
         </p:txBody>
@@ -12632,6 +13242,7 @@
           <a:lstStyle/>
           <a:p>
             <a:pPr algn="ctr"/>
+            <a:endParaRPr/>
           </a:p>
         </p:txBody>
       </p:sp>
@@ -12652,7 +13263,7 @@
           <a:noFill/>
         </p:spPr>
         <p:txBody>
-          <a:bodyPr wrap="square" anchor="t" lIns="9144" rIns="9144" tIns="9144" bIns="9144">
+          <a:bodyPr wrap="square" lIns="9144" tIns="9144" rIns="9144" bIns="9144" anchor="t">
             <a:normAutofit/>
           </a:bodyPr>
           <a:lstStyle/>
@@ -12729,8 +13340,8 @@
         </p:nvSpPr>
         <p:spPr>
           <a:xfrm>
-            <a:off x="749808" y="5193792"/>
-            <a:ext cx="7635240" cy="411480"/>
+            <a:off x="1268783" y="5192363"/>
+            <a:ext cx="6597290" cy="611321"/>
           </a:xfrm>
           <a:prstGeom prst="rect">
             <a:avLst/>
@@ -12738,7 +13349,7 @@
           <a:noFill/>
         </p:spPr>
         <p:txBody>
-          <a:bodyPr wrap="square" anchor="t" lIns="9144" rIns="9144" tIns="9144" bIns="9144">
+          <a:bodyPr wrap="square" lIns="9144" tIns="9144" rIns="9144" bIns="9144" anchor="t">
             <a:spAutoFit/>
           </a:bodyPr>
           <a:lstStyle/>
@@ -12782,7 +13393,7 @@
           <a:noFill/>
         </p:spPr>
         <p:txBody>
-          <a:bodyPr wrap="square" anchor="t" lIns="0" rIns="0" tIns="0" bIns="0">
+          <a:bodyPr wrap="square" lIns="0" tIns="0" rIns="0" bIns="0" anchor="t">
             <a:spAutoFit/>
           </a:bodyPr>
           <a:lstStyle/>
@@ -12818,7 +13429,7 @@
 </file>
 
 <file path=ppt/slides/slide7.xml><?xml version="1.0" encoding="utf-8"?>
-<p:sld xmlns:a="http://schemas.openxmlformats.org/drawingml/2006/main" xmlns:p="http://schemas.openxmlformats.org/presentationml/2006/main" xmlns:r="http://schemas.openxmlformats.org/officeDocument/2006/relationships">
+<p:sld xmlns:a="http://schemas.openxmlformats.org/drawingml/2006/main" xmlns:r="http://schemas.openxmlformats.org/officeDocument/2006/relationships" xmlns:p="http://schemas.openxmlformats.org/presentationml/2006/main">
   <p:cSld>
     <p:spTree>
       <p:nvGrpSpPr>
@@ -12826,7 +13437,14 @@
         <p:cNvGrpSpPr/>
         <p:nvPr/>
       </p:nvGrpSpPr>
-      <p:grpSpPr/>
+      <p:grpSpPr>
+        <a:xfrm>
+          <a:off x="0" y="0"/>
+          <a:ext cx="0" cy="0"/>
+          <a:chOff x="0" y="0"/>
+          <a:chExt cx="0" cy="0"/>
+        </a:xfrm>
+      </p:grpSpPr>
       <p:sp>
         <p:nvSpPr>
           <p:cNvPr id="2" name="TextBox 1"/>
@@ -12844,7 +13462,7 @@
           <a:noFill/>
         </p:spPr>
         <p:txBody>
-          <a:bodyPr wrap="square" anchor="t" lIns="0" rIns="0" tIns="0" bIns="0">
+          <a:bodyPr wrap="square" lIns="0" tIns="0" rIns="0" bIns="0" anchor="t">
             <a:spAutoFit/>
           </a:bodyPr>
           <a:lstStyle/>
@@ -12913,6 +13531,7 @@
           <a:lstStyle/>
           <a:p>
             <a:pPr algn="ctr"/>
+            <a:endParaRPr/>
           </a:p>
         </p:txBody>
       </p:sp>
@@ -12958,6 +13577,7 @@
           <a:lstStyle/>
           <a:p>
             <a:pPr algn="ctr"/>
+            <a:endParaRPr/>
           </a:p>
         </p:txBody>
       </p:sp>
@@ -12994,7 +13614,7 @@
         <p:spPr>
           <a:xfrm>
             <a:off x="640080" y="4425696"/>
-            <a:ext cx="7818120" cy="1051560"/>
+            <a:ext cx="8046720" cy="998735"/>
           </a:xfrm>
           <a:prstGeom prst="rect">
             <a:avLst/>
@@ -13002,7 +13622,7 @@
           <a:noFill/>
         </p:spPr>
         <p:txBody>
-          <a:bodyPr wrap="square" anchor="t" lIns="27432" rIns="27432" tIns="27432" bIns="27432">
+          <a:bodyPr wrap="square" lIns="27432" tIns="27432" rIns="27432" bIns="27432" anchor="t">
             <a:spAutoFit/>
           </a:bodyPr>
           <a:lstStyle/>
@@ -13088,7 +13708,7 @@
           <a:noFill/>
         </p:spPr>
         <p:txBody>
-          <a:bodyPr wrap="square" anchor="t" lIns="0" rIns="0" tIns="0" bIns="0">
+          <a:bodyPr wrap="square" lIns="0" tIns="0" rIns="0" bIns="0" anchor="t">
             <a:spAutoFit/>
           </a:bodyPr>
           <a:lstStyle/>
@@ -13124,7 +13744,7 @@
 </file>
 
 <file path=ppt/slides/slide8.xml><?xml version="1.0" encoding="utf-8"?>
-<p:sld xmlns:a="http://schemas.openxmlformats.org/drawingml/2006/main" xmlns:p="http://schemas.openxmlformats.org/presentationml/2006/main" xmlns:r="http://schemas.openxmlformats.org/officeDocument/2006/relationships">
+<p:sld xmlns:a="http://schemas.openxmlformats.org/drawingml/2006/main" xmlns:r="http://schemas.openxmlformats.org/officeDocument/2006/relationships" xmlns:p="http://schemas.openxmlformats.org/presentationml/2006/main">
   <p:cSld>
     <p:spTree>
       <p:nvGrpSpPr>
@@ -13132,7 +13752,14 @@
         <p:cNvGrpSpPr/>
         <p:nvPr/>
       </p:nvGrpSpPr>
-      <p:grpSpPr/>
+      <p:grpSpPr>
+        <a:xfrm>
+          <a:off x="0" y="0"/>
+          <a:ext cx="0" cy="0"/>
+          <a:chOff x="0" y="0"/>
+          <a:chExt cx="0" cy="0"/>
+        </a:xfrm>
+      </p:grpSpPr>
       <p:sp>
         <p:nvSpPr>
           <p:cNvPr id="2" name="TextBox 1"/>
@@ -13150,7 +13777,7 @@
           <a:noFill/>
         </p:spPr>
         <p:txBody>
-          <a:bodyPr wrap="square" lIns="27432" rIns="27432" tIns="18288" bIns="18288"/>
+          <a:bodyPr wrap="square" lIns="27432" tIns="18288" rIns="27432" bIns="18288"/>
           <a:lstStyle/>
           <a:p>
             <a:pPr algn="l">
@@ -13215,6 +13842,7 @@
           <a:lstStyle/>
           <a:p>
             <a:pPr algn="ctr"/>
+            <a:endParaRPr/>
           </a:p>
         </p:txBody>
       </p:sp>
@@ -13224,11 +13852,17 @@
           <p:cNvGraphicFramePr>
             <a:graphicFrameLocks noGrp="1"/>
           </p:cNvGraphicFramePr>
-          <p:nvPr/>
+          <p:nvPr>
+            <p:extLst>
+              <p:ext uri="{D42A27DB-BD31-4B8C-83A1-F6EECF244321}">
+                <p14:modId xmlns:p14="http://schemas.microsoft.com/office/powerpoint/2010/main" val="471755593"/>
+              </p:ext>
+            </p:extLst>
+          </p:nvPr>
         </p:nvGraphicFramePr>
         <p:xfrm>
           <a:off x="502920" y="1234440"/>
-          <a:ext cx="5349240" cy="3163824"/>
+          <a:ext cx="5349240" cy="3218688"/>
         </p:xfrm>
         <a:graphic>
           <a:graphicData uri="http://schemas.openxmlformats.org/drawingml/2006/table">
@@ -13237,16 +13871,46 @@
                 <a:tableStyleId>{5C22544A-7EE6-4342-B048-85BDC9FD1C3A}</a:tableStyleId>
               </a:tblPr>
               <a:tblGrid>
-                <a:gridCol w="2148840"/>
-                <a:gridCol w="640080"/>
-                <a:gridCol w="640080"/>
-                <a:gridCol w="640080"/>
-                <a:gridCol w="1280160"/>
+                <a:gridCol w="2148840">
+                  <a:extLst>
+                    <a:ext uri="{9D8B030D-6E8A-4147-A177-3AD203B41FA5}">
+                      <a16:colId xmlns:a16="http://schemas.microsoft.com/office/drawing/2014/main" val="20000"/>
+                    </a:ext>
+                  </a:extLst>
+                </a:gridCol>
+                <a:gridCol w="640080">
+                  <a:extLst>
+                    <a:ext uri="{9D8B030D-6E8A-4147-A177-3AD203B41FA5}">
+                      <a16:colId xmlns:a16="http://schemas.microsoft.com/office/drawing/2014/main" val="20001"/>
+                    </a:ext>
+                  </a:extLst>
+                </a:gridCol>
+                <a:gridCol w="640080">
+                  <a:extLst>
+                    <a:ext uri="{9D8B030D-6E8A-4147-A177-3AD203B41FA5}">
+                      <a16:colId xmlns:a16="http://schemas.microsoft.com/office/drawing/2014/main" val="20002"/>
+                    </a:ext>
+                  </a:extLst>
+                </a:gridCol>
+                <a:gridCol w="640080">
+                  <a:extLst>
+                    <a:ext uri="{9D8B030D-6E8A-4147-A177-3AD203B41FA5}">
+                      <a16:colId xmlns:a16="http://schemas.microsoft.com/office/drawing/2014/main" val="20003"/>
+                    </a:ext>
+                  </a:extLst>
+                </a:gridCol>
+                <a:gridCol w="1280160">
+                  <a:extLst>
+                    <a:ext uri="{9D8B030D-6E8A-4147-A177-3AD203B41FA5}">
+                      <a16:colId xmlns:a16="http://schemas.microsoft.com/office/drawing/2014/main" val="20004"/>
+                    </a:ext>
+                  </a:extLst>
+                </a:gridCol>
               </a:tblGrid>
               <a:tr h="530352">
                 <a:tc>
                   <a:txBody>
-                    <a:bodyPr wrap="square" lIns="27432" rIns="27432" tIns="18288" bIns="18288" anchor="ctr"/>
+                    <a:bodyPr/>
                     <a:lstStyle/>
                     <a:p>
                       <a:pPr algn="ctr">
@@ -13270,7 +13934,7 @@
                       </a:r>
                     </a:p>
                   </a:txBody>
-                  <a:tcPr marL="27432" marR="27432" marT="18288" marB="18288">
+                  <a:tcPr marL="27432" marR="27432" marT="18288" marB="18288" anchor="ctr">
                     <a:solidFill>
                       <a:srgbClr val="000000"/>
                     </a:solidFill>
@@ -13278,7 +13942,7 @@
                 </a:tc>
                 <a:tc>
                   <a:txBody>
-                    <a:bodyPr wrap="square" lIns="27432" rIns="27432" tIns="18288" bIns="18288" anchor="ctr"/>
+                    <a:bodyPr/>
                     <a:lstStyle/>
                     <a:p>
                       <a:pPr algn="ctr">
@@ -13302,7 +13966,7 @@
                       </a:r>
                     </a:p>
                   </a:txBody>
-                  <a:tcPr marL="27432" marR="27432" marT="18288" marB="18288">
+                  <a:tcPr marL="27432" marR="27432" marT="18288" marB="18288" anchor="ctr">
                     <a:solidFill>
                       <a:srgbClr val="000000"/>
                     </a:solidFill>
@@ -13310,7 +13974,7 @@
                 </a:tc>
                 <a:tc>
                   <a:txBody>
-                    <a:bodyPr wrap="square" lIns="27432" rIns="27432" tIns="18288" bIns="18288" anchor="ctr"/>
+                    <a:bodyPr/>
                     <a:lstStyle/>
                     <a:p>
                       <a:pPr algn="ctr">
@@ -13334,7 +13998,7 @@
                       </a:r>
                     </a:p>
                   </a:txBody>
-                  <a:tcPr marL="27432" marR="27432" marT="18288" marB="18288">
+                  <a:tcPr marL="27432" marR="27432" marT="18288" marB="18288" anchor="ctr">
                     <a:solidFill>
                       <a:srgbClr val="000000"/>
                     </a:solidFill>
@@ -13342,7 +14006,7 @@
                 </a:tc>
                 <a:tc>
                   <a:txBody>
-                    <a:bodyPr wrap="square" lIns="27432" rIns="27432" tIns="18288" bIns="18288" anchor="ctr"/>
+                    <a:bodyPr/>
                     <a:lstStyle/>
                     <a:p>
                       <a:pPr algn="ctr">
@@ -13366,7 +14030,7 @@
                       </a:r>
                     </a:p>
                   </a:txBody>
-                  <a:tcPr marL="27432" marR="27432" marT="18288" marB="18288">
+                  <a:tcPr marL="27432" marR="27432" marT="18288" marB="18288" anchor="ctr">
                     <a:solidFill>
                       <a:srgbClr val="000000"/>
                     </a:solidFill>
@@ -13374,7 +14038,7 @@
                 </a:tc>
                 <a:tc>
                   <a:txBody>
-                    <a:bodyPr wrap="square" lIns="27432" rIns="27432" tIns="18288" bIns="18288" anchor="ctr"/>
+                    <a:bodyPr/>
                     <a:lstStyle/>
                     <a:p>
                       <a:pPr algn="ctr">
@@ -13419,20 +14083,25 @@
                       </a:r>
                     </a:p>
                   </a:txBody>
-                  <a:tcPr marL="27432" marR="27432" marT="18288" marB="18288">
+                  <a:tcPr marL="27432" marR="27432" marT="18288" marB="18288" anchor="ctr">
                     <a:solidFill>
                       <a:srgbClr val="000000"/>
                     </a:solidFill>
                   </a:tcPr>
                 </a:tc>
+                <a:extLst>
+                  <a:ext uri="{0D108BD9-81ED-4DB2-BD59-A6C34878D82A}">
+                    <a16:rowId xmlns:a16="http://schemas.microsoft.com/office/drawing/2014/main" val="10000"/>
+                  </a:ext>
+                </a:extLst>
               </a:tr>
               <a:tr h="329184">
                 <a:tc>
                   <a:txBody>
-                    <a:bodyPr wrap="square" lIns="27432" rIns="27432" tIns="18288" bIns="18288" anchor="ctr"/>
-                    <a:lstStyle/>
-                    <a:p>
-                      <a:pPr algn="l">
+                    <a:bodyPr/>
+                    <a:lstStyle/>
+                    <a:p>
+                      <a:pPr algn="ctr">
                         <a:lnSpc>
                           <a:spcPct val="100000"/>
                         </a:lnSpc>
@@ -13453,7 +14122,7 @@
                       </a:r>
                     </a:p>
                   </a:txBody>
-                  <a:tcPr marL="27432" marR="27432" marT="18288" marB="18288">
+                  <a:tcPr marL="27432" marR="27432" marT="18288" marB="18288" anchor="ctr">
                     <a:solidFill>
                       <a:srgbClr val="FFFFFF"/>
                     </a:solidFill>
@@ -13461,7 +14130,7 @@
                 </a:tc>
                 <a:tc>
                   <a:txBody>
-                    <a:bodyPr wrap="square" lIns="27432" rIns="27432" tIns="18288" bIns="18288" anchor="ctr"/>
+                    <a:bodyPr/>
                     <a:lstStyle/>
                     <a:p>
                       <a:pPr algn="ctr">
@@ -13485,7 +14154,7 @@
                       </a:r>
                     </a:p>
                   </a:txBody>
-                  <a:tcPr marL="27432" marR="27432" marT="18288" marB="18288">
+                  <a:tcPr marL="27432" marR="27432" marT="18288" marB="18288" anchor="ctr">
                     <a:solidFill>
                       <a:srgbClr val="FFFFFF"/>
                     </a:solidFill>
@@ -13493,7 +14162,7 @@
                 </a:tc>
                 <a:tc>
                   <a:txBody>
-                    <a:bodyPr wrap="square" lIns="27432" rIns="27432" tIns="18288" bIns="18288" anchor="ctr"/>
+                    <a:bodyPr/>
                     <a:lstStyle/>
                     <a:p>
                       <a:pPr algn="ctr">
@@ -13517,7 +14186,7 @@
                       </a:r>
                     </a:p>
                   </a:txBody>
-                  <a:tcPr marL="27432" marR="27432" marT="18288" marB="18288">
+                  <a:tcPr marL="27432" marR="27432" marT="18288" marB="18288" anchor="ctr">
                     <a:solidFill>
                       <a:srgbClr val="FFFFFF"/>
                     </a:solidFill>
@@ -13525,7 +14194,7 @@
                 </a:tc>
                 <a:tc>
                   <a:txBody>
-                    <a:bodyPr wrap="square" lIns="27432" rIns="27432" tIns="18288" bIns="18288" anchor="ctr"/>
+                    <a:bodyPr/>
                     <a:lstStyle/>
                     <a:p>
                       <a:pPr algn="ctr">
@@ -13549,7 +14218,7 @@
                       </a:r>
                     </a:p>
                   </a:txBody>
-                  <a:tcPr marL="27432" marR="27432" marT="18288" marB="18288">
+                  <a:tcPr marL="27432" marR="27432" marT="18288" marB="18288" anchor="ctr">
                     <a:solidFill>
                       <a:srgbClr val="FFFFFF"/>
                     </a:solidFill>
@@ -13557,7 +14226,7 @@
                 </a:tc>
                 <a:tc>
                   <a:txBody>
-                    <a:bodyPr wrap="square" lIns="27432" rIns="27432" tIns="18288" bIns="18288" anchor="ctr"/>
+                    <a:bodyPr/>
                     <a:lstStyle/>
                     <a:p>
                       <a:pPr algn="ctr">
@@ -13581,20 +14250,25 @@
                       </a:r>
                     </a:p>
                   </a:txBody>
-                  <a:tcPr marL="27432" marR="27432" marT="18288" marB="18288">
+                  <a:tcPr marL="27432" marR="27432" marT="18288" marB="18288" anchor="ctr">
                     <a:solidFill>
                       <a:srgbClr val="FFFFFF"/>
                     </a:solidFill>
                   </a:tcPr>
                 </a:tc>
+                <a:extLst>
+                  <a:ext uri="{0D108BD9-81ED-4DB2-BD59-A6C34878D82A}">
+                    <a16:rowId xmlns:a16="http://schemas.microsoft.com/office/drawing/2014/main" val="10001"/>
+                  </a:ext>
+                </a:extLst>
               </a:tr>
               <a:tr h="329184">
                 <a:tc>
                   <a:txBody>
-                    <a:bodyPr wrap="square" lIns="27432" rIns="27432" tIns="18288" bIns="18288" anchor="ctr"/>
-                    <a:lstStyle/>
-                    <a:p>
-                      <a:pPr algn="l">
+                    <a:bodyPr/>
+                    <a:lstStyle/>
+                    <a:p>
+                      <a:pPr algn="ctr">
                         <a:lnSpc>
                           <a:spcPct val="100000"/>
                         </a:lnSpc>
@@ -13615,7 +14289,7 @@
                       </a:r>
                     </a:p>
                   </a:txBody>
-                  <a:tcPr marL="27432" marR="27432" marT="18288" marB="18288">
+                  <a:tcPr marL="27432" marR="27432" marT="18288" marB="18288" anchor="ctr">
                     <a:solidFill>
                       <a:srgbClr val="F4F4F4"/>
                     </a:solidFill>
@@ -13623,7 +14297,7 @@
                 </a:tc>
                 <a:tc>
                   <a:txBody>
-                    <a:bodyPr wrap="square" lIns="27432" rIns="27432" tIns="18288" bIns="18288" anchor="ctr"/>
+                    <a:bodyPr/>
                     <a:lstStyle/>
                     <a:p>
                       <a:pPr algn="ctr">
@@ -13647,7 +14321,7 @@
                       </a:r>
                     </a:p>
                   </a:txBody>
-                  <a:tcPr marL="27432" marR="27432" marT="18288" marB="18288">
+                  <a:tcPr marL="27432" marR="27432" marT="18288" marB="18288" anchor="ctr">
                     <a:solidFill>
                       <a:srgbClr val="F4F4F4"/>
                     </a:solidFill>
@@ -13655,7 +14329,7 @@
                 </a:tc>
                 <a:tc>
                   <a:txBody>
-                    <a:bodyPr wrap="square" lIns="27432" rIns="27432" tIns="18288" bIns="18288" anchor="ctr"/>
+                    <a:bodyPr/>
                     <a:lstStyle/>
                     <a:p>
                       <a:pPr algn="ctr">
@@ -13679,7 +14353,7 @@
                       </a:r>
                     </a:p>
                   </a:txBody>
-                  <a:tcPr marL="27432" marR="27432" marT="18288" marB="18288">
+                  <a:tcPr marL="27432" marR="27432" marT="18288" marB="18288" anchor="ctr">
                     <a:solidFill>
                       <a:srgbClr val="F4F4F4"/>
                     </a:solidFill>
@@ -13687,7 +14361,7 @@
                 </a:tc>
                 <a:tc>
                   <a:txBody>
-                    <a:bodyPr wrap="square" lIns="27432" rIns="27432" tIns="18288" bIns="18288" anchor="ctr"/>
+                    <a:bodyPr/>
                     <a:lstStyle/>
                     <a:p>
                       <a:pPr algn="ctr">
@@ -13711,7 +14385,7 @@
                       </a:r>
                     </a:p>
                   </a:txBody>
-                  <a:tcPr marL="27432" marR="27432" marT="18288" marB="18288">
+                  <a:tcPr marL="27432" marR="27432" marT="18288" marB="18288" anchor="ctr">
                     <a:solidFill>
                       <a:srgbClr val="F4F4F4"/>
                     </a:solidFill>
@@ -13719,7 +14393,7 @@
                 </a:tc>
                 <a:tc>
                   <a:txBody>
-                    <a:bodyPr wrap="square" lIns="27432" rIns="27432" tIns="18288" bIns="18288" anchor="ctr"/>
+                    <a:bodyPr/>
                     <a:lstStyle/>
                     <a:p>
                       <a:pPr algn="ctr">
@@ -13743,20 +14417,25 @@
                       </a:r>
                     </a:p>
                   </a:txBody>
-                  <a:tcPr marL="27432" marR="27432" marT="18288" marB="18288">
+                  <a:tcPr marL="27432" marR="27432" marT="18288" marB="18288" anchor="ctr">
                     <a:solidFill>
                       <a:srgbClr val="F4F4F4"/>
                     </a:solidFill>
                   </a:tcPr>
                 </a:tc>
+                <a:extLst>
+                  <a:ext uri="{0D108BD9-81ED-4DB2-BD59-A6C34878D82A}">
+                    <a16:rowId xmlns:a16="http://schemas.microsoft.com/office/drawing/2014/main" val="10002"/>
+                  </a:ext>
+                </a:extLst>
               </a:tr>
               <a:tr h="329184">
                 <a:tc>
                   <a:txBody>
-                    <a:bodyPr wrap="square" lIns="27432" rIns="27432" tIns="18288" bIns="18288" anchor="ctr"/>
-                    <a:lstStyle/>
-                    <a:p>
-                      <a:pPr algn="l">
+                    <a:bodyPr/>
+                    <a:lstStyle/>
+                    <a:p>
+                      <a:pPr algn="ctr">
                         <a:lnSpc>
                           <a:spcPct val="100000"/>
                         </a:lnSpc>
@@ -13777,7 +14456,7 @@
                       </a:r>
                     </a:p>
                   </a:txBody>
-                  <a:tcPr marL="27432" marR="27432" marT="18288" marB="18288">
+                  <a:tcPr marL="27432" marR="27432" marT="18288" marB="18288" anchor="ctr">
                     <a:solidFill>
                       <a:srgbClr val="FFFFFF"/>
                     </a:solidFill>
@@ -13785,7 +14464,7 @@
                 </a:tc>
                 <a:tc>
                   <a:txBody>
-                    <a:bodyPr wrap="square" lIns="27432" rIns="27432" tIns="18288" bIns="18288" anchor="ctr"/>
+                    <a:bodyPr/>
                     <a:lstStyle/>
                     <a:p>
                       <a:pPr algn="ctr">
@@ -13809,7 +14488,7 @@
                       </a:r>
                     </a:p>
                   </a:txBody>
-                  <a:tcPr marL="27432" marR="27432" marT="18288" marB="18288">
+                  <a:tcPr marL="27432" marR="27432" marT="18288" marB="18288" anchor="ctr">
                     <a:solidFill>
                       <a:srgbClr val="FFFFFF"/>
                     </a:solidFill>
@@ -13817,7 +14496,7 @@
                 </a:tc>
                 <a:tc>
                   <a:txBody>
-                    <a:bodyPr wrap="square" lIns="27432" rIns="27432" tIns="18288" bIns="18288" anchor="ctr"/>
+                    <a:bodyPr/>
                     <a:lstStyle/>
                     <a:p>
                       <a:pPr algn="ctr">
@@ -13841,7 +14520,7 @@
                       </a:r>
                     </a:p>
                   </a:txBody>
-                  <a:tcPr marL="27432" marR="27432" marT="18288" marB="18288">
+                  <a:tcPr marL="27432" marR="27432" marT="18288" marB="18288" anchor="ctr">
                     <a:solidFill>
                       <a:srgbClr val="FFFFFF"/>
                     </a:solidFill>
@@ -13849,7 +14528,7 @@
                 </a:tc>
                 <a:tc>
                   <a:txBody>
-                    <a:bodyPr wrap="square" lIns="27432" rIns="27432" tIns="18288" bIns="18288" anchor="ctr"/>
+                    <a:bodyPr/>
                     <a:lstStyle/>
                     <a:p>
                       <a:pPr algn="ctr">
@@ -13873,7 +14552,7 @@
                       </a:r>
                     </a:p>
                   </a:txBody>
-                  <a:tcPr marL="27432" marR="27432" marT="18288" marB="18288">
+                  <a:tcPr marL="27432" marR="27432" marT="18288" marB="18288" anchor="ctr">
                     <a:solidFill>
                       <a:srgbClr val="FFFFFF"/>
                     </a:solidFill>
@@ -13881,7 +14560,7 @@
                 </a:tc>
                 <a:tc>
                   <a:txBody>
-                    <a:bodyPr wrap="square" lIns="27432" rIns="27432" tIns="18288" bIns="18288" anchor="ctr"/>
+                    <a:bodyPr/>
                     <a:lstStyle/>
                     <a:p>
                       <a:pPr algn="ctr">
@@ -13905,20 +14584,25 @@
                       </a:r>
                     </a:p>
                   </a:txBody>
-                  <a:tcPr marL="27432" marR="27432" marT="18288" marB="18288">
+                  <a:tcPr marL="27432" marR="27432" marT="18288" marB="18288" anchor="ctr">
                     <a:solidFill>
                       <a:srgbClr val="FFFFFF"/>
                     </a:solidFill>
                   </a:tcPr>
                 </a:tc>
+                <a:extLst>
+                  <a:ext uri="{0D108BD9-81ED-4DB2-BD59-A6C34878D82A}">
+                    <a16:rowId xmlns:a16="http://schemas.microsoft.com/office/drawing/2014/main" val="10003"/>
+                  </a:ext>
+                </a:extLst>
               </a:tr>
               <a:tr h="329184">
                 <a:tc>
                   <a:txBody>
-                    <a:bodyPr wrap="square" lIns="27432" rIns="27432" tIns="18288" bIns="18288" anchor="ctr"/>
-                    <a:lstStyle/>
-                    <a:p>
-                      <a:pPr algn="l">
+                    <a:bodyPr/>
+                    <a:lstStyle/>
+                    <a:p>
+                      <a:pPr algn="ctr">
                         <a:lnSpc>
                           <a:spcPct val="100000"/>
                         </a:lnSpc>
@@ -13939,7 +14623,7 @@
                       </a:r>
                     </a:p>
                   </a:txBody>
-                  <a:tcPr marL="27432" marR="27432" marT="18288" marB="18288">
+                  <a:tcPr marL="27432" marR="27432" marT="18288" marB="18288" anchor="ctr">
                     <a:solidFill>
                       <a:srgbClr val="F4F4F4"/>
                     </a:solidFill>
@@ -13947,7 +14631,7 @@
                 </a:tc>
                 <a:tc>
                   <a:txBody>
-                    <a:bodyPr wrap="square" lIns="27432" rIns="27432" tIns="18288" bIns="18288" anchor="ctr"/>
+                    <a:bodyPr/>
                     <a:lstStyle/>
                     <a:p>
                       <a:pPr algn="ctr">
@@ -13971,7 +14655,7 @@
                       </a:r>
                     </a:p>
                   </a:txBody>
-                  <a:tcPr marL="27432" marR="27432" marT="18288" marB="18288">
+                  <a:tcPr marL="27432" marR="27432" marT="18288" marB="18288" anchor="ctr">
                     <a:solidFill>
                       <a:srgbClr val="F4F4F4"/>
                     </a:solidFill>
@@ -13979,7 +14663,7 @@
                 </a:tc>
                 <a:tc>
                   <a:txBody>
-                    <a:bodyPr wrap="square" lIns="27432" rIns="27432" tIns="18288" bIns="18288" anchor="ctr"/>
+                    <a:bodyPr/>
                     <a:lstStyle/>
                     <a:p>
                       <a:pPr algn="ctr">
@@ -14003,7 +14687,7 @@
                       </a:r>
                     </a:p>
                   </a:txBody>
-                  <a:tcPr marL="27432" marR="27432" marT="18288" marB="18288">
+                  <a:tcPr marL="27432" marR="27432" marT="18288" marB="18288" anchor="ctr">
                     <a:solidFill>
                       <a:srgbClr val="F4F4F4"/>
                     </a:solidFill>
@@ -14011,7 +14695,7 @@
                 </a:tc>
                 <a:tc>
                   <a:txBody>
-                    <a:bodyPr wrap="square" lIns="27432" rIns="27432" tIns="18288" bIns="18288" anchor="ctr"/>
+                    <a:bodyPr/>
                     <a:lstStyle/>
                     <a:p>
                       <a:pPr algn="ctr">
@@ -14035,7 +14719,7 @@
                       </a:r>
                     </a:p>
                   </a:txBody>
-                  <a:tcPr marL="27432" marR="27432" marT="18288" marB="18288">
+                  <a:tcPr marL="27432" marR="27432" marT="18288" marB="18288" anchor="ctr">
                     <a:solidFill>
                       <a:srgbClr val="F4F4F4"/>
                     </a:solidFill>
@@ -14043,7 +14727,7 @@
                 </a:tc>
                 <a:tc>
                   <a:txBody>
-                    <a:bodyPr wrap="square" lIns="27432" rIns="27432" tIns="18288" bIns="18288" anchor="ctr"/>
+                    <a:bodyPr/>
                     <a:lstStyle/>
                     <a:p>
                       <a:pPr algn="ctr">
@@ -14067,20 +14751,25 @@
                       </a:r>
                     </a:p>
                   </a:txBody>
-                  <a:tcPr marL="27432" marR="27432" marT="18288" marB="18288">
+                  <a:tcPr marL="27432" marR="27432" marT="18288" marB="18288" anchor="ctr">
                     <a:solidFill>
                       <a:srgbClr val="F4F4F4"/>
                     </a:solidFill>
                   </a:tcPr>
                 </a:tc>
+                <a:extLst>
+                  <a:ext uri="{0D108BD9-81ED-4DB2-BD59-A6C34878D82A}">
+                    <a16:rowId xmlns:a16="http://schemas.microsoft.com/office/drawing/2014/main" val="10004"/>
+                  </a:ext>
+                </a:extLst>
               </a:tr>
               <a:tr h="329184">
                 <a:tc>
                   <a:txBody>
-                    <a:bodyPr wrap="square" lIns="27432" rIns="27432" tIns="18288" bIns="18288" anchor="ctr"/>
-                    <a:lstStyle/>
-                    <a:p>
-                      <a:pPr algn="l">
+                    <a:bodyPr/>
+                    <a:lstStyle/>
+                    <a:p>
+                      <a:pPr algn="ctr">
                         <a:lnSpc>
                           <a:spcPct val="100000"/>
                         </a:lnSpc>
@@ -14101,7 +14790,7 @@
                       </a:r>
                     </a:p>
                   </a:txBody>
-                  <a:tcPr marL="27432" marR="27432" marT="18288" marB="18288">
+                  <a:tcPr marL="27432" marR="27432" marT="18288" marB="18288" anchor="ctr">
                     <a:solidFill>
                       <a:srgbClr val="FFFFFF"/>
                     </a:solidFill>
@@ -14109,7 +14798,7 @@
                 </a:tc>
                 <a:tc>
                   <a:txBody>
-                    <a:bodyPr wrap="square" lIns="27432" rIns="27432" tIns="18288" bIns="18288" anchor="ctr"/>
+                    <a:bodyPr/>
                     <a:lstStyle/>
                     <a:p>
                       <a:pPr algn="ctr">
@@ -14133,7 +14822,7 @@
                       </a:r>
                     </a:p>
                   </a:txBody>
-                  <a:tcPr marL="27432" marR="27432" marT="18288" marB="18288">
+                  <a:tcPr marL="27432" marR="27432" marT="18288" marB="18288" anchor="ctr">
                     <a:solidFill>
                       <a:srgbClr val="FFFFFF"/>
                     </a:solidFill>
@@ -14141,7 +14830,7 @@
                 </a:tc>
                 <a:tc>
                   <a:txBody>
-                    <a:bodyPr wrap="square" lIns="27432" rIns="27432" tIns="18288" bIns="18288" anchor="ctr"/>
+                    <a:bodyPr/>
                     <a:lstStyle/>
                     <a:p>
                       <a:pPr algn="ctr">
@@ -14165,7 +14854,7 @@
                       </a:r>
                     </a:p>
                   </a:txBody>
-                  <a:tcPr marL="27432" marR="27432" marT="18288" marB="18288">
+                  <a:tcPr marL="27432" marR="27432" marT="18288" marB="18288" anchor="ctr">
                     <a:solidFill>
                       <a:srgbClr val="FFFFFF"/>
                     </a:solidFill>
@@ -14173,7 +14862,7 @@
                 </a:tc>
                 <a:tc>
                   <a:txBody>
-                    <a:bodyPr wrap="square" lIns="27432" rIns="27432" tIns="18288" bIns="18288" anchor="ctr"/>
+                    <a:bodyPr/>
                     <a:lstStyle/>
                     <a:p>
                       <a:pPr algn="ctr">
@@ -14197,7 +14886,7 @@
                       </a:r>
                     </a:p>
                   </a:txBody>
-                  <a:tcPr marL="27432" marR="27432" marT="18288" marB="18288">
+                  <a:tcPr marL="27432" marR="27432" marT="18288" marB="18288" anchor="ctr">
                     <a:solidFill>
                       <a:srgbClr val="FFFFFF"/>
                     </a:solidFill>
@@ -14205,7 +14894,7 @@
                 </a:tc>
                 <a:tc>
                   <a:txBody>
-                    <a:bodyPr wrap="square" lIns="27432" rIns="27432" tIns="18288" bIns="18288" anchor="ctr"/>
+                    <a:bodyPr/>
                     <a:lstStyle/>
                     <a:p>
                       <a:pPr algn="ctr">
@@ -14229,20 +14918,25 @@
                       </a:r>
                     </a:p>
                   </a:txBody>
-                  <a:tcPr marL="27432" marR="27432" marT="18288" marB="18288">
+                  <a:tcPr marL="27432" marR="27432" marT="18288" marB="18288" anchor="ctr">
                     <a:solidFill>
                       <a:srgbClr val="FFFFFF"/>
                     </a:solidFill>
                   </a:tcPr>
                 </a:tc>
+                <a:extLst>
+                  <a:ext uri="{0D108BD9-81ED-4DB2-BD59-A6C34878D82A}">
+                    <a16:rowId xmlns:a16="http://schemas.microsoft.com/office/drawing/2014/main" val="10005"/>
+                  </a:ext>
+                </a:extLst>
               </a:tr>
               <a:tr h="329184">
                 <a:tc>
                   <a:txBody>
-                    <a:bodyPr wrap="square" lIns="27432" rIns="27432" tIns="18288" bIns="18288" anchor="ctr"/>
-                    <a:lstStyle/>
-                    <a:p>
-                      <a:pPr algn="l">
+                    <a:bodyPr/>
+                    <a:lstStyle/>
+                    <a:p>
+                      <a:pPr algn="ctr">
                         <a:lnSpc>
                           <a:spcPct val="100000"/>
                         </a:lnSpc>
@@ -14263,7 +14957,7 @@
                       </a:r>
                     </a:p>
                   </a:txBody>
-                  <a:tcPr marL="27432" marR="27432" marT="18288" marB="18288">
+                  <a:tcPr marL="27432" marR="27432" marT="18288" marB="18288" anchor="ctr">
                     <a:solidFill>
                       <a:srgbClr val="F4F4F4"/>
                     </a:solidFill>
@@ -14271,7 +14965,7 @@
                 </a:tc>
                 <a:tc>
                   <a:txBody>
-                    <a:bodyPr wrap="square" lIns="27432" rIns="27432" tIns="18288" bIns="18288" anchor="ctr"/>
+                    <a:bodyPr/>
                     <a:lstStyle/>
                     <a:p>
                       <a:pPr algn="ctr">
@@ -14295,7 +14989,7 @@
                       </a:r>
                     </a:p>
                   </a:txBody>
-                  <a:tcPr marL="27432" marR="27432" marT="18288" marB="18288">
+                  <a:tcPr marL="27432" marR="27432" marT="18288" marB="18288" anchor="ctr">
                     <a:solidFill>
                       <a:srgbClr val="F4F4F4"/>
                     </a:solidFill>
@@ -14303,7 +14997,7 @@
                 </a:tc>
                 <a:tc>
                   <a:txBody>
-                    <a:bodyPr wrap="square" lIns="27432" rIns="27432" tIns="18288" bIns="18288" anchor="ctr"/>
+                    <a:bodyPr/>
                     <a:lstStyle/>
                     <a:p>
                       <a:pPr algn="ctr">
@@ -14327,7 +15021,7 @@
                       </a:r>
                     </a:p>
                   </a:txBody>
-                  <a:tcPr marL="27432" marR="27432" marT="18288" marB="18288">
+                  <a:tcPr marL="27432" marR="27432" marT="18288" marB="18288" anchor="ctr">
                     <a:solidFill>
                       <a:srgbClr val="F4F4F4"/>
                     </a:solidFill>
@@ -14335,7 +15029,7 @@
                 </a:tc>
                 <a:tc>
                   <a:txBody>
-                    <a:bodyPr wrap="square" lIns="27432" rIns="27432" tIns="18288" bIns="18288" anchor="ctr"/>
+                    <a:bodyPr/>
                     <a:lstStyle/>
                     <a:p>
                       <a:pPr algn="ctr">
@@ -14359,7 +15053,7 @@
                       </a:r>
                     </a:p>
                   </a:txBody>
-                  <a:tcPr marL="27432" marR="27432" marT="18288" marB="18288">
+                  <a:tcPr marL="27432" marR="27432" marT="18288" marB="18288" anchor="ctr">
                     <a:solidFill>
                       <a:srgbClr val="F4F4F4"/>
                     </a:solidFill>
@@ -14367,7 +15061,7 @@
                 </a:tc>
                 <a:tc>
                   <a:txBody>
-                    <a:bodyPr wrap="square" lIns="27432" rIns="27432" tIns="18288" bIns="18288" anchor="ctr"/>
+                    <a:bodyPr/>
                     <a:lstStyle/>
                     <a:p>
                       <a:pPr algn="ctr">
@@ -14391,20 +15085,25 @@
                       </a:r>
                     </a:p>
                   </a:txBody>
-                  <a:tcPr marL="27432" marR="27432" marT="18288" marB="18288">
+                  <a:tcPr marL="27432" marR="27432" marT="18288" marB="18288" anchor="ctr">
                     <a:solidFill>
                       <a:srgbClr val="F4F4F4"/>
                     </a:solidFill>
                   </a:tcPr>
                 </a:tc>
+                <a:extLst>
+                  <a:ext uri="{0D108BD9-81ED-4DB2-BD59-A6C34878D82A}">
+                    <a16:rowId xmlns:a16="http://schemas.microsoft.com/office/drawing/2014/main" val="10006"/>
+                  </a:ext>
+                </a:extLst>
               </a:tr>
               <a:tr h="329184">
                 <a:tc>
                   <a:txBody>
-                    <a:bodyPr wrap="square" lIns="27432" rIns="27432" tIns="18288" bIns="18288" anchor="ctr"/>
-                    <a:lstStyle/>
-                    <a:p>
-                      <a:pPr algn="l">
+                    <a:bodyPr/>
+                    <a:lstStyle/>
+                    <a:p>
+                      <a:pPr algn="ctr">
                         <a:lnSpc>
                           <a:spcPct val="100000"/>
                         </a:lnSpc>
@@ -14425,7 +15124,7 @@
                       </a:r>
                     </a:p>
                   </a:txBody>
-                  <a:tcPr marL="27432" marR="27432" marT="18288" marB="18288">
+                  <a:tcPr marL="27432" marR="27432" marT="18288" marB="18288" anchor="ctr">
                     <a:solidFill>
                       <a:srgbClr val="FFFFFF"/>
                     </a:solidFill>
@@ -14433,7 +15132,7 @@
                 </a:tc>
                 <a:tc>
                   <a:txBody>
-                    <a:bodyPr wrap="square" lIns="27432" rIns="27432" tIns="18288" bIns="18288" anchor="ctr"/>
+                    <a:bodyPr/>
                     <a:lstStyle/>
                     <a:p>
                       <a:pPr algn="ctr">
@@ -14457,7 +15156,7 @@
                       </a:r>
                     </a:p>
                   </a:txBody>
-                  <a:tcPr marL="27432" marR="27432" marT="18288" marB="18288">
+                  <a:tcPr marL="27432" marR="27432" marT="18288" marB="18288" anchor="ctr">
                     <a:solidFill>
                       <a:srgbClr val="FFFFFF"/>
                     </a:solidFill>
@@ -14465,7 +15164,7 @@
                 </a:tc>
                 <a:tc>
                   <a:txBody>
-                    <a:bodyPr wrap="square" lIns="27432" rIns="27432" tIns="18288" bIns="18288" anchor="ctr"/>
+                    <a:bodyPr/>
                     <a:lstStyle/>
                     <a:p>
                       <a:pPr algn="ctr">
@@ -14489,7 +15188,7 @@
                       </a:r>
                     </a:p>
                   </a:txBody>
-                  <a:tcPr marL="27432" marR="27432" marT="18288" marB="18288">
+                  <a:tcPr marL="27432" marR="27432" marT="18288" marB="18288" anchor="ctr">
                     <a:solidFill>
                       <a:srgbClr val="FFFFFF"/>
                     </a:solidFill>
@@ -14497,7 +15196,7 @@
                 </a:tc>
                 <a:tc>
                   <a:txBody>
-                    <a:bodyPr wrap="square" lIns="27432" rIns="27432" tIns="18288" bIns="18288" anchor="ctr"/>
+                    <a:bodyPr/>
                     <a:lstStyle/>
                     <a:p>
                       <a:pPr algn="ctr">
@@ -14521,7 +15220,7 @@
                       </a:r>
                     </a:p>
                   </a:txBody>
-                  <a:tcPr marL="27432" marR="27432" marT="18288" marB="18288">
+                  <a:tcPr marL="27432" marR="27432" marT="18288" marB="18288" anchor="ctr">
                     <a:solidFill>
                       <a:srgbClr val="FFFFFF"/>
                     </a:solidFill>
@@ -14529,7 +15228,7 @@
                 </a:tc>
                 <a:tc>
                   <a:txBody>
-                    <a:bodyPr wrap="square" lIns="27432" rIns="27432" tIns="18288" bIns="18288" anchor="ctr"/>
+                    <a:bodyPr/>
                     <a:lstStyle/>
                     <a:p>
                       <a:pPr algn="ctr">
@@ -14553,20 +15252,25 @@
                       </a:r>
                     </a:p>
                   </a:txBody>
-                  <a:tcPr marL="27432" marR="27432" marT="18288" marB="18288">
+                  <a:tcPr marL="27432" marR="27432" marT="18288" marB="18288" anchor="ctr">
                     <a:solidFill>
                       <a:srgbClr val="FFFFFF"/>
                     </a:solidFill>
                   </a:tcPr>
                 </a:tc>
+                <a:extLst>
+                  <a:ext uri="{0D108BD9-81ED-4DB2-BD59-A6C34878D82A}">
+                    <a16:rowId xmlns:a16="http://schemas.microsoft.com/office/drawing/2014/main" val="10007"/>
+                  </a:ext>
+                </a:extLst>
               </a:tr>
               <a:tr h="329184">
                 <a:tc>
                   <a:txBody>
-                    <a:bodyPr wrap="square" lIns="27432" rIns="27432" tIns="18288" bIns="18288" anchor="ctr"/>
-                    <a:lstStyle/>
-                    <a:p>
-                      <a:pPr algn="l">
+                    <a:bodyPr/>
+                    <a:lstStyle/>
+                    <a:p>
+                      <a:pPr algn="ctr">
                         <a:lnSpc>
                           <a:spcPct val="100000"/>
                         </a:lnSpc>
@@ -14587,7 +15291,7 @@
                       </a:r>
                     </a:p>
                   </a:txBody>
-                  <a:tcPr marL="27432" marR="27432" marT="18288" marB="18288">
+                  <a:tcPr marL="27432" marR="27432" marT="18288" marB="18288" anchor="ctr">
                     <a:solidFill>
                       <a:srgbClr val="F4F4F4"/>
                     </a:solidFill>
@@ -14595,7 +15299,7 @@
                 </a:tc>
                 <a:tc>
                   <a:txBody>
-                    <a:bodyPr wrap="square" lIns="27432" rIns="27432" tIns="18288" bIns="18288" anchor="ctr"/>
+                    <a:bodyPr/>
                     <a:lstStyle/>
                     <a:p>
                       <a:pPr algn="ctr">
@@ -14619,7 +15323,7 @@
                       </a:r>
                     </a:p>
                   </a:txBody>
-                  <a:tcPr marL="27432" marR="27432" marT="18288" marB="18288">
+                  <a:tcPr marL="27432" marR="27432" marT="18288" marB="18288" anchor="ctr">
                     <a:solidFill>
                       <a:srgbClr val="F4F4F4"/>
                     </a:solidFill>
@@ -14627,7 +15331,7 @@
                 </a:tc>
                 <a:tc>
                   <a:txBody>
-                    <a:bodyPr wrap="square" lIns="27432" rIns="27432" tIns="18288" bIns="18288" anchor="ctr"/>
+                    <a:bodyPr/>
                     <a:lstStyle/>
                     <a:p>
                       <a:pPr algn="ctr">
@@ -14651,7 +15355,7 @@
                       </a:r>
                     </a:p>
                   </a:txBody>
-                  <a:tcPr marL="27432" marR="27432" marT="18288" marB="18288">
+                  <a:tcPr marL="27432" marR="27432" marT="18288" marB="18288" anchor="ctr">
                     <a:solidFill>
                       <a:srgbClr val="F4F4F4"/>
                     </a:solidFill>
@@ -14659,7 +15363,7 @@
                 </a:tc>
                 <a:tc>
                   <a:txBody>
-                    <a:bodyPr wrap="square" lIns="27432" rIns="27432" tIns="18288" bIns="18288" anchor="ctr"/>
+                    <a:bodyPr/>
                     <a:lstStyle/>
                     <a:p>
                       <a:pPr algn="ctr">
@@ -14683,7 +15387,7 @@
                       </a:r>
                     </a:p>
                   </a:txBody>
-                  <a:tcPr marL="27432" marR="27432" marT="18288" marB="18288">
+                  <a:tcPr marL="27432" marR="27432" marT="18288" marB="18288" anchor="ctr">
                     <a:solidFill>
                       <a:srgbClr val="F4F4F4"/>
                     </a:solidFill>
@@ -14691,7 +15395,7 @@
                 </a:tc>
                 <a:tc>
                   <a:txBody>
-                    <a:bodyPr wrap="square" lIns="27432" rIns="27432" tIns="18288" bIns="18288" anchor="ctr"/>
+                    <a:bodyPr/>
                     <a:lstStyle/>
                     <a:p>
                       <a:pPr algn="ctr">
@@ -14715,12 +15419,17 @@
                       </a:r>
                     </a:p>
                   </a:txBody>
-                  <a:tcPr marL="27432" marR="27432" marT="18288" marB="18288">
+                  <a:tcPr marL="27432" marR="27432" marT="18288" marB="18288" anchor="ctr">
                     <a:solidFill>
                       <a:srgbClr val="F4F4F4"/>
                     </a:solidFill>
                   </a:tcPr>
                 </a:tc>
+                <a:extLst>
+                  <a:ext uri="{0D108BD9-81ED-4DB2-BD59-A6C34878D82A}">
+                    <a16:rowId xmlns:a16="http://schemas.microsoft.com/office/drawing/2014/main" val="10008"/>
+                  </a:ext>
+                </a:extLst>
               </a:tr>
             </a:tbl>
           </a:graphicData>
@@ -14735,7 +15444,7 @@
         <p:spPr>
           <a:xfrm>
             <a:off x="6053328" y="1234440"/>
-            <a:ext cx="2560320" cy="2743200"/>
+            <a:ext cx="2792960" cy="2743200"/>
           </a:xfrm>
           <a:prstGeom prst="rect">
             <a:avLst/>
@@ -14743,7 +15452,7 @@
           <a:noFill/>
         </p:spPr>
         <p:txBody>
-          <a:bodyPr wrap="square" lIns="27432" rIns="27432" tIns="18288" bIns="18288"/>
+          <a:bodyPr wrap="square" lIns="27432" tIns="18288" rIns="27432" bIns="18288"/>
           <a:lstStyle/>
           <a:p>
             <a:pPr algn="l">
@@ -14805,7 +15514,65 @@
                 <a:ea typeface="メイリオ"/>
                 <a:cs typeface="Times New Roman"/>
               </a:rPr>
-              <a:t>・AD外だけの順位は「追加確認の観点」として読む</a:t>
+              <a:t>・AD外だけの順位は</a:t>
+            </a:r>
+            <a:endParaRPr lang="en-US" sz="1800" b="0">
+              <a:solidFill>
+                <a:srgbClr val="000000"/>
+              </a:solidFill>
+              <a:latin typeface="Times New Roman"/>
+              <a:ea typeface="メイリオ"/>
+              <a:cs typeface="Times New Roman"/>
+            </a:endParaRPr>
+          </a:p>
+          <a:p>
+            <a:pPr algn="l">
+              <a:lnSpc>
+                <a:spcPct val="100000"/>
+              </a:lnSpc>
+              <a:spcAft>
+                <a:spcPts val="200"/>
+              </a:spcAft>
+            </a:pPr>
+            <a:r>
+              <a:rPr sz="1800" b="0">
+                <a:solidFill>
+                  <a:srgbClr val="000000"/>
+                </a:solidFill>
+                <a:latin typeface="Times New Roman"/>
+                <a:ea typeface="メイリオ"/>
+                <a:cs typeface="Times New Roman"/>
+              </a:rPr>
+              <a:t>「追加確認の観点」</a:t>
+            </a:r>
+            <a:endParaRPr lang="en-US" sz="1800" b="0">
+              <a:solidFill>
+                <a:srgbClr val="000000"/>
+              </a:solidFill>
+              <a:latin typeface="Times New Roman"/>
+              <a:ea typeface="メイリオ"/>
+              <a:cs typeface="Times New Roman"/>
+            </a:endParaRPr>
+          </a:p>
+          <a:p>
+            <a:pPr algn="l">
+              <a:lnSpc>
+                <a:spcPct val="100000"/>
+              </a:lnSpc>
+              <a:spcAft>
+                <a:spcPts val="200"/>
+              </a:spcAft>
+            </a:pPr>
+            <a:r>
+              <a:rPr sz="1800" b="0">
+                <a:solidFill>
+                  <a:srgbClr val="000000"/>
+                </a:solidFill>
+                <a:latin typeface="Times New Roman"/>
+                <a:ea typeface="メイリオ"/>
+                <a:cs typeface="Times New Roman"/>
+              </a:rPr>
+              <a:t>として読む</a:t>
             </a:r>
           </a:p>
         </p:txBody>
@@ -14827,7 +15594,7 @@
           <a:noFill/>
         </p:spPr>
         <p:txBody>
-          <a:bodyPr wrap="square" lIns="27432" rIns="27432" tIns="18288" bIns="18288"/>
+          <a:bodyPr wrap="square" lIns="27432" tIns="18288" rIns="27432" bIns="18288"/>
           <a:lstStyle/>
           <a:p>
             <a:pPr algn="ctr">
@@ -14869,7 +15636,7 @@
           <a:noFill/>
         </p:spPr>
         <p:txBody>
-          <a:bodyPr wrap="square" lIns="27432" rIns="27432" tIns="18288" bIns="18288"/>
+          <a:bodyPr wrap="square" lIns="27432" tIns="18288" rIns="27432" bIns="18288"/>
           <a:lstStyle/>
           <a:p>
             <a:pPr algn="l">
@@ -14903,7 +15670,7 @@
 </file>
 
 <file path=ppt/slides/slide9.xml><?xml version="1.0" encoding="utf-8"?>
-<p:sld xmlns:a="http://schemas.openxmlformats.org/drawingml/2006/main" xmlns:p="http://schemas.openxmlformats.org/presentationml/2006/main" xmlns:r="http://schemas.openxmlformats.org/officeDocument/2006/relationships">
+<p:sld xmlns:a="http://schemas.openxmlformats.org/drawingml/2006/main" xmlns:r="http://schemas.openxmlformats.org/officeDocument/2006/relationships" xmlns:p="http://schemas.openxmlformats.org/presentationml/2006/main">
   <p:cSld>
     <p:spTree>
       <p:nvGrpSpPr>
@@ -14911,7 +15678,14 @@
         <p:cNvGrpSpPr/>
         <p:nvPr/>
       </p:nvGrpSpPr>
-      <p:grpSpPr/>
+      <p:grpSpPr>
+        <a:xfrm>
+          <a:off x="0" y="0"/>
+          <a:ext cx="0" cy="0"/>
+          <a:chOff x="0" y="0"/>
+          <a:chExt cx="0" cy="0"/>
+        </a:xfrm>
+      </p:grpSpPr>
       <p:sp>
         <p:nvSpPr>
           <p:cNvPr id="2" name="TextBox 1"/>
@@ -14929,7 +15703,7 @@
           <a:noFill/>
         </p:spPr>
         <p:txBody>
-          <a:bodyPr wrap="square" anchor="t" lIns="0" rIns="0" tIns="0" bIns="0">
+          <a:bodyPr wrap="square" lIns="0" tIns="0" rIns="0" bIns="0" anchor="t">
             <a:spAutoFit/>
           </a:bodyPr>
           <a:lstStyle/>
@@ -14998,6 +15772,7 @@
           <a:lstStyle/>
           <a:p>
             <a:pPr algn="ctr"/>
+            <a:endParaRPr/>
           </a:p>
         </p:txBody>
       </p:sp>
@@ -15043,6 +15818,7 @@
           <a:lstStyle/>
           <a:p>
             <a:pPr algn="ctr"/>
+            <a:endParaRPr/>
           </a:p>
         </p:txBody>
       </p:sp>
@@ -15078,8 +15854,8 @@
         </p:nvSpPr>
         <p:spPr>
           <a:xfrm>
-            <a:off x="5623560" y="1170432"/>
-            <a:ext cx="2880360" cy="3063240"/>
+            <a:off x="5623559" y="1170432"/>
+            <a:ext cx="3318421" cy="2272417"/>
           </a:xfrm>
           <a:prstGeom prst="rect">
             <a:avLst/>
@@ -15087,7 +15863,7 @@
           <a:noFill/>
         </p:spPr>
         <p:txBody>
-          <a:bodyPr wrap="square" anchor="t" lIns="27432" rIns="27432" tIns="27432" bIns="27432">
+          <a:bodyPr wrap="square" lIns="27432" tIns="27432" rIns="27432" bIns="27432" anchor="t">
             <a:spAutoFit/>
           </a:bodyPr>
           <a:lstStyle/>
@@ -15109,7 +15885,36 @@
                 <a:ea typeface="メイリオ"/>
                 <a:cs typeface="Times New Roman"/>
               </a:rPr>
-              <a:t>・ 横軸はAD判定に使った kNN 平均距離</a:t>
+              <a:t>・ 横軸はAD判定に使った</a:t>
+            </a:r>
+            <a:endParaRPr lang="en-US" sz="1800" b="0">
+              <a:solidFill>
+                <a:srgbClr val="000000"/>
+              </a:solidFill>
+              <a:latin typeface="Times New Roman"/>
+              <a:ea typeface="メイリオ"/>
+              <a:cs typeface="Times New Roman"/>
+            </a:endParaRPr>
+          </a:p>
+          <a:p>
+            <a:pPr algn="l">
+              <a:lnSpc>
+                <a:spcPct val="108000"/>
+              </a:lnSpc>
+              <a:spcAft>
+                <a:spcPts val="200"/>
+              </a:spcAft>
+            </a:pPr>
+            <a:r>
+              <a:rPr sz="1800" b="0">
+                <a:solidFill>
+                  <a:srgbClr val="000000"/>
+                </a:solidFill>
+                <a:latin typeface="Times New Roman"/>
+                <a:ea typeface="メイリオ"/>
+                <a:cs typeface="Times New Roman"/>
+              </a:rPr>
+              <a:t> kNN 平均距離</a:t>
             </a:r>
           </a:p>
           <a:p>
@@ -15151,7 +15956,36 @@
                 <a:ea typeface="メイリオ"/>
                 <a:cs typeface="Times New Roman"/>
               </a:rPr>
-              <a:t>・ 同じAD外点でも、誤差の大きさはモデルによって異なる</a:t>
+              <a:t>・ 同じAD外点でも、誤差の</a:t>
+            </a:r>
+            <a:endParaRPr lang="en-US" sz="1800" b="0">
+              <a:solidFill>
+                <a:srgbClr val="000000"/>
+              </a:solidFill>
+              <a:latin typeface="Times New Roman"/>
+              <a:ea typeface="メイリオ"/>
+              <a:cs typeface="Times New Roman"/>
+            </a:endParaRPr>
+          </a:p>
+          <a:p>
+            <a:pPr algn="l">
+              <a:lnSpc>
+                <a:spcPct val="108000"/>
+              </a:lnSpc>
+              <a:spcAft>
+                <a:spcPts val="200"/>
+              </a:spcAft>
+            </a:pPr>
+            <a:r>
+              <a:rPr sz="1800" b="0">
+                <a:solidFill>
+                  <a:srgbClr val="000000"/>
+                </a:solidFill>
+                <a:latin typeface="Times New Roman"/>
+                <a:ea typeface="メイリオ"/>
+                <a:cs typeface="Times New Roman"/>
+              </a:rPr>
+              <a:t>大きさはモデルによって異なる</a:t>
             </a:r>
           </a:p>
           <a:p>
@@ -15185,8 +16019,8 @@
         </p:nvSpPr>
         <p:spPr>
           <a:xfrm>
-            <a:off x="5623560" y="4608576"/>
-            <a:ext cx="2880360" cy="640080"/>
+            <a:off x="5623559" y="4608576"/>
+            <a:ext cx="3201463" cy="928972"/>
           </a:xfrm>
           <a:prstGeom prst="rect">
             <a:avLst/>
@@ -15194,7 +16028,7 @@
           <a:noFill/>
         </p:spPr>
         <p:txBody>
-          <a:bodyPr wrap="square" anchor="t" lIns="18288" rIns="18288" tIns="18288" bIns="18288">
+          <a:bodyPr wrap="square" lIns="18288" tIns="18288" rIns="18288" bIns="18288" anchor="t">
             <a:spAutoFit/>
           </a:bodyPr>
           <a:lstStyle/>
@@ -15238,7 +16072,7 @@
           <a:noFill/>
         </p:spPr>
         <p:txBody>
-          <a:bodyPr wrap="square" anchor="t" lIns="0" rIns="0" tIns="0" bIns="0">
+          <a:bodyPr wrap="square" lIns="0" tIns="0" rIns="0" bIns="0" anchor="t">
             <a:spAutoFit/>
           </a:bodyPr>
           <a:lstStyle/>
